--- a/preview_v7/cn/l-cn-bs-u2-2.pptx
+++ b/preview_v7/cn/l-cn-bs-u2-2.pptx
@@ -3140,31 +3140,47 @@
           </a:p>
         </p:txBody>
       </p:sp>
-      <p:pic>
-        <p:nvPicPr>
-          <p:cNvPr id="3" name="Picture 2" descr="zhang_binggui.jpg"/>
-          <p:cNvPicPr>
-            <a:picLocks noChangeAspect="1"/>
-          </p:cNvPicPr>
-          <p:nvPr/>
-        </p:nvPicPr>
-        <p:blipFill>
-          <a:blip r:embed="rId2"/>
-          <a:srcRect t="26516" b="26516"/>
-          <a:stretch>
-            <a:fillRect/>
-          </a:stretch>
-        </p:blipFill>
-        <p:spPr>
-          <a:xfrm>
-            <a:off x="0" y="0"/>
-            <a:ext cx="12191695" cy="6858000"/>
-          </a:xfrm>
-          <a:prstGeom prst="rect">
-            <a:avLst/>
-          </a:prstGeom>
-        </p:spPr>
-      </p:pic>
+      <p:sp>
+        <p:nvSpPr>
+          <p:cNvPr id="3" name="TextBox 2"/>
+          <p:cNvSpPr txBox="1"/>
+          <p:nvPr/>
+        </p:nvSpPr>
+        <p:spPr>
+          <a:xfrm>
+            <a:off x="640080" y="640080"/>
+            <a:ext cx="10911535" cy="502920"/>
+          </a:xfrm>
+          <a:prstGeom prst="rect">
+            <a:avLst/>
+          </a:prstGeom>
+          <a:noFill/>
+        </p:spPr>
+        <p:txBody>
+          <a:bodyPr wrap="square" anchor="t" lIns="0" rIns="0" tIns="0" bIns="0">
+            <a:spAutoFit/>
+          </a:bodyPr>
+          <a:lstStyle/>
+          <a:p>
+            <a:pPr algn="l">
+              <a:spcAft>
+                <a:spcPts val="0"/>
+              </a:spcAft>
+            </a:pPr>
+            <a:r>
+              <a:rPr sz="1200" b="1">
+                <a:solidFill>
+                  <a:srgbClr val="B23A2A"/>
+                </a:solidFill>
+                <a:latin typeface="微软雅黑"/>
+                <a:ea typeface="微软雅黑"/>
+                <a:cs typeface="微软雅黑"/>
+              </a:rPr>
+              <a:t>语文 · 必修上册 · 第2单元 劳动光荣</a:t>
+            </a:r>
+          </a:p>
+        </p:txBody>
+      </p:sp>
       <p:sp>
         <p:nvSpPr>
           <p:cNvPr id="4" name="Rectangle 3"/>
@@ -3173,16 +3189,14 @@
         </p:nvSpPr>
         <p:spPr>
           <a:xfrm>
-            <a:off x="0" y="0"/>
-            <a:ext cx="12191695" cy="6858000"/>
+            <a:off x="640080" y="1207008"/>
+            <a:ext cx="822960" cy="30480"/>
           </a:xfrm>
           <a:prstGeom prst="rect">
             <a:avLst/>
           </a:prstGeom>
           <a:solidFill>
-            <a:srgbClr val="1C2A33">
-              <a:alpha val="50000"/>
-            </a:srgbClr>
+            <a:srgbClr val="B23A2A"/>
           </a:solidFill>
           <a:ln>
             <a:noFill/>
@@ -3213,14 +3227,92 @@
       </p:sp>
       <p:sp>
         <p:nvSpPr>
-          <p:cNvPr id="5" name="Rectangle 4"/>
+          <p:cNvPr id="5" name="TextBox 4"/>
+          <p:cNvSpPr txBox="1"/>
+          <p:nvPr/>
+        </p:nvSpPr>
+        <p:spPr>
+          <a:xfrm>
+            <a:off x="640080" y="1737360"/>
+            <a:ext cx="10911535" cy="2011680"/>
+          </a:xfrm>
+          <a:prstGeom prst="rect">
+            <a:avLst/>
+          </a:prstGeom>
+          <a:noFill/>
+        </p:spPr>
+        <p:txBody>
+          <a:bodyPr wrap="square" anchor="t" lIns="0" rIns="0" tIns="0" bIns="0">
+            <a:spAutoFit/>
+          </a:bodyPr>
+          <a:lstStyle/>
+          <a:p>
+            <a:pPr algn="l">
+              <a:lnSpc>
+                <a:spcPct val="115000"/>
+              </a:lnSpc>
+            </a:pPr>
+            <a:r>
+              <a:rPr sz="4000" b="1">
+                <a:solidFill>
+                  <a:srgbClr val="1C2A33"/>
+                </a:solidFill>
+                <a:latin typeface="楷体"/>
+                <a:ea typeface="楷体"/>
+                <a:cs typeface="楷体"/>
+              </a:rPr>
+              <a:t>实用文本阅读（下）——心有一团火·"探界者"钟扬 群文比较</a:t>
+            </a:r>
+          </a:p>
+        </p:txBody>
+      </p:sp>
+      <p:sp>
+        <p:nvSpPr>
+          <p:cNvPr id="6" name="TextBox 5"/>
+          <p:cNvSpPr txBox="1"/>
+          <p:nvPr/>
+        </p:nvSpPr>
+        <p:spPr>
+          <a:xfrm>
+            <a:off x="640080" y="3840480"/>
+            <a:ext cx="10911535" cy="457200"/>
+          </a:xfrm>
+          <a:prstGeom prst="rect">
+            <a:avLst/>
+          </a:prstGeom>
+          <a:noFill/>
+        </p:spPr>
+        <p:txBody>
+          <a:bodyPr wrap="square" anchor="t" lIns="0" rIns="0" tIns="0" bIns="0">
+            <a:spAutoFit/>
+          </a:bodyPr>
+          <a:lstStyle/>
+          <a:p>
+            <a:pPr algn="l"/>
+            <a:r>
+              <a:rPr sz="1700" b="1">
+                <a:solidFill>
+                  <a:srgbClr val="B23A2A"/>
+                </a:solidFill>
+                <a:latin typeface="微软雅黑"/>
+                <a:ea typeface="微软雅黑"/>
+                <a:cs typeface="微软雅黑"/>
+              </a:rPr>
+              <a:t>群文阅读  ·  第2课时  ·  45分钟</a:t>
+            </a:r>
+          </a:p>
+        </p:txBody>
+      </p:sp>
+      <p:sp>
+        <p:nvSpPr>
+          <p:cNvPr id="7" name="Rectangle 6"/>
           <p:cNvSpPr/>
           <p:nvPr/>
         </p:nvSpPr>
         <p:spPr>
           <a:xfrm>
-            <a:off x="640080" y="1005840"/>
-            <a:ext cx="822960" cy="38100"/>
+            <a:off x="640080" y="5394960"/>
+            <a:ext cx="2011680" cy="33020"/>
           </a:xfrm>
           <a:prstGeom prst="rect">
             <a:avLst/>
@@ -3257,14 +3349,14 @@
       </p:sp>
       <p:sp>
         <p:nvSpPr>
-          <p:cNvPr id="6" name="TextBox 5"/>
+          <p:cNvPr id="8" name="TextBox 7"/>
           <p:cNvSpPr txBox="1"/>
           <p:nvPr/>
         </p:nvSpPr>
         <p:spPr>
           <a:xfrm>
-            <a:off x="640080" y="1188720"/>
-            <a:ext cx="10058400" cy="457200"/>
+            <a:off x="640080" y="5623560"/>
+            <a:ext cx="10911535" cy="548640"/>
           </a:xfrm>
           <a:prstGeom prst="rect">
             <a:avLst/>
@@ -3279,107 +3371,15 @@
           <a:p>
             <a:pPr algn="l"/>
             <a:r>
-              <a:rPr sz="1500" b="1">
-                <a:solidFill>
-                  <a:srgbClr val="C8A86B"/>
+              <a:rPr sz="1400" b="0">
+                <a:solidFill>
+                  <a:srgbClr val="6B6258"/>
                 </a:solidFill>
                 <a:latin typeface="微软雅黑"/>
                 <a:ea typeface="微软雅黑"/>
                 <a:cs typeface="微软雅黑"/>
               </a:rPr>
-              <a:t>必修上 第二单元 · 劳动光荣</a:t>
-            </a:r>
-          </a:p>
-        </p:txBody>
-      </p:sp>
-      <p:sp>
-        <p:nvSpPr>
-          <p:cNvPr id="7" name="TextBox 6"/>
-          <p:cNvSpPr txBox="1"/>
-          <p:nvPr/>
-        </p:nvSpPr>
-        <p:spPr>
-          <a:xfrm>
-            <a:off x="640080" y="2011680"/>
-            <a:ext cx="10972800" cy="2011680"/>
-          </a:xfrm>
-          <a:prstGeom prst="rect">
-            <a:avLst/>
-          </a:prstGeom>
-          <a:noFill/>
-        </p:spPr>
-        <p:txBody>
-          <a:bodyPr wrap="square" anchor="t" lIns="0" rIns="0" tIns="0" bIns="0">
-            <a:spAutoFit/>
-          </a:bodyPr>
-          <a:lstStyle/>
-          <a:p>
-            <a:pPr algn="l"/>
-            <a:r>
-              <a:rPr sz="5000" b="1">
-                <a:solidFill>
-                  <a:srgbClr val="FFFFFF"/>
-                </a:solidFill>
-                <a:latin typeface="楷体"/>
-                <a:ea typeface="楷体"/>
-                <a:cs typeface="楷体"/>
-              </a:rPr>
-              <a:t>心有一团火</a:t>
-            </a:r>
-          </a:p>
-          <a:p>
-            <a:pPr algn="l">
-              <a:spcBef>
-                <a:spcPts val="800"/>
-              </a:spcBef>
-            </a:pPr>
-            <a:r>
-              <a:rPr sz="5000" b="1">
-                <a:solidFill>
-                  <a:srgbClr val="FFFFFF"/>
-                </a:solidFill>
-                <a:latin typeface="楷体"/>
-                <a:ea typeface="楷体"/>
-                <a:cs typeface="楷体"/>
-              </a:rPr>
-              <a:t>「探界者」钟扬</a:t>
-            </a:r>
-          </a:p>
-        </p:txBody>
-      </p:sp>
-      <p:sp>
-        <p:nvSpPr>
-          <p:cNvPr id="8" name="TextBox 7"/>
-          <p:cNvSpPr txBox="1"/>
-          <p:nvPr/>
-        </p:nvSpPr>
-        <p:spPr>
-          <a:xfrm>
-            <a:off x="640080" y="4297680"/>
-            <a:ext cx="10972800" cy="640080"/>
-          </a:xfrm>
-          <a:prstGeom prst="rect">
-            <a:avLst/>
-          </a:prstGeom>
-          <a:noFill/>
-        </p:spPr>
-        <p:txBody>
-          <a:bodyPr wrap="square" anchor="t" lIns="0" rIns="0" tIns="0" bIns="0">
-            <a:spAutoFit/>
-          </a:bodyPr>
-          <a:lstStyle/>
-          <a:p>
-            <a:pPr algn="l"/>
-            <a:r>
-              <a:rPr sz="1900" b="0">
-                <a:solidFill>
-                  <a:srgbClr val="E7DFD2"/>
-                </a:solidFill>
-                <a:latin typeface="微软雅黑"/>
-                <a:ea typeface="微软雅黑"/>
-                <a:cs typeface="微软雅黑"/>
-              </a:rPr>
-              <a:t>两篇人物通讯 · 群文比较阅读</a:t>
+              <a:t>学习任务群：实用性阅读与交流    |    年级：高一</a:t>
             </a:r>
           </a:p>
         </p:txBody>
@@ -3387,47 +3387,6 @@
       <p:sp>
         <p:nvSpPr>
           <p:cNvPr id="9" name="TextBox 8"/>
-          <p:cNvSpPr txBox="1"/>
-          <p:nvPr/>
-        </p:nvSpPr>
-        <p:spPr>
-          <a:xfrm>
-            <a:off x="640080" y="5120640"/>
-            <a:ext cx="10972800" cy="1097280"/>
-          </a:xfrm>
-          <a:prstGeom prst="rect">
-            <a:avLst/>
-          </a:prstGeom>
-          <a:noFill/>
-        </p:spPr>
-        <p:txBody>
-          <a:bodyPr wrap="square" anchor="t" lIns="0" rIns="0" tIns="0" bIns="0">
-            <a:spAutoFit/>
-          </a:bodyPr>
-          <a:lstStyle/>
-          <a:p>
-            <a:pPr algn="l">
-              <a:lnSpc>
-                <a:spcPct val="140000"/>
-              </a:lnSpc>
-            </a:pPr>
-            <a:r>
-              <a:rPr sz="1700" b="0">
-                <a:solidFill>
-                  <a:srgbClr val="FFFFFF"/>
-                </a:solidFill>
-                <a:latin typeface="楷体"/>
-                <a:ea typeface="楷体"/>
-                <a:cs typeface="楷体"/>
-              </a:rPr>
-              <a:t>平凡柜台的坚守，与高原上的追寻——劳动光荣，不分工种。</a:t>
-            </a:r>
-          </a:p>
-        </p:txBody>
-      </p:sp>
-      <p:sp>
-        <p:nvSpPr>
-          <p:cNvPr id="10" name="TextBox 9"/>
           <p:cNvSpPr txBox="1"/>
           <p:nvPr/>
         </p:nvSpPr>
@@ -3560,7 +3519,7 @@
                 <a:ea typeface="微软雅黑"/>
                 <a:cs typeface="微软雅黑"/>
               </a:rPr>
-              <a:t>本课目标</a:t>
+              <a:t>学习目标</a:t>
             </a:r>
           </a:p>
         </p:txBody>
@@ -3611,51 +3570,14 @@
       </p:sp>
       <p:sp>
         <p:nvSpPr>
-          <p:cNvPr id="5" name="TextBox 4"/>
-          <p:cNvSpPr txBox="1"/>
-          <p:nvPr/>
-        </p:nvSpPr>
-        <p:spPr>
-          <a:xfrm>
-            <a:off x="640080" y="1325880"/>
-            <a:ext cx="10058400" cy="640080"/>
-          </a:xfrm>
-          <a:prstGeom prst="rect">
-            <a:avLst/>
-          </a:prstGeom>
-          <a:noFill/>
-        </p:spPr>
-        <p:txBody>
-          <a:bodyPr wrap="square" anchor="t" lIns="0" rIns="0" tIns="0" bIns="0">
-            <a:spAutoFit/>
-          </a:bodyPr>
-          <a:lstStyle/>
-          <a:p>
-            <a:pPr algn="l"/>
-            <a:r>
-              <a:rPr sz="3200" b="1">
-                <a:solidFill>
-                  <a:srgbClr val="1C2A33"/>
-                </a:solidFill>
-                <a:latin typeface="楷体"/>
-                <a:ea typeface="楷体"/>
-                <a:cs typeface="楷体"/>
-              </a:rPr>
-              <a:t>四向学习目标</a:t>
-            </a:r>
-          </a:p>
-        </p:txBody>
-      </p:sp>
-      <p:sp>
-        <p:nvSpPr>
-          <p:cNvPr id="6" name="Rounded Rectangle 5"/>
+          <p:cNvPr id="5" name="Rounded Rectangle 4"/>
           <p:cNvSpPr/>
           <p:nvPr/>
         </p:nvSpPr>
         <p:spPr>
           <a:xfrm>
-            <a:off x="640080" y="2377440"/>
-            <a:ext cx="2453563" cy="3291840"/>
+            <a:off x="640080" y="1417320"/>
+            <a:ext cx="5349240" cy="2057400"/>
           </a:xfrm>
           <a:prstGeom prst="roundRect">
             <a:avLst/>
@@ -3663,7 +3585,7 @@
           <a:solidFill>
             <a:srgbClr val="FFFFFF"/>
           </a:solidFill>
-          <a:ln w="20320">
+          <a:ln w="22860">
             <a:solidFill>
               <a:srgbClr val="B23A2A"/>
             </a:solidFill>
@@ -3694,14 +3616,14 @@
       </p:sp>
       <p:sp>
         <p:nvSpPr>
-          <p:cNvPr id="7" name="Oval 6"/>
+          <p:cNvPr id="6" name="Oval 5"/>
           <p:cNvSpPr/>
           <p:nvPr/>
         </p:nvSpPr>
         <p:spPr>
           <a:xfrm>
-            <a:off x="1455381" y="2697480"/>
-            <a:ext cx="822960" cy="822960"/>
+            <a:off x="804672" y="1581912"/>
+            <a:ext cx="457200" cy="457200"/>
           </a:xfrm>
           <a:prstGeom prst="ellipse">
             <a:avLst/>
@@ -3738,14 +3660,14 @@
       </p:sp>
       <p:sp>
         <p:nvSpPr>
-          <p:cNvPr id="8" name="TextBox 7"/>
+          <p:cNvPr id="7" name="TextBox 6"/>
           <p:cNvSpPr txBox="1"/>
           <p:nvPr/>
         </p:nvSpPr>
         <p:spPr>
           <a:xfrm>
-            <a:off x="1455381" y="2880360"/>
-            <a:ext cx="822960" cy="457200"/>
+            <a:off x="804672" y="1636776"/>
+            <a:ext cx="457200" cy="384048"/>
           </a:xfrm>
           <a:prstGeom prst="rect">
             <a:avLst/>
@@ -3760,107 +3682,111 @@
           <a:p>
             <a:pPr algn="ctr"/>
             <a:r>
-              <a:rPr sz="2400" b="1">
+              <a:rPr sz="1600" b="1">
                 <a:solidFill>
                   <a:srgbClr val="FFFFFF"/>
+                </a:solidFill>
+                <a:latin typeface="微软雅黑"/>
+                <a:ea typeface="微软雅黑"/>
+                <a:cs typeface="微软雅黑"/>
+              </a:rPr>
+              <a:t>1</a:t>
+            </a:r>
+          </a:p>
+        </p:txBody>
+      </p:sp>
+      <p:sp>
+        <p:nvSpPr>
+          <p:cNvPr id="8" name="TextBox 7"/>
+          <p:cNvSpPr txBox="1"/>
+          <p:nvPr/>
+        </p:nvSpPr>
+        <p:spPr>
+          <a:xfrm>
+            <a:off x="1371600" y="1527048"/>
+            <a:ext cx="4434840" cy="457200"/>
+          </a:xfrm>
+          <a:prstGeom prst="rect">
+            <a:avLst/>
+          </a:prstGeom>
+          <a:noFill/>
+        </p:spPr>
+        <p:txBody>
+          <a:bodyPr wrap="square" anchor="t" lIns="0" rIns="0" tIns="0" bIns="0">
+            <a:spAutoFit/>
+          </a:bodyPr>
+          <a:lstStyle/>
+          <a:p>
+            <a:pPr algn="l">
+              <a:lnSpc>
+                <a:spcPct val="110000"/>
+              </a:lnSpc>
+            </a:pPr>
+            <a:r>
+              <a:rPr sz="1600" b="1">
+                <a:solidFill>
+                  <a:srgbClr val="1C2A33"/>
+                </a:solidFill>
+                <a:latin typeface="微软雅黑"/>
+                <a:ea typeface="微软雅黑"/>
+                <a:cs typeface="微软雅黑"/>
+              </a:rPr>
+              <a:t>目标</a:t>
+            </a:r>
+          </a:p>
+        </p:txBody>
+      </p:sp>
+      <p:sp>
+        <p:nvSpPr>
+          <p:cNvPr id="9" name="TextBox 8"/>
+          <p:cNvSpPr txBox="1"/>
+          <p:nvPr/>
+        </p:nvSpPr>
+        <p:spPr>
+          <a:xfrm>
+            <a:off x="1371600" y="1965960"/>
+            <a:ext cx="4434840" cy="1417320"/>
+          </a:xfrm>
+          <a:prstGeom prst="rect">
+            <a:avLst/>
+          </a:prstGeom>
+          <a:noFill/>
+        </p:spPr>
+        <p:txBody>
+          <a:bodyPr wrap="square" anchor="t" lIns="0" rIns="0" tIns="0" bIns="0">
+            <a:spAutoFit/>
+          </a:bodyPr>
+          <a:lstStyle/>
+          <a:p>
+            <a:pPr algn="l">
+              <a:lnSpc>
+                <a:spcPct val="128000"/>
+              </a:lnSpc>
+            </a:pPr>
+            <a:r>
+              <a:rPr sz="1400" b="0">
+                <a:solidFill>
+                  <a:srgbClr val="1C2A33"/>
                 </a:solidFill>
                 <a:latin typeface="楷体"/>
                 <a:ea typeface="楷体"/>
                 <a:cs typeface="楷体"/>
               </a:rPr>
-              <a:t>1</a:t>
-            </a:r>
-          </a:p>
-        </p:txBody>
-      </p:sp>
-      <p:sp>
-        <p:nvSpPr>
-          <p:cNvPr id="9" name="TextBox 8"/>
-          <p:cNvSpPr txBox="1"/>
-          <p:nvPr/>
-        </p:nvSpPr>
-        <p:spPr>
-          <a:xfrm>
-            <a:off x="822960" y="3749040"/>
-            <a:ext cx="2087803" cy="548640"/>
-          </a:xfrm>
-          <a:prstGeom prst="rect">
-            <a:avLst/>
-          </a:prstGeom>
-          <a:noFill/>
-        </p:spPr>
-        <p:txBody>
-          <a:bodyPr wrap="square" anchor="t" lIns="0" rIns="0" tIns="0" bIns="0">
-            <a:spAutoFit/>
-          </a:bodyPr>
-          <a:lstStyle/>
-          <a:p>
-            <a:pPr algn="ctr"/>
-            <a:r>
-              <a:rPr sz="1800" b="1">
-                <a:solidFill>
-                  <a:srgbClr val="B23A2A"/>
-                </a:solidFill>
-                <a:latin typeface="微软雅黑"/>
-                <a:ea typeface="微软雅黑"/>
-                <a:cs typeface="微软雅黑"/>
-              </a:rPr>
-              <a:t>语言能力</a:t>
-            </a:r>
-          </a:p>
-        </p:txBody>
-      </p:sp>
-      <p:sp>
-        <p:nvSpPr>
-          <p:cNvPr id="10" name="TextBox 9"/>
-          <p:cNvSpPr txBox="1"/>
-          <p:nvPr/>
-        </p:nvSpPr>
-        <p:spPr>
-          <a:xfrm>
-            <a:off x="841248" y="4343400"/>
-            <a:ext cx="2051227" cy="1188720"/>
-          </a:xfrm>
-          <a:prstGeom prst="rect">
-            <a:avLst/>
-          </a:prstGeom>
-          <a:noFill/>
-        </p:spPr>
-        <p:txBody>
-          <a:bodyPr wrap="square" anchor="t" lIns="0" rIns="0" tIns="0" bIns="0">
-            <a:spAutoFit/>
-          </a:bodyPr>
-          <a:lstStyle/>
-          <a:p>
-            <a:pPr algn="ctr">
-              <a:lnSpc>
-                <a:spcPct val="145000"/>
-              </a:lnSpc>
-            </a:pPr>
-            <a:r>
-              <a:rPr sz="1350" b="0">
-                <a:solidFill>
-                  <a:srgbClr val="1C2A33"/>
-                </a:solidFill>
-                <a:latin typeface="楷体"/>
-                <a:ea typeface="楷体"/>
-                <a:cs typeface="楷体"/>
-              </a:rPr>
-              <a:t>概括两篇通讯的核心事件与人物精神，说出选材的典型性差异。</a:t>
-            </a:r>
-          </a:p>
-        </p:txBody>
-      </p:sp>
-      <p:sp>
-        <p:nvSpPr>
-          <p:cNvPr id="11" name="Rounded Rectangle 10"/>
+              <a:t>语言能力：能概括两篇通讯的核心事件和人物精神，说出通讯选材的典型性差异。</a:t>
+            </a:r>
+          </a:p>
+        </p:txBody>
+      </p:sp>
+      <p:sp>
+        <p:nvSpPr>
+          <p:cNvPr id="10" name="Rounded Rectangle 9"/>
           <p:cNvSpPr/>
           <p:nvPr/>
         </p:nvSpPr>
         <p:spPr>
           <a:xfrm>
-            <a:off x="3459403" y="2377440"/>
-            <a:ext cx="2453563" cy="3291840"/>
+            <a:off x="6263640" y="1417320"/>
+            <a:ext cx="5349240" cy="2057400"/>
           </a:xfrm>
           <a:prstGeom prst="roundRect">
             <a:avLst/>
@@ -3868,9 +3794,9 @@
           <a:solidFill>
             <a:srgbClr val="FFFFFF"/>
           </a:solidFill>
-          <a:ln w="20320">
+          <a:ln w="22860">
             <a:solidFill>
-              <a:srgbClr val="2E7D6B"/>
+              <a:srgbClr val="B23A2A"/>
             </a:solidFill>
           </a:ln>
           <a:effectLst/>
@@ -3899,20 +3825,20 @@
       </p:sp>
       <p:sp>
         <p:nvSpPr>
-          <p:cNvPr id="12" name="Oval 11"/>
+          <p:cNvPr id="11" name="Oval 10"/>
           <p:cNvSpPr/>
           <p:nvPr/>
         </p:nvSpPr>
         <p:spPr>
           <a:xfrm>
-            <a:off x="4274705" y="2697480"/>
-            <a:ext cx="822960" cy="822960"/>
+            <a:off x="6428232" y="1581912"/>
+            <a:ext cx="457200" cy="457200"/>
           </a:xfrm>
           <a:prstGeom prst="ellipse">
             <a:avLst/>
           </a:prstGeom>
           <a:solidFill>
-            <a:srgbClr val="2E7D6B"/>
+            <a:srgbClr val="B23A2A"/>
           </a:solidFill>
           <a:ln>
             <a:noFill/>
@@ -3943,14 +3869,14 @@
       </p:sp>
       <p:sp>
         <p:nvSpPr>
-          <p:cNvPr id="13" name="TextBox 12"/>
+          <p:cNvPr id="12" name="TextBox 11"/>
           <p:cNvSpPr txBox="1"/>
           <p:nvPr/>
         </p:nvSpPr>
         <p:spPr>
           <a:xfrm>
-            <a:off x="4274705" y="2880360"/>
-            <a:ext cx="822960" cy="457200"/>
+            <a:off x="6428232" y="1636776"/>
+            <a:ext cx="457200" cy="384048"/>
           </a:xfrm>
           <a:prstGeom prst="rect">
             <a:avLst/>
@@ -3965,107 +3891,111 @@
           <a:p>
             <a:pPr algn="ctr"/>
             <a:r>
-              <a:rPr sz="2400" b="1">
+              <a:rPr sz="1600" b="1">
                 <a:solidFill>
                   <a:srgbClr val="FFFFFF"/>
+                </a:solidFill>
+                <a:latin typeface="微软雅黑"/>
+                <a:ea typeface="微软雅黑"/>
+                <a:cs typeface="微软雅黑"/>
+              </a:rPr>
+              <a:t>2</a:t>
+            </a:r>
+          </a:p>
+        </p:txBody>
+      </p:sp>
+      <p:sp>
+        <p:nvSpPr>
+          <p:cNvPr id="13" name="TextBox 12"/>
+          <p:cNvSpPr txBox="1"/>
+          <p:nvPr/>
+        </p:nvSpPr>
+        <p:spPr>
+          <a:xfrm>
+            <a:off x="6995160" y="1527048"/>
+            <a:ext cx="4434840" cy="457200"/>
+          </a:xfrm>
+          <a:prstGeom prst="rect">
+            <a:avLst/>
+          </a:prstGeom>
+          <a:noFill/>
+        </p:spPr>
+        <p:txBody>
+          <a:bodyPr wrap="square" anchor="t" lIns="0" rIns="0" tIns="0" bIns="0">
+            <a:spAutoFit/>
+          </a:bodyPr>
+          <a:lstStyle/>
+          <a:p>
+            <a:pPr algn="l">
+              <a:lnSpc>
+                <a:spcPct val="110000"/>
+              </a:lnSpc>
+            </a:pPr>
+            <a:r>
+              <a:rPr sz="1600" b="1">
+                <a:solidFill>
+                  <a:srgbClr val="1C2A33"/>
+                </a:solidFill>
+                <a:latin typeface="微软雅黑"/>
+                <a:ea typeface="微软雅黑"/>
+                <a:cs typeface="微软雅黑"/>
+              </a:rPr>
+              <a:t>目标</a:t>
+            </a:r>
+          </a:p>
+        </p:txBody>
+      </p:sp>
+      <p:sp>
+        <p:nvSpPr>
+          <p:cNvPr id="14" name="TextBox 13"/>
+          <p:cNvSpPr txBox="1"/>
+          <p:nvPr/>
+        </p:nvSpPr>
+        <p:spPr>
+          <a:xfrm>
+            <a:off x="6995160" y="1965960"/>
+            <a:ext cx="4434840" cy="1417320"/>
+          </a:xfrm>
+          <a:prstGeom prst="rect">
+            <a:avLst/>
+          </a:prstGeom>
+          <a:noFill/>
+        </p:spPr>
+        <p:txBody>
+          <a:bodyPr wrap="square" anchor="t" lIns="0" rIns="0" tIns="0" bIns="0">
+            <a:spAutoFit/>
+          </a:bodyPr>
+          <a:lstStyle/>
+          <a:p>
+            <a:pPr algn="l">
+              <a:lnSpc>
+                <a:spcPct val="128000"/>
+              </a:lnSpc>
+            </a:pPr>
+            <a:r>
+              <a:rPr sz="1200" b="0">
+                <a:solidFill>
+                  <a:srgbClr val="1C2A33"/>
                 </a:solidFill>
                 <a:latin typeface="楷体"/>
                 <a:ea typeface="楷体"/>
                 <a:cs typeface="楷体"/>
               </a:rPr>
-              <a:t>2</a:t>
-            </a:r>
-          </a:p>
-        </p:txBody>
-      </p:sp>
-      <p:sp>
-        <p:nvSpPr>
-          <p:cNvPr id="14" name="TextBox 13"/>
-          <p:cNvSpPr txBox="1"/>
-          <p:nvPr/>
-        </p:nvSpPr>
-        <p:spPr>
-          <a:xfrm>
-            <a:off x="3642283" y="3749040"/>
-            <a:ext cx="2087803" cy="548640"/>
-          </a:xfrm>
-          <a:prstGeom prst="rect">
-            <a:avLst/>
-          </a:prstGeom>
-          <a:noFill/>
-        </p:spPr>
-        <p:txBody>
-          <a:bodyPr wrap="square" anchor="t" lIns="0" rIns="0" tIns="0" bIns="0">
-            <a:spAutoFit/>
-          </a:bodyPr>
-          <a:lstStyle/>
-          <a:p>
-            <a:pPr algn="ctr"/>
-            <a:r>
-              <a:rPr sz="1800" b="1">
-                <a:solidFill>
-                  <a:srgbClr val="2E7D6B"/>
-                </a:solidFill>
-                <a:latin typeface="微软雅黑"/>
-                <a:ea typeface="微软雅黑"/>
-                <a:cs typeface="微软雅黑"/>
-              </a:rPr>
-              <a:t>文化意识</a:t>
-            </a:r>
-          </a:p>
-        </p:txBody>
-      </p:sp>
-      <p:sp>
-        <p:nvSpPr>
-          <p:cNvPr id="15" name="TextBox 14"/>
-          <p:cNvSpPr txBox="1"/>
-          <p:nvPr/>
-        </p:nvSpPr>
-        <p:spPr>
-          <a:xfrm>
-            <a:off x="3660571" y="4343400"/>
-            <a:ext cx="2051227" cy="1188720"/>
-          </a:xfrm>
-          <a:prstGeom prst="rect">
-            <a:avLst/>
-          </a:prstGeom>
-          <a:noFill/>
-        </p:spPr>
-        <p:txBody>
-          <a:bodyPr wrap="square" anchor="t" lIns="0" rIns="0" tIns="0" bIns="0">
-            <a:spAutoFit/>
-          </a:bodyPr>
-          <a:lstStyle/>
-          <a:p>
-            <a:pPr algn="ctr">
-              <a:lnSpc>
-                <a:spcPct val="145000"/>
-              </a:lnSpc>
-            </a:pPr>
-            <a:r>
-              <a:rPr sz="1350" b="0">
-                <a:solidFill>
-                  <a:srgbClr val="1C2A33"/>
-                </a:solidFill>
-                <a:latin typeface="楷体"/>
-                <a:ea typeface="楷体"/>
-                <a:cs typeface="楷体"/>
-              </a:rPr>
-              <a:t>理解「平凡岗位坚守」与「科学探索执着」都是劳动精神的不同呈现。</a:t>
-            </a:r>
-          </a:p>
-        </p:txBody>
-      </p:sp>
-      <p:sp>
-        <p:nvSpPr>
-          <p:cNvPr id="16" name="Rounded Rectangle 15"/>
+              <a:t>文化意识：理解「平凡岗位的坚守」与「科学探索的执着」都是劳动精神的不同呈现，感受劳动的多元价值。</a:t>
+            </a:r>
+          </a:p>
+        </p:txBody>
+      </p:sp>
+      <p:sp>
+        <p:nvSpPr>
+          <p:cNvPr id="15" name="Rounded Rectangle 14"/>
           <p:cNvSpPr/>
           <p:nvPr/>
         </p:nvSpPr>
         <p:spPr>
           <a:xfrm>
-            <a:off x="6278727" y="2377440"/>
-            <a:ext cx="2453563" cy="3291840"/>
+            <a:off x="640080" y="3703320"/>
+            <a:ext cx="5349240" cy="2057400"/>
           </a:xfrm>
           <a:prstGeom prst="roundRect">
             <a:avLst/>
@@ -4073,9 +4003,9 @@
           <a:solidFill>
             <a:srgbClr val="FFFFFF"/>
           </a:solidFill>
-          <a:ln w="20320">
+          <a:ln w="22860">
             <a:solidFill>
-              <a:srgbClr val="C8A86B"/>
+              <a:srgbClr val="B23A2A"/>
             </a:solidFill>
           </a:ln>
           <a:effectLst/>
@@ -4104,20 +4034,20 @@
       </p:sp>
       <p:sp>
         <p:nvSpPr>
-          <p:cNvPr id="17" name="Oval 16"/>
+          <p:cNvPr id="16" name="Oval 15"/>
           <p:cNvSpPr/>
           <p:nvPr/>
         </p:nvSpPr>
         <p:spPr>
           <a:xfrm>
-            <a:off x="7094029" y="2697480"/>
-            <a:ext cx="822960" cy="822960"/>
+            <a:off x="804672" y="3867912"/>
+            <a:ext cx="457200" cy="457200"/>
           </a:xfrm>
           <a:prstGeom prst="ellipse">
             <a:avLst/>
           </a:prstGeom>
           <a:solidFill>
-            <a:srgbClr val="C8A86B"/>
+            <a:srgbClr val="B23A2A"/>
           </a:solidFill>
           <a:ln>
             <a:noFill/>
@@ -4148,14 +4078,14 @@
       </p:sp>
       <p:sp>
         <p:nvSpPr>
-          <p:cNvPr id="18" name="TextBox 17"/>
+          <p:cNvPr id="17" name="TextBox 16"/>
           <p:cNvSpPr txBox="1"/>
           <p:nvPr/>
         </p:nvSpPr>
         <p:spPr>
           <a:xfrm>
-            <a:off x="7094029" y="2880360"/>
-            <a:ext cx="822960" cy="457200"/>
+            <a:off x="804672" y="3922776"/>
+            <a:ext cx="457200" cy="384048"/>
           </a:xfrm>
           <a:prstGeom prst="rect">
             <a:avLst/>
@@ -4170,107 +4100,111 @@
           <a:p>
             <a:pPr algn="ctr"/>
             <a:r>
-              <a:rPr sz="2400" b="1">
+              <a:rPr sz="1600" b="1">
                 <a:solidFill>
                   <a:srgbClr val="FFFFFF"/>
+                </a:solidFill>
+                <a:latin typeface="微软雅黑"/>
+                <a:ea typeface="微软雅黑"/>
+                <a:cs typeface="微软雅黑"/>
+              </a:rPr>
+              <a:t>3</a:t>
+            </a:r>
+          </a:p>
+        </p:txBody>
+      </p:sp>
+      <p:sp>
+        <p:nvSpPr>
+          <p:cNvPr id="18" name="TextBox 17"/>
+          <p:cNvSpPr txBox="1"/>
+          <p:nvPr/>
+        </p:nvSpPr>
+        <p:spPr>
+          <a:xfrm>
+            <a:off x="1371600" y="3813048"/>
+            <a:ext cx="4434840" cy="457200"/>
+          </a:xfrm>
+          <a:prstGeom prst="rect">
+            <a:avLst/>
+          </a:prstGeom>
+          <a:noFill/>
+        </p:spPr>
+        <p:txBody>
+          <a:bodyPr wrap="square" anchor="t" lIns="0" rIns="0" tIns="0" bIns="0">
+            <a:spAutoFit/>
+          </a:bodyPr>
+          <a:lstStyle/>
+          <a:p>
+            <a:pPr algn="l">
+              <a:lnSpc>
+                <a:spcPct val="110000"/>
+              </a:lnSpc>
+            </a:pPr>
+            <a:r>
+              <a:rPr sz="1600" b="1">
+                <a:solidFill>
+                  <a:srgbClr val="1C2A33"/>
+                </a:solidFill>
+                <a:latin typeface="微软雅黑"/>
+                <a:ea typeface="微软雅黑"/>
+                <a:cs typeface="微软雅黑"/>
+              </a:rPr>
+              <a:t>目标</a:t>
+            </a:r>
+          </a:p>
+        </p:txBody>
+      </p:sp>
+      <p:sp>
+        <p:nvSpPr>
+          <p:cNvPr id="19" name="TextBox 18"/>
+          <p:cNvSpPr txBox="1"/>
+          <p:nvPr/>
+        </p:nvSpPr>
+        <p:spPr>
+          <a:xfrm>
+            <a:off x="1371600" y="4251960"/>
+            <a:ext cx="4434840" cy="1417320"/>
+          </a:xfrm>
+          <a:prstGeom prst="rect">
+            <a:avLst/>
+          </a:prstGeom>
+          <a:noFill/>
+        </p:spPr>
+        <p:txBody>
+          <a:bodyPr wrap="square" anchor="t" lIns="0" rIns="0" tIns="0" bIns="0">
+            <a:spAutoFit/>
+          </a:bodyPr>
+          <a:lstStyle/>
+          <a:p>
+            <a:pPr algn="l">
+              <a:lnSpc>
+                <a:spcPct val="128000"/>
+              </a:lnSpc>
+            </a:pPr>
+            <a:r>
+              <a:rPr sz="1200" b="0">
+                <a:solidFill>
+                  <a:srgbClr val="1C2A33"/>
                 </a:solidFill>
                 <a:latin typeface="楷体"/>
                 <a:ea typeface="楷体"/>
                 <a:cs typeface="楷体"/>
               </a:rPr>
-              <a:t>3</a:t>
-            </a:r>
-          </a:p>
-        </p:txBody>
-      </p:sp>
-      <p:sp>
-        <p:nvSpPr>
-          <p:cNvPr id="19" name="TextBox 18"/>
-          <p:cNvSpPr txBox="1"/>
-          <p:nvPr/>
-        </p:nvSpPr>
-        <p:spPr>
-          <a:xfrm>
-            <a:off x="6461607" y="3749040"/>
-            <a:ext cx="2087803" cy="548640"/>
-          </a:xfrm>
-          <a:prstGeom prst="rect">
-            <a:avLst/>
-          </a:prstGeom>
-          <a:noFill/>
-        </p:spPr>
-        <p:txBody>
-          <a:bodyPr wrap="square" anchor="t" lIns="0" rIns="0" tIns="0" bIns="0">
-            <a:spAutoFit/>
-          </a:bodyPr>
-          <a:lstStyle/>
-          <a:p>
-            <a:pPr algn="ctr"/>
-            <a:r>
-              <a:rPr sz="1800" b="1">
-                <a:solidFill>
-                  <a:srgbClr val="C8A86B"/>
-                </a:solidFill>
-                <a:latin typeface="微软雅黑"/>
-                <a:ea typeface="微软雅黑"/>
-                <a:cs typeface="微软雅黑"/>
-              </a:rPr>
-              <a:t>思维品质</a:t>
-            </a:r>
-          </a:p>
-        </p:txBody>
-      </p:sp>
-      <p:sp>
-        <p:nvSpPr>
-          <p:cNvPr id="20" name="TextBox 19"/>
-          <p:cNvSpPr txBox="1"/>
-          <p:nvPr/>
-        </p:nvSpPr>
-        <p:spPr>
-          <a:xfrm>
-            <a:off x="6479895" y="4343400"/>
-            <a:ext cx="2051227" cy="1188720"/>
-          </a:xfrm>
-          <a:prstGeom prst="rect">
-            <a:avLst/>
-          </a:prstGeom>
-          <a:noFill/>
-        </p:spPr>
-        <p:txBody>
-          <a:bodyPr wrap="square" anchor="t" lIns="0" rIns="0" tIns="0" bIns="0">
-            <a:spAutoFit/>
-          </a:bodyPr>
-          <a:lstStyle/>
-          <a:p>
-            <a:pPr algn="ctr">
-              <a:lnSpc>
-                <a:spcPct val="145000"/>
-              </a:lnSpc>
-            </a:pPr>
-            <a:r>
-              <a:rPr sz="1350" b="0">
-                <a:solidFill>
-                  <a:srgbClr val="1C2A33"/>
-                </a:solidFill>
-                <a:latin typeface="楷体"/>
-                <a:ea typeface="楷体"/>
-                <a:cs typeface="楷体"/>
-              </a:rPr>
-              <a:t>比较两篇通讯的选材角度、描写手法与情感基调，培养归纳能力。</a:t>
-            </a:r>
-          </a:p>
-        </p:txBody>
-      </p:sp>
-      <p:sp>
-        <p:nvSpPr>
-          <p:cNvPr id="21" name="Rounded Rectangle 20"/>
+              <a:t>思维品质：通过群文比较两篇通讯的选材角度、描写手法和情感基调，培养比较归纳的思维能力。</a:t>
+            </a:r>
+          </a:p>
+        </p:txBody>
+      </p:sp>
+      <p:sp>
+        <p:nvSpPr>
+          <p:cNvPr id="20" name="Rounded Rectangle 19"/>
           <p:cNvSpPr/>
           <p:nvPr/>
         </p:nvSpPr>
         <p:spPr>
           <a:xfrm>
-            <a:off x="9098051" y="2377440"/>
-            <a:ext cx="2453563" cy="3291840"/>
+            <a:off x="6263640" y="3703320"/>
+            <a:ext cx="5349240" cy="2057400"/>
           </a:xfrm>
           <a:prstGeom prst="roundRect">
             <a:avLst/>
@@ -4278,9 +4212,9 @@
           <a:solidFill>
             <a:srgbClr val="FFFFFF"/>
           </a:solidFill>
-          <a:ln w="20320">
+          <a:ln w="22860">
             <a:solidFill>
-              <a:srgbClr val="6B6258"/>
+              <a:srgbClr val="B23A2A"/>
             </a:solidFill>
           </a:ln>
           <a:effectLst/>
@@ -4309,20 +4243,20 @@
       </p:sp>
       <p:sp>
         <p:nvSpPr>
-          <p:cNvPr id="22" name="Oval 21"/>
+          <p:cNvPr id="21" name="Oval 20"/>
           <p:cNvSpPr/>
           <p:nvPr/>
         </p:nvSpPr>
         <p:spPr>
           <a:xfrm>
-            <a:off x="9913353" y="2697480"/>
-            <a:ext cx="822960" cy="822960"/>
+            <a:off x="6428232" y="3867912"/>
+            <a:ext cx="457200" cy="457200"/>
           </a:xfrm>
           <a:prstGeom prst="ellipse">
             <a:avLst/>
           </a:prstGeom>
           <a:solidFill>
-            <a:srgbClr val="6B6258"/>
+            <a:srgbClr val="B23A2A"/>
           </a:solidFill>
           <a:ln>
             <a:noFill/>
@@ -4353,14 +4287,14 @@
       </p:sp>
       <p:sp>
         <p:nvSpPr>
-          <p:cNvPr id="23" name="TextBox 22"/>
+          <p:cNvPr id="22" name="TextBox 21"/>
           <p:cNvSpPr txBox="1"/>
           <p:nvPr/>
         </p:nvSpPr>
         <p:spPr>
           <a:xfrm>
-            <a:off x="9913353" y="2880360"/>
-            <a:ext cx="822960" cy="457200"/>
+            <a:off x="6428232" y="3922776"/>
+            <a:ext cx="457200" cy="384048"/>
           </a:xfrm>
           <a:prstGeom prst="rect">
             <a:avLst/>
@@ -4375,52 +4309,97 @@
           <a:p>
             <a:pPr algn="ctr"/>
             <a:r>
-              <a:rPr sz="2400" b="1">
+              <a:rPr sz="1600" b="1">
                 <a:solidFill>
                   <a:srgbClr val="FFFFFF"/>
+                </a:solidFill>
+                <a:latin typeface="微软雅黑"/>
+                <a:ea typeface="微软雅黑"/>
+                <a:cs typeface="微软雅黑"/>
+              </a:rPr>
+              <a:t>4</a:t>
+            </a:r>
+          </a:p>
+        </p:txBody>
+      </p:sp>
+      <p:sp>
+        <p:nvSpPr>
+          <p:cNvPr id="23" name="TextBox 22"/>
+          <p:cNvSpPr txBox="1"/>
+          <p:nvPr/>
+        </p:nvSpPr>
+        <p:spPr>
+          <a:xfrm>
+            <a:off x="6995160" y="3813048"/>
+            <a:ext cx="4434840" cy="457200"/>
+          </a:xfrm>
+          <a:prstGeom prst="rect">
+            <a:avLst/>
+          </a:prstGeom>
+          <a:noFill/>
+        </p:spPr>
+        <p:txBody>
+          <a:bodyPr wrap="square" anchor="t" lIns="0" rIns="0" tIns="0" bIns="0">
+            <a:spAutoFit/>
+          </a:bodyPr>
+          <a:lstStyle/>
+          <a:p>
+            <a:pPr algn="l">
+              <a:lnSpc>
+                <a:spcPct val="110000"/>
+              </a:lnSpc>
+            </a:pPr>
+            <a:r>
+              <a:rPr sz="1600" b="1">
+                <a:solidFill>
+                  <a:srgbClr val="1C2A33"/>
+                </a:solidFill>
+                <a:latin typeface="微软雅黑"/>
+                <a:ea typeface="微软雅黑"/>
+                <a:cs typeface="微软雅黑"/>
+              </a:rPr>
+              <a:t>目标</a:t>
+            </a:r>
+          </a:p>
+        </p:txBody>
+      </p:sp>
+      <p:sp>
+        <p:nvSpPr>
+          <p:cNvPr id="24" name="TextBox 23"/>
+          <p:cNvSpPr txBox="1"/>
+          <p:nvPr/>
+        </p:nvSpPr>
+        <p:spPr>
+          <a:xfrm>
+            <a:off x="6995160" y="4251960"/>
+            <a:ext cx="4434840" cy="1417320"/>
+          </a:xfrm>
+          <a:prstGeom prst="rect">
+            <a:avLst/>
+          </a:prstGeom>
+          <a:noFill/>
+        </p:spPr>
+        <p:txBody>
+          <a:bodyPr wrap="square" anchor="t" lIns="0" rIns="0" tIns="0" bIns="0">
+            <a:spAutoFit/>
+          </a:bodyPr>
+          <a:lstStyle/>
+          <a:p>
+            <a:pPr algn="l">
+              <a:lnSpc>
+                <a:spcPct val="128000"/>
+              </a:lnSpc>
+            </a:pPr>
+            <a:r>
+              <a:rPr sz="1200" b="0">
+                <a:solidFill>
+                  <a:srgbClr val="1C2A33"/>
                 </a:solidFill>
                 <a:latin typeface="楷体"/>
                 <a:ea typeface="楷体"/>
                 <a:cs typeface="楷体"/>
               </a:rPr>
-              <a:t>4</a:t>
-            </a:r>
-          </a:p>
-        </p:txBody>
-      </p:sp>
-      <p:sp>
-        <p:nvSpPr>
-          <p:cNvPr id="24" name="TextBox 23"/>
-          <p:cNvSpPr txBox="1"/>
-          <p:nvPr/>
-        </p:nvSpPr>
-        <p:spPr>
-          <a:xfrm>
-            <a:off x="9280931" y="3749040"/>
-            <a:ext cx="2087803" cy="548640"/>
-          </a:xfrm>
-          <a:prstGeom prst="rect">
-            <a:avLst/>
-          </a:prstGeom>
-          <a:noFill/>
-        </p:spPr>
-        <p:txBody>
-          <a:bodyPr wrap="square" anchor="t" lIns="0" rIns="0" tIns="0" bIns="0">
-            <a:spAutoFit/>
-          </a:bodyPr>
-          <a:lstStyle/>
-          <a:p>
-            <a:pPr algn="ctr"/>
-            <a:r>
-              <a:rPr sz="1800" b="1">
-                <a:solidFill>
-                  <a:srgbClr val="6B6258"/>
-                </a:solidFill>
-                <a:latin typeface="微软雅黑"/>
-                <a:ea typeface="微软雅黑"/>
-                <a:cs typeface="微软雅黑"/>
-              </a:rPr>
-              <a:t>学习能力</a:t>
+              <a:t>学习能力：掌握「同主题·异选材·比手法」的群文比较阅读路径，能迁移到其他实用文比较。</a:t>
             </a:r>
           </a:p>
         </p:txBody>
@@ -4428,47 +4407,6 @@
       <p:sp>
         <p:nvSpPr>
           <p:cNvPr id="25" name="TextBox 24"/>
-          <p:cNvSpPr txBox="1"/>
-          <p:nvPr/>
-        </p:nvSpPr>
-        <p:spPr>
-          <a:xfrm>
-            <a:off x="9299219" y="4343400"/>
-            <a:ext cx="2051227" cy="1188720"/>
-          </a:xfrm>
-          <a:prstGeom prst="rect">
-            <a:avLst/>
-          </a:prstGeom>
-          <a:noFill/>
-        </p:spPr>
-        <p:txBody>
-          <a:bodyPr wrap="square" anchor="t" lIns="0" rIns="0" tIns="0" bIns="0">
-            <a:spAutoFit/>
-          </a:bodyPr>
-          <a:lstStyle/>
-          <a:p>
-            <a:pPr algn="ctr">
-              <a:lnSpc>
-                <a:spcPct val="145000"/>
-              </a:lnSpc>
-            </a:pPr>
-            <a:r>
-              <a:rPr sz="1350" b="0">
-                <a:solidFill>
-                  <a:srgbClr val="1C2A33"/>
-                </a:solidFill>
-                <a:latin typeface="楷体"/>
-                <a:ea typeface="楷体"/>
-                <a:cs typeface="楷体"/>
-              </a:rPr>
-              <a:t>掌握「同主题·异选材·比手法」的群文路径，能迁移到其他实用文。</a:t>
-            </a:r>
-          </a:p>
-        </p:txBody>
-      </p:sp>
-      <p:sp>
-        <p:nvSpPr>
-          <p:cNvPr id="26" name="TextBox 25"/>
           <p:cNvSpPr txBox="1"/>
           <p:nvPr/>
         </p:nvSpPr>
@@ -4595,13 +4533,13 @@
             <a:r>
               <a:rPr sz="1300" b="1">
                 <a:solidFill>
-                  <a:srgbClr val="B23A2A"/>
+                  <a:srgbClr val="2E7D6B"/>
                 </a:solidFill>
                 <a:latin typeface="微软雅黑"/>
                 <a:ea typeface="微软雅黑"/>
                 <a:cs typeface="微软雅黑"/>
               </a:rPr>
-              <a:t>知人论世 · 两双劳动的手</a:t>
+              <a:t>课文背景</a:t>
             </a:r>
           </a:p>
         </p:txBody>
@@ -4621,7 +4559,7 @@
             <a:avLst/>
           </a:prstGeom>
           <a:solidFill>
-            <a:srgbClr val="B23A2A"/>
+            <a:srgbClr val="2E7D6B"/>
           </a:solidFill>
           <a:ln>
             <a:noFill/>
@@ -4650,9 +4588,53 @@
           </a:p>
         </p:txBody>
       </p:sp>
+      <p:sp>
+        <p:nvSpPr>
+          <p:cNvPr id="5" name="TextBox 4"/>
+          <p:cNvSpPr txBox="1"/>
+          <p:nvPr/>
+        </p:nvSpPr>
+        <p:spPr>
+          <a:xfrm>
+            <a:off x="640080" y="1508760"/>
+            <a:ext cx="6766560" cy="4572000"/>
+          </a:xfrm>
+          <a:prstGeom prst="rect">
+            <a:avLst/>
+          </a:prstGeom>
+          <a:noFill/>
+        </p:spPr>
+        <p:txBody>
+          <a:bodyPr wrap="square" anchor="t" lIns="0" rIns="0" tIns="0" bIns="0">
+            <a:spAutoFit/>
+          </a:bodyPr>
+          <a:lstStyle/>
+          <a:p>
+            <a:pPr algn="l">
+              <a:lnSpc>
+                <a:spcPct val="150000"/>
+              </a:lnSpc>
+              <a:spcAft>
+                <a:spcPts val="600"/>
+              </a:spcAft>
+            </a:pPr>
+            <a:r>
+              <a:rPr sz="1600" b="0">
+                <a:solidFill>
+                  <a:srgbClr val="1C2A33"/>
+                </a:solidFill>
+                <a:latin typeface="楷体"/>
+                <a:ea typeface="楷体"/>
+                <a:cs typeface="楷体"/>
+              </a:rPr>
+              <a:t>本课为第二单元第二课时，群文比较阅读两篇人物通讯。《心有一团火，温暖众人心》写北京王府井百货糖果柜售货员张秉贵，以「一抓准」「一口清」的绝活和「一团火」般的服务态度感动无数顾客——平凡岗位上的劳动之美。《"探界者"钟扬》写复旦大学教授钟扬16年扎根西藏采集种子、在高原与平原间「探界」的科教人生——知识分子的劳动之崇高。两篇通讯一写普通售货员一写高校教授，一写城市柜组一写高原田野，构成「劳动光荣」在不同人物身上的多元呈现，适合群文比较。</a:t>
+            </a:r>
+          </a:p>
+        </p:txBody>
+      </p:sp>
       <p:pic>
         <p:nvPicPr>
-          <p:cNvPr id="5" name="Picture 4" descr="zhang_binggui.jpg"/>
+          <p:cNvPr id="6" name="Picture 5" descr="typewriter.jpg"/>
           <p:cNvPicPr>
             <a:picLocks noChangeAspect="1"/>
           </p:cNvPicPr>
@@ -4660,15 +4642,15 @@
         </p:nvPicPr>
         <p:blipFill>
           <a:blip r:embed="rId2"/>
-          <a:srcRect t="31848" b="31848"/>
+          <a:srcRect l="5860" r="5860"/>
           <a:stretch>
             <a:fillRect/>
           </a:stretch>
         </p:blipFill>
         <p:spPr>
           <a:xfrm>
-            <a:off x="640080" y="1828800"/>
-            <a:ext cx="5257800" cy="2286000"/>
+            <a:off x="8046720" y="1508760"/>
+            <a:ext cx="4114800" cy="3108960"/>
           </a:xfrm>
           <a:prstGeom prst="rect">
             <a:avLst/>
@@ -4677,14 +4659,14 @@
       </p:pic>
       <p:sp>
         <p:nvSpPr>
-          <p:cNvPr id="6" name="TextBox 5"/>
+          <p:cNvPr id="7" name="TextBox 6"/>
           <p:cNvSpPr txBox="1"/>
           <p:nvPr/>
         </p:nvSpPr>
         <p:spPr>
           <a:xfrm>
-            <a:off x="640080" y="4297680"/>
-            <a:ext cx="5257800" cy="365760"/>
+            <a:off x="8046720" y="4663440"/>
+            <a:ext cx="4114800" cy="365760"/>
           </a:xfrm>
           <a:prstGeom prst="rect">
             <a:avLst/>
@@ -4707,320 +4689,14 @@
                 <a:ea typeface="微软雅黑"/>
                 <a:cs typeface="微软雅黑"/>
               </a:rPr>
-              <a:t>张秉贵（1963年，北京）· 新华社资料</a:t>
-            </a:r>
-          </a:p>
-        </p:txBody>
-      </p:sp>
-      <p:sp>
-        <p:nvSpPr>
-          <p:cNvPr id="7" name="TextBox 6"/>
-          <p:cNvSpPr txBox="1"/>
-          <p:nvPr/>
-        </p:nvSpPr>
-        <p:spPr>
-          <a:xfrm>
-            <a:off x="640080" y="4709160"/>
-            <a:ext cx="5257800" cy="1920240"/>
-          </a:xfrm>
-          <a:prstGeom prst="rect">
-            <a:avLst/>
-          </a:prstGeom>
-          <a:noFill/>
-        </p:spPr>
-        <p:txBody>
-          <a:bodyPr wrap="square" anchor="t" lIns="0" rIns="0" tIns="0" bIns="0">
-            <a:spAutoFit/>
-          </a:bodyPr>
-          <a:lstStyle/>
-          <a:p>
-            <a:pPr algn="l">
-              <a:spcAft>
-                <a:spcPts val="600"/>
-              </a:spcAft>
-            </a:pPr>
-            <a:r>
-              <a:rPr sz="1800" b="1">
-                <a:solidFill>
-                  <a:srgbClr val="B23A2A"/>
-                </a:solidFill>
-                <a:latin typeface="楷体"/>
-                <a:ea typeface="楷体"/>
-                <a:cs typeface="楷体"/>
-              </a:rPr>
-              <a:t>张秉贵（1918—1987）</a:t>
-            </a:r>
-          </a:p>
-          <a:p>
-            <a:pPr algn="l">
-              <a:lnSpc>
-                <a:spcPct val="140000"/>
-              </a:lnSpc>
-              <a:spcAft>
-                <a:spcPts val="400"/>
-              </a:spcAft>
-            </a:pPr>
-            <a:r>
-              <a:rPr sz="1350" b="0">
-                <a:solidFill>
-                  <a:srgbClr val="1C2A33"/>
-                </a:solidFill>
-                <a:latin typeface="楷体"/>
-                <a:ea typeface="楷体"/>
-                <a:cs typeface="楷体"/>
-              </a:rPr>
-              <a:t>· 1955年36岁入王府井百货糖果柜台，一站32年</a:t>
-            </a:r>
-          </a:p>
-          <a:p>
-            <a:pPr algn="l">
-              <a:lnSpc>
-                <a:spcPct val="140000"/>
-              </a:lnSpc>
-              <a:spcAft>
-                <a:spcPts val="400"/>
-              </a:spcAft>
-            </a:pPr>
-            <a:r>
-              <a:rPr sz="1350" b="0">
-                <a:solidFill>
-                  <a:srgbClr val="1C2A33"/>
-                </a:solidFill>
-                <a:latin typeface="楷体"/>
-                <a:ea typeface="楷体"/>
-                <a:cs typeface="楷体"/>
-              </a:rPr>
-              <a:t>· 练就「一抓准」「一口清」，待客近400万人次</a:t>
-            </a:r>
-          </a:p>
-          <a:p>
-            <a:pPr algn="l">
-              <a:lnSpc>
-                <a:spcPct val="140000"/>
-              </a:lnSpc>
-              <a:spcAft>
-                <a:spcPts val="400"/>
-              </a:spcAft>
-            </a:pPr>
-            <a:r>
-              <a:rPr sz="1350" b="0">
-                <a:solidFill>
-                  <a:srgbClr val="1C2A33"/>
-                </a:solidFill>
-                <a:latin typeface="楷体"/>
-                <a:ea typeface="楷体"/>
-                <a:cs typeface="楷体"/>
-              </a:rPr>
-              <a:t>· 发明「接一问二联三」，柜台被誉为「燕京第九景」</a:t>
-            </a:r>
-          </a:p>
-          <a:p>
-            <a:pPr algn="l">
-              <a:lnSpc>
-                <a:spcPct val="140000"/>
-              </a:lnSpc>
-            </a:pPr>
-            <a:r>
-              <a:rPr sz="1350" b="0">
-                <a:solidFill>
-                  <a:srgbClr val="1C2A33"/>
-                </a:solidFill>
-                <a:latin typeface="楷体"/>
-                <a:ea typeface="楷体"/>
-                <a:cs typeface="楷体"/>
-              </a:rPr>
-              <a:t>· 1979年全国劳模，著有《张秉贵柜台服务艺术》</a:t>
-            </a:r>
-          </a:p>
-        </p:txBody>
-      </p:sp>
-      <p:pic>
-        <p:nvPicPr>
-          <p:cNvPr id="8" name="Picture 7" descr="tibet.jpg"/>
-          <p:cNvPicPr>
-            <a:picLocks noChangeAspect="1"/>
-          </p:cNvPicPr>
-          <p:nvPr/>
-        </p:nvPicPr>
-        <p:blipFill>
-          <a:blip r:embed="rId3"/>
-          <a:srcRect t="20918" b="20918"/>
-          <a:stretch>
-            <a:fillRect/>
-          </a:stretch>
-        </p:blipFill>
-        <p:spPr>
-          <a:xfrm>
-            <a:off x="6355080" y="1828800"/>
-            <a:ext cx="5257800" cy="2286000"/>
-          </a:xfrm>
-          <a:prstGeom prst="rect">
-            <a:avLst/>
-          </a:prstGeom>
-        </p:spPr>
-      </p:pic>
-      <p:sp>
-        <p:nvSpPr>
-          <p:cNvPr id="9" name="TextBox 8"/>
-          <p:cNvSpPr txBox="1"/>
-          <p:nvPr/>
-        </p:nvSpPr>
-        <p:spPr>
-          <a:xfrm>
-            <a:off x="6355080" y="4297680"/>
-            <a:ext cx="5257800" cy="365760"/>
-          </a:xfrm>
-          <a:prstGeom prst="rect">
-            <a:avLst/>
-          </a:prstGeom>
-          <a:noFill/>
-        </p:spPr>
-        <p:txBody>
-          <a:bodyPr wrap="square" anchor="t" lIns="0" rIns="0" tIns="0" bIns="0">
-            <a:spAutoFit/>
-          </a:bodyPr>
-          <a:lstStyle/>
-          <a:p>
-            <a:pPr algn="ctr"/>
-            <a:r>
-              <a:rPr sz="1100" b="0">
-                <a:solidFill>
-                  <a:srgbClr val="6B6258"/>
-                </a:solidFill>
-                <a:latin typeface="微软雅黑"/>
-                <a:ea typeface="微软雅黑"/>
-                <a:cs typeface="微软雅黑"/>
-              </a:rPr>
-              <a:t>西藏高原 · 钟扬16年采种之地（环境照）</a:t>
-            </a:r>
-          </a:p>
-        </p:txBody>
-      </p:sp>
-      <p:sp>
-        <p:nvSpPr>
-          <p:cNvPr id="10" name="TextBox 9"/>
-          <p:cNvSpPr txBox="1"/>
-          <p:nvPr/>
-        </p:nvSpPr>
-        <p:spPr>
-          <a:xfrm>
-            <a:off x="6355080" y="4709160"/>
-            <a:ext cx="5257800" cy="1920240"/>
-          </a:xfrm>
-          <a:prstGeom prst="rect">
-            <a:avLst/>
-          </a:prstGeom>
-          <a:noFill/>
-        </p:spPr>
-        <p:txBody>
-          <a:bodyPr wrap="square" anchor="t" lIns="0" rIns="0" tIns="0" bIns="0">
-            <a:spAutoFit/>
-          </a:bodyPr>
-          <a:lstStyle/>
-          <a:p>
-            <a:pPr algn="l">
-              <a:spcAft>
-                <a:spcPts val="600"/>
-              </a:spcAft>
-            </a:pPr>
-            <a:r>
-              <a:rPr sz="1800" b="1">
-                <a:solidFill>
-                  <a:srgbClr val="2E7D6B"/>
-                </a:solidFill>
-                <a:latin typeface="楷体"/>
-                <a:ea typeface="楷体"/>
-                <a:cs typeface="楷体"/>
-              </a:rPr>
-              <a:t>钟扬（1964—2017）</a:t>
-            </a:r>
-          </a:p>
-          <a:p>
-            <a:pPr algn="l">
-              <a:lnSpc>
-                <a:spcPct val="140000"/>
-              </a:lnSpc>
-              <a:spcAft>
-                <a:spcPts val="400"/>
-              </a:spcAft>
-            </a:pPr>
-            <a:r>
-              <a:rPr sz="1350" b="0">
-                <a:solidFill>
-                  <a:srgbClr val="1C2A33"/>
-                </a:solidFill>
-                <a:latin typeface="楷体"/>
-                <a:ea typeface="楷体"/>
-                <a:cs typeface="楷体"/>
-              </a:rPr>
-              <a:t>· 中科大少年班→复旦教授，2001年起援藏16年</a:t>
-            </a:r>
-          </a:p>
-          <a:p>
-            <a:pPr algn="l">
-              <a:lnSpc>
-                <a:spcPct val="140000"/>
-              </a:lnSpc>
-              <a:spcAft>
-                <a:spcPts val="400"/>
-              </a:spcAft>
-            </a:pPr>
-            <a:r>
-              <a:rPr sz="1350" b="0">
-                <a:solidFill>
-                  <a:srgbClr val="1C2A33"/>
-                </a:solidFill>
-                <a:latin typeface="楷体"/>
-                <a:ea typeface="楷体"/>
-                <a:cs typeface="楷体"/>
-              </a:rPr>
-              <a:t>· 采得4000余万颗种子（近西藏植物1/5）</a:t>
-            </a:r>
-          </a:p>
-          <a:p>
-            <a:pPr algn="l">
-              <a:lnSpc>
-                <a:spcPct val="140000"/>
-              </a:lnSpc>
-              <a:spcAft>
-                <a:spcPts val="400"/>
-              </a:spcAft>
-            </a:pPr>
-            <a:r>
-              <a:rPr sz="1350" b="0">
-                <a:solidFill>
-                  <a:srgbClr val="1C2A33"/>
-                </a:solidFill>
-                <a:latin typeface="楷体"/>
-                <a:ea typeface="楷体"/>
-                <a:cs typeface="楷体"/>
-              </a:rPr>
-              <a:t>· 海拔6200米采到鼠曲雪兔子（人类采样最高点）</a:t>
-            </a:r>
-          </a:p>
-          <a:p>
-            <a:pPr algn="l">
-              <a:lnSpc>
-                <a:spcPct val="140000"/>
-              </a:lnSpc>
-            </a:pPr>
-            <a:r>
-              <a:rPr sz="1350" b="0">
-                <a:solidFill>
-                  <a:srgbClr val="1C2A33"/>
-                </a:solidFill>
-                <a:latin typeface="楷体"/>
-                <a:ea typeface="楷体"/>
-                <a:cs typeface="楷体"/>
-              </a:rPr>
-              <a:t>· 2017.9.25赴鄂尔多斯讲课途中车祸殉职，「时代楷模」</a:t>
-            </a:r>
-          </a:p>
-        </p:txBody>
-      </p:sp>
-      <p:sp>
-        <p:nvSpPr>
-          <p:cNvPr id="11" name="TextBox 10"/>
+              <a:t>资料图（自由授权，复用 typewriter.jpg）</a:t>
+            </a:r>
+          </a:p>
+        </p:txBody>
+      </p:sp>
+      <p:sp>
+        <p:nvSpPr>
+          <p:cNvPr id="8" name="TextBox 7"/>
           <p:cNvSpPr txBox="1"/>
           <p:nvPr/>
         </p:nvSpPr>
@@ -5153,7 +4829,7 @@
                 <a:ea typeface="微软雅黑"/>
                 <a:cs typeface="微软雅黑"/>
               </a:rPr>
-              <a:t>重点 · 两篇通讯的核心</a:t>
+              <a:t>学习重点</a:t>
             </a:r>
           </a:p>
         </p:txBody>
@@ -5210,8 +4886,8 @@
         </p:nvSpPr>
         <p:spPr>
           <a:xfrm>
-            <a:off x="640080" y="1920240"/>
-            <a:ext cx="5227167" cy="4023360"/>
+            <a:off x="640080" y="1371600"/>
+            <a:ext cx="10911535" cy="1597152"/>
           </a:xfrm>
           <a:prstGeom prst="roundRect">
             <a:avLst/>
@@ -5219,9 +4895,9 @@
           <a:solidFill>
             <a:srgbClr val="FFFFFF"/>
           </a:solidFill>
-          <a:ln w="25400">
+          <a:ln w="22860">
             <a:solidFill>
-              <a:srgbClr val="B23A2A"/>
+              <a:srgbClr val="C8A86B"/>
             </a:solidFill>
           </a:ln>
           <a:effectLst/>
@@ -5256,8 +4932,8 @@
         </p:nvSpPr>
         <p:spPr>
           <a:xfrm>
-            <a:off x="914400" y="2148840"/>
-            <a:ext cx="4678527" cy="548640"/>
+            <a:off x="1371600" y="1481328"/>
+            <a:ext cx="9997135" cy="457200"/>
           </a:xfrm>
           <a:prstGeom prst="rect">
             <a:avLst/>
@@ -5270,171 +4946,62 @@
           </a:bodyPr>
           <a:lstStyle/>
           <a:p>
-            <a:pPr algn="l"/>
-            <a:r>
-              <a:rPr sz="2000" b="1">
-                <a:solidFill>
-                  <a:srgbClr val="B23A2A"/>
+            <a:pPr algn="l">
+              <a:lnSpc>
+                <a:spcPct val="110000"/>
+              </a:lnSpc>
+            </a:pPr>
+            <a:r>
+              <a:rPr sz="1600" b="1">
+                <a:solidFill>
+                  <a:srgbClr val="1C2A33"/>
+                </a:solidFill>
+                <a:latin typeface="微软雅黑"/>
+                <a:ea typeface="微软雅黑"/>
+                <a:cs typeface="微软雅黑"/>
+              </a:rPr>
+              <a:t/>
+            </a:r>
+          </a:p>
+        </p:txBody>
+      </p:sp>
+      <p:sp>
+        <p:nvSpPr>
+          <p:cNvPr id="7" name="TextBox 6"/>
+          <p:cNvSpPr txBox="1"/>
+          <p:nvPr/>
+        </p:nvSpPr>
+        <p:spPr>
+          <a:xfrm>
+            <a:off x="1371600" y="1920240"/>
+            <a:ext cx="9997135" cy="957072"/>
+          </a:xfrm>
+          <a:prstGeom prst="rect">
+            <a:avLst/>
+          </a:prstGeom>
+          <a:noFill/>
+        </p:spPr>
+        <p:txBody>
+          <a:bodyPr wrap="square" anchor="t" lIns="0" rIns="0" tIns="0" bIns="0">
+            <a:spAutoFit/>
+          </a:bodyPr>
+          <a:lstStyle/>
+          <a:p>
+            <a:pPr algn="l">
+              <a:lnSpc>
+                <a:spcPct val="128000"/>
+              </a:lnSpc>
+            </a:pPr>
+            <a:r>
+              <a:rPr sz="1100" b="0">
+                <a:solidFill>
+                  <a:srgbClr val="1C2A33"/>
                 </a:solidFill>
                 <a:latin typeface="楷体"/>
                 <a:ea typeface="楷体"/>
                 <a:cs typeface="楷体"/>
               </a:rPr>
-              <a:t>《心有一团火》· 张秉贵</a:t>
-            </a:r>
-          </a:p>
-        </p:txBody>
-      </p:sp>
-      <p:sp>
-        <p:nvSpPr>
-          <p:cNvPr id="7" name="TextBox 6"/>
-          <p:cNvSpPr txBox="1"/>
-          <p:nvPr/>
-        </p:nvSpPr>
-        <p:spPr>
-          <a:xfrm>
-            <a:off x="914400" y="2880360"/>
-            <a:ext cx="4678527" cy="2834640"/>
-          </a:xfrm>
-          <a:prstGeom prst="rect">
-            <a:avLst/>
-          </a:prstGeom>
-          <a:noFill/>
-        </p:spPr>
-        <p:txBody>
-          <a:bodyPr wrap="square" anchor="t" lIns="0" rIns="0" tIns="0" bIns="0">
-            <a:spAutoFit/>
-          </a:bodyPr>
-          <a:lstStyle/>
-          <a:p>
-            <a:pPr algn="l">
-              <a:spcAft>
-                <a:spcPts val="200"/>
-              </a:spcAft>
-            </a:pPr>
-            <a:r>
-              <a:rPr sz="1800" b="1">
-                <a:solidFill>
-                  <a:srgbClr val="1C2A33"/>
-                </a:solidFill>
-                <a:latin typeface="楷体"/>
-                <a:ea typeface="楷体"/>
-                <a:cs typeface="楷体"/>
-              </a:rPr>
-              <a:t>一抓准</a:t>
-            </a:r>
-          </a:p>
-          <a:p>
-            <a:pPr algn="l">
-              <a:lnSpc>
-                <a:spcPct val="145000"/>
-              </a:lnSpc>
-              <a:spcAft>
-                <a:spcPts val="1000"/>
-              </a:spcAft>
-            </a:pPr>
-            <a:r>
-              <a:rPr sz="1400" b="0">
-                <a:solidFill>
-                  <a:srgbClr val="6B6258"/>
-                </a:solidFill>
-                <a:latin typeface="楷体"/>
-                <a:ea typeface="楷体"/>
-                <a:cs typeface="楷体"/>
-              </a:rPr>
-              <a:t>要几斤几两，一把抓来分毫不差——缩短排队时间。</a:t>
-            </a:r>
-          </a:p>
-          <a:p>
-            <a:pPr algn="l">
-              <a:spcAft>
-                <a:spcPts val="200"/>
-              </a:spcAft>
-            </a:pPr>
-            <a:r>
-              <a:rPr sz="1800" b="1">
-                <a:solidFill>
-                  <a:srgbClr val="1C2A33"/>
-                </a:solidFill>
-                <a:latin typeface="楷体"/>
-                <a:ea typeface="楷体"/>
-                <a:cs typeface="楷体"/>
-              </a:rPr>
-              <a:t>一口清</a:t>
-            </a:r>
-          </a:p>
-          <a:p>
-            <a:pPr algn="l">
-              <a:lnSpc>
-                <a:spcPct val="145000"/>
-              </a:lnSpc>
-              <a:spcAft>
-                <a:spcPts val="1000"/>
-              </a:spcAft>
-            </a:pPr>
-            <a:r>
-              <a:rPr sz="1400" b="0">
-                <a:solidFill>
-                  <a:srgbClr val="6B6258"/>
-                </a:solidFill>
-                <a:latin typeface="楷体"/>
-                <a:ea typeface="楷体"/>
-                <a:cs typeface="楷体"/>
-              </a:rPr>
-              <a:t>称包同时心算报价，分毫不差。</a:t>
-            </a:r>
-          </a:p>
-          <a:p>
-            <a:pPr algn="l">
-              <a:spcAft>
-                <a:spcPts val="200"/>
-              </a:spcAft>
-            </a:pPr>
-            <a:r>
-              <a:rPr sz="1800" b="1">
-                <a:solidFill>
-                  <a:srgbClr val="1C2A33"/>
-                </a:solidFill>
-                <a:latin typeface="楷体"/>
-                <a:ea typeface="楷体"/>
-                <a:cs typeface="楷体"/>
-              </a:rPr>
-              <a:t>一团火</a:t>
-            </a:r>
-          </a:p>
-          <a:p>
-            <a:pPr algn="l">
-              <a:lnSpc>
-                <a:spcPct val="145000"/>
-              </a:lnSpc>
-              <a:spcAft>
-                <a:spcPts val="1000"/>
-              </a:spcAft>
-            </a:pPr>
-            <a:r>
-              <a:rPr sz="1400" b="0">
-                <a:solidFill>
-                  <a:srgbClr val="6B6258"/>
-                </a:solidFill>
-                <a:latin typeface="楷体"/>
-                <a:ea typeface="楷体"/>
-                <a:cs typeface="楷体"/>
-              </a:rPr>
-              <a:t>32年温暖每一位顾客，把售货做成服务艺术。</a:t>
-            </a:r>
-          </a:p>
-          <a:p>
-            <a:pPr algn="l"/>
-            <a:r>
-              <a:rPr sz="1600" b="1">
-                <a:solidFill>
-                  <a:srgbClr val="B23A2A"/>
-                </a:solidFill>
-                <a:latin typeface="楷体"/>
-                <a:ea typeface="楷体"/>
-                <a:cs typeface="楷体"/>
-              </a:rPr>
-              <a:t>→ 平凡岗位的精益求精</a:t>
+              <a:t>① 《心有一团火》核心：张秉贵「一抓准」（称糖一抓即准）、「一口清」（心算价钱一口报出）、「一团火」（服务态度温暖如火）——平凡岗位的精益求精。</a:t>
             </a:r>
           </a:p>
         </p:txBody>
@@ -5447,8 +5014,8 @@
         </p:nvSpPr>
         <p:spPr>
           <a:xfrm>
-            <a:off x="6324447" y="1920240"/>
-            <a:ext cx="5227167" cy="4023360"/>
+            <a:off x="640080" y="3078480"/>
+            <a:ext cx="10911535" cy="1597152"/>
           </a:xfrm>
           <a:prstGeom prst="roundRect">
             <a:avLst/>
@@ -5456,9 +5023,9 @@
           <a:solidFill>
             <a:srgbClr val="FFFFFF"/>
           </a:solidFill>
-          <a:ln w="25400">
+          <a:ln w="22860">
             <a:solidFill>
-              <a:srgbClr val="2E7D6B"/>
+              <a:srgbClr val="C8A86B"/>
             </a:solidFill>
           </a:ln>
           <a:effectLst/>
@@ -5493,8 +5060,8 @@
         </p:nvSpPr>
         <p:spPr>
           <a:xfrm>
-            <a:off x="6598767" y="2148840"/>
-            <a:ext cx="4678527" cy="548640"/>
+            <a:off x="1371600" y="3188208"/>
+            <a:ext cx="9997135" cy="457200"/>
           </a:xfrm>
           <a:prstGeom prst="rect">
             <a:avLst/>
@@ -5507,31 +5074,122 @@
           </a:bodyPr>
           <a:lstStyle/>
           <a:p>
-            <a:pPr algn="l"/>
-            <a:r>
-              <a:rPr sz="2000" b="1">
-                <a:solidFill>
-                  <a:srgbClr val="2E7D6B"/>
+            <a:pPr algn="l">
+              <a:lnSpc>
+                <a:spcPct val="110000"/>
+              </a:lnSpc>
+            </a:pPr>
+            <a:r>
+              <a:rPr sz="1600" b="1">
+                <a:solidFill>
+                  <a:srgbClr val="1C2A33"/>
+                </a:solidFill>
+                <a:latin typeface="微软雅黑"/>
+                <a:ea typeface="微软雅黑"/>
+                <a:cs typeface="微软雅黑"/>
+              </a:rPr>
+              <a:t/>
+            </a:r>
+          </a:p>
+        </p:txBody>
+      </p:sp>
+      <p:sp>
+        <p:nvSpPr>
+          <p:cNvPr id="10" name="TextBox 9"/>
+          <p:cNvSpPr txBox="1"/>
+          <p:nvPr/>
+        </p:nvSpPr>
+        <p:spPr>
+          <a:xfrm>
+            <a:off x="1371600" y="3627120"/>
+            <a:ext cx="9997135" cy="957072"/>
+          </a:xfrm>
+          <a:prstGeom prst="rect">
+            <a:avLst/>
+          </a:prstGeom>
+          <a:noFill/>
+        </p:spPr>
+        <p:txBody>
+          <a:bodyPr wrap="square" anchor="t" lIns="0" rIns="0" tIns="0" bIns="0">
+            <a:spAutoFit/>
+          </a:bodyPr>
+          <a:lstStyle/>
+          <a:p>
+            <a:pPr algn="l">
+              <a:lnSpc>
+                <a:spcPct val="128000"/>
+              </a:lnSpc>
+            </a:pPr>
+            <a:r>
+              <a:rPr sz="1200" b="0">
+                <a:solidFill>
+                  <a:srgbClr val="1C2A33"/>
                 </a:solidFill>
                 <a:latin typeface="楷体"/>
                 <a:ea typeface="楷体"/>
                 <a:cs typeface="楷体"/>
               </a:rPr>
-              <a:t>《"探界者"钟扬》· 钟扬</a:t>
-            </a:r>
-          </a:p>
-        </p:txBody>
-      </p:sp>
-      <p:sp>
-        <p:nvSpPr>
-          <p:cNvPr id="10" name="TextBox 9"/>
+              <a:t>② 《"探界者"钟扬》核心：16年西藏采种、收集4000万颗种子、援藏教育——知识分子的跨界探索与奉献。</a:t>
+            </a:r>
+          </a:p>
+        </p:txBody>
+      </p:sp>
+      <p:sp>
+        <p:nvSpPr>
+          <p:cNvPr id="11" name="Rounded Rectangle 10"/>
+          <p:cNvSpPr/>
+          <p:nvPr/>
+        </p:nvSpPr>
+        <p:spPr>
+          <a:xfrm>
+            <a:off x="640080" y="4785360"/>
+            <a:ext cx="10911535" cy="1597152"/>
+          </a:xfrm>
+          <a:prstGeom prst="roundRect">
+            <a:avLst/>
+          </a:prstGeom>
+          <a:solidFill>
+            <a:srgbClr val="FFFFFF"/>
+          </a:solidFill>
+          <a:ln w="22860">
+            <a:solidFill>
+              <a:srgbClr val="C8A86B"/>
+            </a:solidFill>
+          </a:ln>
+          <a:effectLst/>
+        </p:spPr>
+        <p:style>
+          <a:lnRef idx="1">
+            <a:schemeClr val="accent1"/>
+          </a:lnRef>
+          <a:fillRef idx="3">
+            <a:schemeClr val="accent1"/>
+          </a:fillRef>
+          <a:effectRef idx="2">
+            <a:schemeClr val="accent1"/>
+          </a:effectRef>
+          <a:fontRef idx="minor">
+            <a:schemeClr val="lt1"/>
+          </a:fontRef>
+        </p:style>
+        <p:txBody>
+          <a:bodyPr rtlCol="0" anchor="ctr"/>
+          <a:lstStyle/>
+          <a:p>
+            <a:pPr algn="ctr"/>
+          </a:p>
+        </p:txBody>
+      </p:sp>
+      <p:sp>
+        <p:nvSpPr>
+          <p:cNvPr id="12" name="TextBox 11"/>
           <p:cNvSpPr txBox="1"/>
           <p:nvPr/>
         </p:nvSpPr>
         <p:spPr>
           <a:xfrm>
-            <a:off x="6598767" y="2880360"/>
-            <a:ext cx="4678527" cy="2834640"/>
+            <a:off x="1371600" y="4895088"/>
+            <a:ext cx="9997135" cy="457200"/>
           </a:xfrm>
           <a:prstGeom prst="rect">
             <a:avLst/>
@@ -5545,12 +5203,53 @@
           <a:lstStyle/>
           <a:p>
             <a:pPr algn="l">
-              <a:spcAft>
-                <a:spcPts val="200"/>
-              </a:spcAft>
+              <a:lnSpc>
+                <a:spcPct val="110000"/>
+              </a:lnSpc>
             </a:pPr>
             <a:r>
-              <a:rPr sz="1800" b="1">
+              <a:rPr sz="1600" b="1">
+                <a:solidFill>
+                  <a:srgbClr val="1C2A33"/>
+                </a:solidFill>
+                <a:latin typeface="微软雅黑"/>
+                <a:ea typeface="微软雅黑"/>
+                <a:cs typeface="微软雅黑"/>
+              </a:rPr>
+              <a:t/>
+            </a:r>
+          </a:p>
+        </p:txBody>
+      </p:sp>
+      <p:sp>
+        <p:nvSpPr>
+          <p:cNvPr id="13" name="TextBox 12"/>
+          <p:cNvSpPr txBox="1"/>
+          <p:nvPr/>
+        </p:nvSpPr>
+        <p:spPr>
+          <a:xfrm>
+            <a:off x="1371600" y="5334000"/>
+            <a:ext cx="9997135" cy="957072"/>
+          </a:xfrm>
+          <a:prstGeom prst="rect">
+            <a:avLst/>
+          </a:prstGeom>
+          <a:noFill/>
+        </p:spPr>
+        <p:txBody>
+          <a:bodyPr wrap="square" anchor="t" lIns="0" rIns="0" tIns="0" bIns="0">
+            <a:spAutoFit/>
+          </a:bodyPr>
+          <a:lstStyle/>
+          <a:p>
+            <a:pPr algn="l">
+              <a:lnSpc>
+                <a:spcPct val="128000"/>
+              </a:lnSpc>
+            </a:pPr>
+            <a:r>
+              <a:rPr sz="1100" b="0">
                 <a:solidFill>
                   <a:srgbClr val="1C2A33"/>
                 </a:solidFill>
@@ -5558,127 +5257,14 @@
                 <a:ea typeface="楷体"/>
                 <a:cs typeface="楷体"/>
               </a:rPr>
-              <a:t>16年</a:t>
-            </a:r>
-          </a:p>
-          <a:p>
-            <a:pPr algn="l">
-              <a:lnSpc>
-                <a:spcPct val="145000"/>
-              </a:lnSpc>
-              <a:spcAft>
-                <a:spcPts val="1000"/>
-              </a:spcAft>
-            </a:pPr>
-            <a:r>
-              <a:rPr sz="1400" b="0">
-                <a:solidFill>
-                  <a:srgbClr val="6B6258"/>
-                </a:solidFill>
-                <a:latin typeface="楷体"/>
-                <a:ea typeface="楷体"/>
-                <a:cs typeface="楷体"/>
-              </a:rPr>
-              <a:t>扎根西藏，跋涉50多万公里盘点植物「家底」。</a:t>
-            </a:r>
-          </a:p>
-          <a:p>
-            <a:pPr algn="l">
-              <a:spcAft>
-                <a:spcPts val="200"/>
-              </a:spcAft>
-            </a:pPr>
-            <a:r>
-              <a:rPr sz="1800" b="1">
-                <a:solidFill>
-                  <a:srgbClr val="1C2A33"/>
-                </a:solidFill>
-                <a:latin typeface="楷体"/>
-                <a:ea typeface="楷体"/>
-                <a:cs typeface="楷体"/>
-              </a:rPr>
-              <a:t>4000万颗种子</a:t>
-            </a:r>
-          </a:p>
-          <a:p>
-            <a:pPr algn="l">
-              <a:lnSpc>
-                <a:spcPct val="145000"/>
-              </a:lnSpc>
-              <a:spcAft>
-                <a:spcPts val="1000"/>
-              </a:spcAft>
-            </a:pPr>
-            <a:r>
-              <a:rPr sz="1400" b="0">
-                <a:solidFill>
-                  <a:srgbClr val="6B6258"/>
-                </a:solidFill>
-                <a:latin typeface="楷体"/>
-                <a:ea typeface="楷体"/>
-                <a:cs typeface="楷体"/>
-              </a:rPr>
-              <a:t>为未来建一艘种子的「诺亚方舟」。</a:t>
-            </a:r>
-          </a:p>
-          <a:p>
-            <a:pPr algn="l">
-              <a:spcAft>
-                <a:spcPts val="200"/>
-              </a:spcAft>
-            </a:pPr>
-            <a:r>
-              <a:rPr sz="1800" b="1">
-                <a:solidFill>
-                  <a:srgbClr val="1C2A33"/>
-                </a:solidFill>
-                <a:latin typeface="楷体"/>
-                <a:ea typeface="楷体"/>
-                <a:cs typeface="楷体"/>
-              </a:rPr>
-              <a:t>探界者</a:t>
-            </a:r>
-          </a:p>
-          <a:p>
-            <a:pPr algn="l">
-              <a:lnSpc>
-                <a:spcPct val="145000"/>
-              </a:lnSpc>
-              <a:spcAft>
-                <a:spcPts val="1000"/>
-              </a:spcAft>
-            </a:pPr>
-            <a:r>
-              <a:rPr sz="1400" b="0">
-                <a:solidFill>
-                  <a:srgbClr val="6B6258"/>
-                </a:solidFill>
-                <a:latin typeface="楷体"/>
-                <a:ea typeface="楷体"/>
-                <a:cs typeface="楷体"/>
-              </a:rPr>
-              <a:t>跨界（平原→高原·植物学→教育）的执着奉献。</a:t>
-            </a:r>
-          </a:p>
-          <a:p>
-            <a:pPr algn="l"/>
-            <a:r>
-              <a:rPr sz="1600" b="1">
-                <a:solidFill>
-                  <a:srgbClr val="2E7D6B"/>
-                </a:solidFill>
-                <a:latin typeface="楷体"/>
-                <a:ea typeface="楷体"/>
-                <a:cs typeface="楷体"/>
-              </a:rPr>
-              <a:t>→ 知识分子的跨界奉献</a:t>
-            </a:r>
-          </a:p>
-        </p:txBody>
-      </p:sp>
-      <p:sp>
-        <p:nvSpPr>
-          <p:cNvPr id="11" name="TextBox 10"/>
+              <a:t>③ 群文比较维度：人物身份（售货员/教授）·劳动场景（柜组/高原）·精神共性（坚守·奉献）·选材手法（细节反复/时间跨度）。</a:t>
+            </a:r>
+          </a:p>
+        </p:txBody>
+      </p:sp>
+      <p:sp>
+        <p:nvSpPr>
+          <p:cNvPr id="14" name="TextBox 13"/>
           <p:cNvSpPr txBox="1"/>
           <p:nvPr/>
         </p:nvSpPr>
@@ -5805,13 +5391,13 @@
             <a:r>
               <a:rPr sz="1300" b="1">
                 <a:solidFill>
-                  <a:srgbClr val="B23A2A"/>
+                  <a:srgbClr val="2E7D6B"/>
                 </a:solidFill>
                 <a:latin typeface="微软雅黑"/>
                 <a:ea typeface="微软雅黑"/>
                 <a:cs typeface="微软雅黑"/>
               </a:rPr>
-              <a:t>难点 · 怎么破</a:t>
+              <a:t>学习路径</a:t>
             </a:r>
           </a:p>
         </p:txBody>
@@ -5828,342 +5414,6 @@
             <a:ext cx="822960" cy="30480"/>
           </a:xfrm>
           <a:prstGeom prst="rect">
-            <a:avLst/>
-          </a:prstGeom>
-          <a:solidFill>
-            <a:srgbClr val="B23A2A"/>
-          </a:solidFill>
-          <a:ln>
-            <a:noFill/>
-          </a:ln>
-          <a:effectLst/>
-        </p:spPr>
-        <p:style>
-          <a:lnRef idx="1">
-            <a:schemeClr val="accent1"/>
-          </a:lnRef>
-          <a:fillRef idx="3">
-            <a:schemeClr val="accent1"/>
-          </a:fillRef>
-          <a:effectRef idx="2">
-            <a:schemeClr val="accent1"/>
-          </a:effectRef>
-          <a:fontRef idx="minor">
-            <a:schemeClr val="lt1"/>
-          </a:fontRef>
-        </p:style>
-        <p:txBody>
-          <a:bodyPr rtlCol="0" anchor="ctr"/>
-          <a:lstStyle/>
-          <a:p>
-            <a:pPr algn="ctr"/>
-          </a:p>
-        </p:txBody>
-      </p:sp>
-      <p:sp>
-        <p:nvSpPr>
-          <p:cNvPr id="5" name="TextBox 4"/>
-          <p:cNvSpPr txBox="1"/>
-          <p:nvPr/>
-        </p:nvSpPr>
-        <p:spPr>
-          <a:xfrm>
-            <a:off x="640080" y="1325880"/>
-            <a:ext cx="10058400" cy="548640"/>
-          </a:xfrm>
-          <a:prstGeom prst="rect">
-            <a:avLst/>
-          </a:prstGeom>
-          <a:noFill/>
-        </p:spPr>
-        <p:txBody>
-          <a:bodyPr wrap="square" anchor="t" lIns="0" rIns="0" tIns="0" bIns="0">
-            <a:spAutoFit/>
-          </a:bodyPr>
-          <a:lstStyle/>
-          <a:p>
-            <a:pPr algn="l"/>
-            <a:r>
-              <a:rPr sz="2600" b="1">
-                <a:solidFill>
-                  <a:srgbClr val="1C2A33"/>
-                </a:solidFill>
-                <a:latin typeface="楷体"/>
-                <a:ea typeface="楷体"/>
-                <a:cs typeface="楷体"/>
-              </a:rPr>
-              <a:t>三个易卡住的地方</a:t>
-            </a:r>
-          </a:p>
-        </p:txBody>
-      </p:sp>
-      <p:sp>
-        <p:nvSpPr>
-          <p:cNvPr id="6" name="Rounded Rectangle 5"/>
-          <p:cNvSpPr/>
-          <p:nvPr/>
-        </p:nvSpPr>
-        <p:spPr>
-          <a:xfrm>
-            <a:off x="640080" y="2194560"/>
-            <a:ext cx="3393338" cy="3840480"/>
-          </a:xfrm>
-          <a:prstGeom prst="roundRect">
-            <a:avLst/>
-          </a:prstGeom>
-          <a:solidFill>
-            <a:srgbClr val="FFFFFF"/>
-          </a:solidFill>
-          <a:ln w="20320">
-            <a:solidFill>
-              <a:srgbClr val="B23A2A"/>
-            </a:solidFill>
-          </a:ln>
-          <a:effectLst/>
-        </p:spPr>
-        <p:style>
-          <a:lnRef idx="1">
-            <a:schemeClr val="accent1"/>
-          </a:lnRef>
-          <a:fillRef idx="3">
-            <a:schemeClr val="accent1"/>
-          </a:fillRef>
-          <a:effectRef idx="2">
-            <a:schemeClr val="accent1"/>
-          </a:effectRef>
-          <a:fontRef idx="minor">
-            <a:schemeClr val="lt1"/>
-          </a:fontRef>
-        </p:style>
-        <p:txBody>
-          <a:bodyPr rtlCol="0" anchor="ctr"/>
-          <a:lstStyle/>
-          <a:p>
-            <a:pPr algn="ctr"/>
-          </a:p>
-        </p:txBody>
-      </p:sp>
-      <p:sp>
-        <p:nvSpPr>
-          <p:cNvPr id="7" name="Oval 6"/>
-          <p:cNvSpPr/>
-          <p:nvPr/>
-        </p:nvSpPr>
-        <p:spPr>
-          <a:xfrm>
-            <a:off x="868680" y="2423160"/>
-            <a:ext cx="548640" cy="548640"/>
-          </a:xfrm>
-          <a:prstGeom prst="ellipse">
-            <a:avLst/>
-          </a:prstGeom>
-          <a:solidFill>
-            <a:srgbClr val="B23A2A"/>
-          </a:solidFill>
-          <a:ln>
-            <a:noFill/>
-          </a:ln>
-          <a:effectLst/>
-        </p:spPr>
-        <p:style>
-          <a:lnRef idx="1">
-            <a:schemeClr val="accent1"/>
-          </a:lnRef>
-          <a:fillRef idx="3">
-            <a:schemeClr val="accent1"/>
-          </a:fillRef>
-          <a:effectRef idx="2">
-            <a:schemeClr val="accent1"/>
-          </a:effectRef>
-          <a:fontRef idx="minor">
-            <a:schemeClr val="lt1"/>
-          </a:fontRef>
-        </p:style>
-        <p:txBody>
-          <a:bodyPr rtlCol="0" anchor="ctr"/>
-          <a:lstStyle/>
-          <a:p>
-            <a:pPr algn="ctr"/>
-          </a:p>
-        </p:txBody>
-      </p:sp>
-      <p:sp>
-        <p:nvSpPr>
-          <p:cNvPr id="8" name="TextBox 7"/>
-          <p:cNvSpPr txBox="1"/>
-          <p:nvPr/>
-        </p:nvSpPr>
-        <p:spPr>
-          <a:xfrm>
-            <a:off x="868680" y="2496312"/>
-            <a:ext cx="548640" cy="411480"/>
-          </a:xfrm>
-          <a:prstGeom prst="rect">
-            <a:avLst/>
-          </a:prstGeom>
-          <a:noFill/>
-        </p:spPr>
-        <p:txBody>
-          <a:bodyPr wrap="square" anchor="t" lIns="0" rIns="0" tIns="0" bIns="0">
-            <a:spAutoFit/>
-          </a:bodyPr>
-          <a:lstStyle/>
-          <a:p>
-            <a:pPr algn="ctr"/>
-            <a:r>
-              <a:rPr sz="2000" b="1">
-                <a:solidFill>
-                  <a:srgbClr val="FFFFFF"/>
-                </a:solidFill>
-                <a:latin typeface="微软雅黑"/>
-                <a:ea typeface="微软雅黑"/>
-                <a:cs typeface="微软雅黑"/>
-              </a:rPr>
-              <a:t>1</a:t>
-            </a:r>
-          </a:p>
-        </p:txBody>
-      </p:sp>
-      <p:sp>
-        <p:nvSpPr>
-          <p:cNvPr id="9" name="TextBox 8"/>
-          <p:cNvSpPr txBox="1"/>
-          <p:nvPr/>
-        </p:nvSpPr>
-        <p:spPr>
-          <a:xfrm>
-            <a:off x="1554480" y="2450592"/>
-            <a:ext cx="2296058" cy="731520"/>
-          </a:xfrm>
-          <a:prstGeom prst="rect">
-            <a:avLst/>
-          </a:prstGeom>
-          <a:noFill/>
-        </p:spPr>
-        <p:txBody>
-          <a:bodyPr wrap="square" anchor="t" lIns="0" rIns="0" tIns="0" bIns="0">
-            <a:spAutoFit/>
-          </a:bodyPr>
-          <a:lstStyle/>
-          <a:p>
-            <a:pPr algn="l">
-              <a:lnSpc>
-                <a:spcPct val="130000"/>
-              </a:lnSpc>
-            </a:pPr>
-            <a:r>
-              <a:rPr sz="1650" b="1">
-                <a:solidFill>
-                  <a:srgbClr val="1C2A33"/>
-                </a:solidFill>
-                <a:latin typeface="楷体"/>
-                <a:ea typeface="楷体"/>
-                <a:cs typeface="楷体"/>
-              </a:rPr>
-              <a:t>「一团火」的时代隔阂</a:t>
-            </a:r>
-          </a:p>
-        </p:txBody>
-      </p:sp>
-      <p:sp>
-        <p:nvSpPr>
-          <p:cNvPr id="10" name="TextBox 9"/>
-          <p:cNvSpPr txBox="1"/>
-          <p:nvPr/>
-        </p:nvSpPr>
-        <p:spPr>
-          <a:xfrm>
-            <a:off x="914400" y="3246120"/>
-            <a:ext cx="2844698" cy="2651760"/>
-          </a:xfrm>
-          <a:prstGeom prst="rect">
-            <a:avLst/>
-          </a:prstGeom>
-          <a:noFill/>
-        </p:spPr>
-        <p:txBody>
-          <a:bodyPr wrap="square" anchor="t" lIns="0" rIns="0" tIns="0" bIns="0">
-            <a:spAutoFit/>
-          </a:bodyPr>
-          <a:lstStyle/>
-          <a:p>
-            <a:pPr algn="l">
-              <a:lnSpc>
-                <a:spcPct val="150000"/>
-              </a:lnSpc>
-            </a:pPr>
-            <a:r>
-              <a:rPr sz="1400" b="0">
-                <a:solidFill>
-                  <a:srgbClr val="1C2A33"/>
-                </a:solidFill>
-                <a:latin typeface="楷体"/>
-                <a:ea typeface="楷体"/>
-                <a:cs typeface="楷体"/>
-              </a:rPr>
-              <a:t>电商时代难体会柜台服务的分量。→ 用1960年代百货长队场景与老顾客回忆，搭背景支架。</a:t>
-            </a:r>
-          </a:p>
-        </p:txBody>
-      </p:sp>
-      <p:sp>
-        <p:nvSpPr>
-          <p:cNvPr id="11" name="Rounded Rectangle 10"/>
-          <p:cNvSpPr/>
-          <p:nvPr/>
-        </p:nvSpPr>
-        <p:spPr>
-          <a:xfrm>
-            <a:off x="4399178" y="2194560"/>
-            <a:ext cx="3393338" cy="3840480"/>
-          </a:xfrm>
-          <a:prstGeom prst="roundRect">
-            <a:avLst/>
-          </a:prstGeom>
-          <a:solidFill>
-            <a:srgbClr val="FFFFFF"/>
-          </a:solidFill>
-          <a:ln w="20320">
-            <a:solidFill>
-              <a:srgbClr val="2E7D6B"/>
-            </a:solidFill>
-          </a:ln>
-          <a:effectLst/>
-        </p:spPr>
-        <p:style>
-          <a:lnRef idx="1">
-            <a:schemeClr val="accent1"/>
-          </a:lnRef>
-          <a:fillRef idx="3">
-            <a:schemeClr val="accent1"/>
-          </a:fillRef>
-          <a:effectRef idx="2">
-            <a:schemeClr val="accent1"/>
-          </a:effectRef>
-          <a:fontRef idx="minor">
-            <a:schemeClr val="lt1"/>
-          </a:fontRef>
-        </p:style>
-        <p:txBody>
-          <a:bodyPr rtlCol="0" anchor="ctr"/>
-          <a:lstStyle/>
-          <a:p>
-            <a:pPr algn="ctr"/>
-          </a:p>
-        </p:txBody>
-      </p:sp>
-      <p:sp>
-        <p:nvSpPr>
-          <p:cNvPr id="12" name="Oval 11"/>
-          <p:cNvSpPr/>
-          <p:nvPr/>
-        </p:nvSpPr>
-        <p:spPr>
-          <a:xfrm>
-            <a:off x="4627778" y="2423160"/>
-            <a:ext cx="548640" cy="548640"/>
-          </a:xfrm>
-          <a:prstGeom prst="ellipse">
             <a:avLst/>
           </a:prstGeom>
           <a:solidFill>
@@ -6198,14 +5448,104 @@
       </p:sp>
       <p:sp>
         <p:nvSpPr>
-          <p:cNvPr id="13" name="TextBox 12"/>
+          <p:cNvPr id="5" name="Rounded Rectangle 4"/>
+          <p:cNvSpPr/>
+          <p:nvPr/>
+        </p:nvSpPr>
+        <p:spPr>
+          <a:xfrm>
+            <a:off x="640080" y="1371600"/>
+            <a:ext cx="10911535" cy="685800"/>
+          </a:xfrm>
+          <a:prstGeom prst="roundRect">
+            <a:avLst/>
+          </a:prstGeom>
+          <a:solidFill>
+            <a:srgbClr val="FFFFFF"/>
+          </a:solidFill>
+          <a:ln w="22860">
+            <a:solidFill>
+              <a:srgbClr val="2E7D6B"/>
+            </a:solidFill>
+          </a:ln>
+          <a:effectLst/>
+        </p:spPr>
+        <p:style>
+          <a:lnRef idx="1">
+            <a:schemeClr val="accent1"/>
+          </a:lnRef>
+          <a:fillRef idx="3">
+            <a:schemeClr val="accent1"/>
+          </a:fillRef>
+          <a:effectRef idx="2">
+            <a:schemeClr val="accent1"/>
+          </a:effectRef>
+          <a:fontRef idx="minor">
+            <a:schemeClr val="lt1"/>
+          </a:fontRef>
+        </p:style>
+        <p:txBody>
+          <a:bodyPr rtlCol="0" anchor="ctr"/>
+          <a:lstStyle/>
+          <a:p>
+            <a:pPr algn="ctr"/>
+          </a:p>
+        </p:txBody>
+      </p:sp>
+      <p:sp>
+        <p:nvSpPr>
+          <p:cNvPr id="6" name="Oval 5"/>
+          <p:cNvSpPr/>
+          <p:nvPr/>
+        </p:nvSpPr>
+        <p:spPr>
+          <a:xfrm>
+            <a:off x="804672" y="1536192"/>
+            <a:ext cx="457200" cy="457200"/>
+          </a:xfrm>
+          <a:prstGeom prst="ellipse">
+            <a:avLst/>
+          </a:prstGeom>
+          <a:solidFill>
+            <a:srgbClr val="2E7D6B"/>
+          </a:solidFill>
+          <a:ln>
+            <a:noFill/>
+          </a:ln>
+          <a:effectLst/>
+        </p:spPr>
+        <p:style>
+          <a:lnRef idx="1">
+            <a:schemeClr val="accent1"/>
+          </a:lnRef>
+          <a:fillRef idx="3">
+            <a:schemeClr val="accent1"/>
+          </a:fillRef>
+          <a:effectRef idx="2">
+            <a:schemeClr val="accent1"/>
+          </a:effectRef>
+          <a:fontRef idx="minor">
+            <a:schemeClr val="lt1"/>
+          </a:fontRef>
+        </p:style>
+        <p:txBody>
+          <a:bodyPr rtlCol="0" anchor="ctr"/>
+          <a:lstStyle/>
+          <a:p>
+            <a:pPr algn="ctr"/>
+          </a:p>
+        </p:txBody>
+      </p:sp>
+      <p:sp>
+        <p:nvSpPr>
+          <p:cNvPr id="7" name="TextBox 6"/>
           <p:cNvSpPr txBox="1"/>
           <p:nvPr/>
         </p:nvSpPr>
         <p:spPr>
           <a:xfrm>
-            <a:off x="4627778" y="2496312"/>
-            <a:ext cx="548640" cy="411480"/>
+            <a:off x="804672" y="1591056"/>
+            <a:ext cx="457200" cy="384048"/>
           </a:xfrm>
           <a:prstGeom prst="rect">
             <a:avLst/>
@@ -6220,7 +5560,175 @@
           <a:p>
             <a:pPr algn="ctr"/>
             <a:r>
-              <a:rPr sz="2000" b="1">
+              <a:rPr sz="1600" b="1">
+                <a:solidFill>
+                  <a:srgbClr val="FFFFFF"/>
+                </a:solidFill>
+                <a:latin typeface="微软雅黑"/>
+                <a:ea typeface="微软雅黑"/>
+                <a:cs typeface="微软雅黑"/>
+              </a:rPr>
+              <a:t>1</a:t>
+            </a:r>
+          </a:p>
+        </p:txBody>
+      </p:sp>
+      <p:sp>
+        <p:nvSpPr>
+          <p:cNvPr id="8" name="TextBox 7"/>
+          <p:cNvSpPr txBox="1"/>
+          <p:nvPr/>
+        </p:nvSpPr>
+        <p:spPr>
+          <a:xfrm>
+            <a:off x="1371600" y="1481328"/>
+            <a:ext cx="9997135" cy="484632"/>
+          </a:xfrm>
+          <a:prstGeom prst="rect">
+            <a:avLst/>
+          </a:prstGeom>
+          <a:noFill/>
+        </p:spPr>
+        <p:txBody>
+          <a:bodyPr wrap="square" anchor="t" lIns="0" rIns="0" tIns="0" bIns="0">
+            <a:spAutoFit/>
+          </a:bodyPr>
+          <a:lstStyle/>
+          <a:p>
+            <a:pPr algn="l">
+              <a:lnSpc>
+                <a:spcPct val="110000"/>
+              </a:lnSpc>
+            </a:pPr>
+            <a:r>
+              <a:rPr sz="1600" b="1">
+                <a:solidFill>
+                  <a:srgbClr val="1C2A33"/>
+                </a:solidFill>
+                <a:latin typeface="微软雅黑"/>
+                <a:ea typeface="微软雅黑"/>
+                <a:cs typeface="微软雅黑"/>
+              </a:rPr>
+              <a:t>Step 1 导入</a:t>
+            </a:r>
+          </a:p>
+        </p:txBody>
+      </p:sp>
+      <p:sp>
+        <p:nvSpPr>
+          <p:cNvPr id="9" name="Rounded Rectangle 8"/>
+          <p:cNvSpPr/>
+          <p:nvPr/>
+        </p:nvSpPr>
+        <p:spPr>
+          <a:xfrm>
+            <a:off x="640080" y="2194560"/>
+            <a:ext cx="10911535" cy="685800"/>
+          </a:xfrm>
+          <a:prstGeom prst="roundRect">
+            <a:avLst/>
+          </a:prstGeom>
+          <a:solidFill>
+            <a:srgbClr val="FFFFFF"/>
+          </a:solidFill>
+          <a:ln w="22860">
+            <a:solidFill>
+              <a:srgbClr val="2E7D6B"/>
+            </a:solidFill>
+          </a:ln>
+          <a:effectLst/>
+        </p:spPr>
+        <p:style>
+          <a:lnRef idx="1">
+            <a:schemeClr val="accent1"/>
+          </a:lnRef>
+          <a:fillRef idx="3">
+            <a:schemeClr val="accent1"/>
+          </a:fillRef>
+          <a:effectRef idx="2">
+            <a:schemeClr val="accent1"/>
+          </a:effectRef>
+          <a:fontRef idx="minor">
+            <a:schemeClr val="lt1"/>
+          </a:fontRef>
+        </p:style>
+        <p:txBody>
+          <a:bodyPr rtlCol="0" anchor="ctr"/>
+          <a:lstStyle/>
+          <a:p>
+            <a:pPr algn="ctr"/>
+          </a:p>
+        </p:txBody>
+      </p:sp>
+      <p:sp>
+        <p:nvSpPr>
+          <p:cNvPr id="10" name="Oval 9"/>
+          <p:cNvSpPr/>
+          <p:nvPr/>
+        </p:nvSpPr>
+        <p:spPr>
+          <a:xfrm>
+            <a:off x="804672" y="2359152"/>
+            <a:ext cx="457200" cy="457200"/>
+          </a:xfrm>
+          <a:prstGeom prst="ellipse">
+            <a:avLst/>
+          </a:prstGeom>
+          <a:solidFill>
+            <a:srgbClr val="2E7D6B"/>
+          </a:solidFill>
+          <a:ln>
+            <a:noFill/>
+          </a:ln>
+          <a:effectLst/>
+        </p:spPr>
+        <p:style>
+          <a:lnRef idx="1">
+            <a:schemeClr val="accent1"/>
+          </a:lnRef>
+          <a:fillRef idx="3">
+            <a:schemeClr val="accent1"/>
+          </a:fillRef>
+          <a:effectRef idx="2">
+            <a:schemeClr val="accent1"/>
+          </a:effectRef>
+          <a:fontRef idx="minor">
+            <a:schemeClr val="lt1"/>
+          </a:fontRef>
+        </p:style>
+        <p:txBody>
+          <a:bodyPr rtlCol="0" anchor="ctr"/>
+          <a:lstStyle/>
+          <a:p>
+            <a:pPr algn="ctr"/>
+          </a:p>
+        </p:txBody>
+      </p:sp>
+      <p:sp>
+        <p:nvSpPr>
+          <p:cNvPr id="11" name="TextBox 10"/>
+          <p:cNvSpPr txBox="1"/>
+          <p:nvPr/>
+        </p:nvSpPr>
+        <p:spPr>
+          <a:xfrm>
+            <a:off x="804672" y="2414016"/>
+            <a:ext cx="457200" cy="384048"/>
+          </a:xfrm>
+          <a:prstGeom prst="rect">
+            <a:avLst/>
+          </a:prstGeom>
+          <a:noFill/>
+        </p:spPr>
+        <p:txBody>
+          <a:bodyPr wrap="square" anchor="t" lIns="0" rIns="0" tIns="0" bIns="0">
+            <a:spAutoFit/>
+          </a:bodyPr>
+          <a:lstStyle/>
+          <a:p>
+            <a:pPr algn="ctr"/>
+            <a:r>
+              <a:rPr sz="1600" b="1">
                 <a:solidFill>
                   <a:srgbClr val="FFFFFF"/>
                 </a:solidFill>
@@ -6235,14 +5743,14 @@
       </p:sp>
       <p:sp>
         <p:nvSpPr>
-          <p:cNvPr id="14" name="TextBox 13"/>
+          <p:cNvPr id="12" name="TextBox 11"/>
           <p:cNvSpPr txBox="1"/>
           <p:nvPr/>
         </p:nvSpPr>
         <p:spPr>
           <a:xfrm>
-            <a:off x="5313578" y="2450592"/>
-            <a:ext cx="2296058" cy="731520"/>
+            <a:off x="1371600" y="2304288"/>
+            <a:ext cx="9997135" cy="484632"/>
           </a:xfrm>
           <a:prstGeom prst="rect">
             <a:avLst/>
@@ -6257,74 +5765,33 @@
           <a:p>
             <a:pPr algn="l">
               <a:lnSpc>
-                <a:spcPct val="130000"/>
+                <a:spcPct val="110000"/>
               </a:lnSpc>
             </a:pPr>
             <a:r>
-              <a:rPr sz="1650" b="1">
+              <a:rPr sz="1400" b="1">
                 <a:solidFill>
                   <a:srgbClr val="1C2A33"/>
                 </a:solidFill>
-                <a:latin typeface="楷体"/>
-                <a:ea typeface="楷体"/>
-                <a:cs typeface="楷体"/>
+                <a:latin typeface="微软雅黑"/>
+                <a:ea typeface="微软雅黑"/>
+                <a:cs typeface="微软雅黑"/>
               </a:rPr>
-              <a:t>钟扬「探界」的三重义</a:t>
-            </a:r>
-          </a:p>
-        </p:txBody>
-      </p:sp>
-      <p:sp>
-        <p:nvSpPr>
-          <p:cNvPr id="15" name="TextBox 14"/>
-          <p:cNvSpPr txBox="1"/>
-          <p:nvPr/>
-        </p:nvSpPr>
-        <p:spPr>
-          <a:xfrm>
-            <a:off x="4673498" y="3246120"/>
-            <a:ext cx="2844698" cy="2651760"/>
-          </a:xfrm>
-          <a:prstGeom prst="rect">
-            <a:avLst/>
-          </a:prstGeom>
-          <a:noFill/>
-        </p:spPr>
-        <p:txBody>
-          <a:bodyPr wrap="square" anchor="t" lIns="0" rIns="0" tIns="0" bIns="0">
-            <a:spAutoFit/>
-          </a:bodyPr>
-          <a:lstStyle/>
-          <a:p>
-            <a:pPr algn="l">
-              <a:lnSpc>
-                <a:spcPct val="150000"/>
-              </a:lnSpc>
-            </a:pPr>
-            <a:r>
-              <a:rPr sz="1400" b="0">
-                <a:solidFill>
-                  <a:srgbClr val="1C2A33"/>
-                </a:solidFill>
-                <a:latin typeface="楷体"/>
-                <a:ea typeface="楷体"/>
-                <a:cs typeface="楷体"/>
-              </a:rPr>
-              <a:t>不止地理跨界，还有学科跨界（植物学+教育）与生命境界的超越。→ 画「探界层次图」。</a:t>
-            </a:r>
-          </a:p>
-        </p:txBody>
-      </p:sp>
-      <p:sp>
-        <p:nvSpPr>
-          <p:cNvPr id="16" name="Rounded Rectangle 15"/>
+              <a:t>Step 2 《心有一团火》</a:t>
+            </a:r>
+          </a:p>
+        </p:txBody>
+      </p:sp>
+      <p:sp>
+        <p:nvSpPr>
+          <p:cNvPr id="13" name="Rounded Rectangle 12"/>
           <p:cNvSpPr/>
           <p:nvPr/>
         </p:nvSpPr>
         <p:spPr>
           <a:xfrm>
-            <a:off x="8158276" y="2194560"/>
-            <a:ext cx="3393338" cy="3840480"/>
+            <a:off x="640080" y="3017520"/>
+            <a:ext cx="10911535" cy="685800"/>
           </a:xfrm>
           <a:prstGeom prst="roundRect">
             <a:avLst/>
@@ -6332,9 +5799,9 @@
           <a:solidFill>
             <a:srgbClr val="FFFFFF"/>
           </a:solidFill>
-          <a:ln w="20320">
+          <a:ln w="22860">
             <a:solidFill>
-              <a:srgbClr val="C8A86B"/>
+              <a:srgbClr val="2E7D6B"/>
             </a:solidFill>
           </a:ln>
           <a:effectLst/>
@@ -6363,20 +5830,20 @@
       </p:sp>
       <p:sp>
         <p:nvSpPr>
-          <p:cNvPr id="17" name="Oval 16"/>
+          <p:cNvPr id="14" name="Oval 13"/>
           <p:cNvSpPr/>
           <p:nvPr/>
         </p:nvSpPr>
         <p:spPr>
           <a:xfrm>
-            <a:off x="8386876" y="2423160"/>
-            <a:ext cx="548640" cy="548640"/>
+            <a:off x="804672" y="3182112"/>
+            <a:ext cx="457200" cy="457200"/>
           </a:xfrm>
           <a:prstGeom prst="ellipse">
             <a:avLst/>
           </a:prstGeom>
           <a:solidFill>
-            <a:srgbClr val="C8A86B"/>
+            <a:srgbClr val="2E7D6B"/>
           </a:solidFill>
           <a:ln>
             <a:noFill/>
@@ -6407,14 +5874,14 @@
       </p:sp>
       <p:sp>
         <p:nvSpPr>
-          <p:cNvPr id="18" name="TextBox 17"/>
+          <p:cNvPr id="15" name="TextBox 14"/>
           <p:cNvSpPr txBox="1"/>
           <p:nvPr/>
         </p:nvSpPr>
         <p:spPr>
           <a:xfrm>
-            <a:off x="8386876" y="2496312"/>
-            <a:ext cx="548640" cy="411480"/>
+            <a:off x="804672" y="3236976"/>
+            <a:ext cx="457200" cy="384048"/>
           </a:xfrm>
           <a:prstGeom prst="rect">
             <a:avLst/>
@@ -6429,7 +5896,7 @@
           <a:p>
             <a:pPr algn="ctr"/>
             <a:r>
-              <a:rPr sz="2000" b="1">
+              <a:rPr sz="1600" b="1">
                 <a:solidFill>
                   <a:srgbClr val="FFFFFF"/>
                 </a:solidFill>
@@ -6444,14 +5911,14 @@
       </p:sp>
       <p:sp>
         <p:nvSpPr>
-          <p:cNvPr id="19" name="TextBox 18"/>
+          <p:cNvPr id="16" name="TextBox 15"/>
           <p:cNvSpPr txBox="1"/>
           <p:nvPr/>
         </p:nvSpPr>
         <p:spPr>
           <a:xfrm>
-            <a:off x="9072676" y="2450592"/>
-            <a:ext cx="2296058" cy="731520"/>
+            <a:off x="1371600" y="3127248"/>
+            <a:ext cx="9997135" cy="484632"/>
           </a:xfrm>
           <a:prstGeom prst="rect">
             <a:avLst/>
@@ -6466,33 +5933,123 @@
           <a:p>
             <a:pPr algn="l">
               <a:lnSpc>
-                <a:spcPct val="130000"/>
+                <a:spcPct val="110000"/>
               </a:lnSpc>
             </a:pPr>
             <a:r>
-              <a:rPr sz="1650" b="1">
+              <a:rPr sz="1400" b="1">
                 <a:solidFill>
                   <a:srgbClr val="1C2A33"/>
                 </a:solidFill>
-                <a:latin typeface="楷体"/>
-                <a:ea typeface="楷体"/>
-                <a:cs typeface="楷体"/>
+                <a:latin typeface="微软雅黑"/>
+                <a:ea typeface="微软雅黑"/>
+                <a:cs typeface="微软雅黑"/>
               </a:rPr>
-              <a:t>比较易「并列」难「归纳」</a:t>
-            </a:r>
-          </a:p>
-        </p:txBody>
-      </p:sp>
-      <p:sp>
-        <p:nvSpPr>
-          <p:cNvPr id="20" name="TextBox 19"/>
+              <a:t>Step 3 《"探界者"钟扬》</a:t>
+            </a:r>
+          </a:p>
+        </p:txBody>
+      </p:sp>
+      <p:sp>
+        <p:nvSpPr>
+          <p:cNvPr id="17" name="Rounded Rectangle 16"/>
+          <p:cNvSpPr/>
+          <p:nvPr/>
+        </p:nvSpPr>
+        <p:spPr>
+          <a:xfrm>
+            <a:off x="640080" y="3840480"/>
+            <a:ext cx="10911535" cy="685800"/>
+          </a:xfrm>
+          <a:prstGeom prst="roundRect">
+            <a:avLst/>
+          </a:prstGeom>
+          <a:solidFill>
+            <a:srgbClr val="FFFFFF"/>
+          </a:solidFill>
+          <a:ln w="22860">
+            <a:solidFill>
+              <a:srgbClr val="2E7D6B"/>
+            </a:solidFill>
+          </a:ln>
+          <a:effectLst/>
+        </p:spPr>
+        <p:style>
+          <a:lnRef idx="1">
+            <a:schemeClr val="accent1"/>
+          </a:lnRef>
+          <a:fillRef idx="3">
+            <a:schemeClr val="accent1"/>
+          </a:fillRef>
+          <a:effectRef idx="2">
+            <a:schemeClr val="accent1"/>
+          </a:effectRef>
+          <a:fontRef idx="minor">
+            <a:schemeClr val="lt1"/>
+          </a:fontRef>
+        </p:style>
+        <p:txBody>
+          <a:bodyPr rtlCol="0" anchor="ctr"/>
+          <a:lstStyle/>
+          <a:p>
+            <a:pPr algn="ctr"/>
+          </a:p>
+        </p:txBody>
+      </p:sp>
+      <p:sp>
+        <p:nvSpPr>
+          <p:cNvPr id="18" name="Oval 17"/>
+          <p:cNvSpPr/>
+          <p:nvPr/>
+        </p:nvSpPr>
+        <p:spPr>
+          <a:xfrm>
+            <a:off x="804672" y="4005072"/>
+            <a:ext cx="457200" cy="457200"/>
+          </a:xfrm>
+          <a:prstGeom prst="ellipse">
+            <a:avLst/>
+          </a:prstGeom>
+          <a:solidFill>
+            <a:srgbClr val="2E7D6B"/>
+          </a:solidFill>
+          <a:ln>
+            <a:noFill/>
+          </a:ln>
+          <a:effectLst/>
+        </p:spPr>
+        <p:style>
+          <a:lnRef idx="1">
+            <a:schemeClr val="accent1"/>
+          </a:lnRef>
+          <a:fillRef idx="3">
+            <a:schemeClr val="accent1"/>
+          </a:fillRef>
+          <a:effectRef idx="2">
+            <a:schemeClr val="accent1"/>
+          </a:effectRef>
+          <a:fontRef idx="minor">
+            <a:schemeClr val="lt1"/>
+          </a:fontRef>
+        </p:style>
+        <p:txBody>
+          <a:bodyPr rtlCol="0" anchor="ctr"/>
+          <a:lstStyle/>
+          <a:p>
+            <a:pPr algn="ctr"/>
+          </a:p>
+        </p:txBody>
+      </p:sp>
+      <p:sp>
+        <p:nvSpPr>
+          <p:cNvPr id="19" name="TextBox 18"/>
           <p:cNvSpPr txBox="1"/>
           <p:nvPr/>
         </p:nvSpPr>
         <p:spPr>
           <a:xfrm>
-            <a:off x="8432596" y="3246120"/>
-            <a:ext cx="2844698" cy="2651760"/>
+            <a:off x="804672" y="4059936"/>
+            <a:ext cx="457200" cy="384048"/>
           </a:xfrm>
           <a:prstGeom prst="rect">
             <a:avLst/>
@@ -6505,28 +6062,401 @@
           </a:bodyPr>
           <a:lstStyle/>
           <a:p>
+            <a:pPr algn="ctr"/>
+            <a:r>
+              <a:rPr sz="1600" b="1">
+                <a:solidFill>
+                  <a:srgbClr val="FFFFFF"/>
+                </a:solidFill>
+                <a:latin typeface="微软雅黑"/>
+                <a:ea typeface="微软雅黑"/>
+                <a:cs typeface="微软雅黑"/>
+              </a:rPr>
+              <a:t>4</a:t>
+            </a:r>
+          </a:p>
+        </p:txBody>
+      </p:sp>
+      <p:sp>
+        <p:nvSpPr>
+          <p:cNvPr id="20" name="TextBox 19"/>
+          <p:cNvSpPr txBox="1"/>
+          <p:nvPr/>
+        </p:nvSpPr>
+        <p:spPr>
+          <a:xfrm>
+            <a:off x="1371600" y="3950208"/>
+            <a:ext cx="9997135" cy="484632"/>
+          </a:xfrm>
+          <a:prstGeom prst="rect">
+            <a:avLst/>
+          </a:prstGeom>
+          <a:noFill/>
+        </p:spPr>
+        <p:txBody>
+          <a:bodyPr wrap="square" anchor="t" lIns="0" rIns="0" tIns="0" bIns="0">
+            <a:spAutoFit/>
+          </a:bodyPr>
+          <a:lstStyle/>
+          <a:p>
             <a:pPr algn="l">
               <a:lnSpc>
-                <a:spcPct val="150000"/>
+                <a:spcPct val="110000"/>
               </a:lnSpc>
             </a:pPr>
             <a:r>
-              <a:rPr sz="1400" b="0">
+              <a:rPr sz="1600" b="1">
                 <a:solidFill>
                   <a:srgbClr val="1C2A33"/>
                 </a:solidFill>
-                <a:latin typeface="楷体"/>
-                <a:ea typeface="楷体"/>
-                <a:cs typeface="楷体"/>
+                <a:latin typeface="微软雅黑"/>
+                <a:ea typeface="微软雅黑"/>
+                <a:cs typeface="微软雅黑"/>
               </a:rPr>
-              <a:t>习惯逐篇罗列，不善跨文本提炼共性。→ 用四维框架（人物/场景/精神/手法）收口。</a:t>
-            </a:r>
-          </a:p>
-        </p:txBody>
-      </p:sp>
-      <p:sp>
-        <p:nvSpPr>
-          <p:cNvPr id="21" name="TextBox 20"/>
+              <a:t>Step 4 群文比较</a:t>
+            </a:r>
+          </a:p>
+        </p:txBody>
+      </p:sp>
+      <p:sp>
+        <p:nvSpPr>
+          <p:cNvPr id="21" name="Rounded Rectangle 20"/>
+          <p:cNvSpPr/>
+          <p:nvPr/>
+        </p:nvSpPr>
+        <p:spPr>
+          <a:xfrm>
+            <a:off x="640080" y="4663440"/>
+            <a:ext cx="10911535" cy="685800"/>
+          </a:xfrm>
+          <a:prstGeom prst="roundRect">
+            <a:avLst/>
+          </a:prstGeom>
+          <a:solidFill>
+            <a:srgbClr val="FFFFFF"/>
+          </a:solidFill>
+          <a:ln w="22860">
+            <a:solidFill>
+              <a:srgbClr val="2E7D6B"/>
+            </a:solidFill>
+          </a:ln>
+          <a:effectLst/>
+        </p:spPr>
+        <p:style>
+          <a:lnRef idx="1">
+            <a:schemeClr val="accent1"/>
+          </a:lnRef>
+          <a:fillRef idx="3">
+            <a:schemeClr val="accent1"/>
+          </a:fillRef>
+          <a:effectRef idx="2">
+            <a:schemeClr val="accent1"/>
+          </a:effectRef>
+          <a:fontRef idx="minor">
+            <a:schemeClr val="lt1"/>
+          </a:fontRef>
+        </p:style>
+        <p:txBody>
+          <a:bodyPr rtlCol="0" anchor="ctr"/>
+          <a:lstStyle/>
+          <a:p>
+            <a:pPr algn="ctr"/>
+          </a:p>
+        </p:txBody>
+      </p:sp>
+      <p:sp>
+        <p:nvSpPr>
+          <p:cNvPr id="22" name="Oval 21"/>
+          <p:cNvSpPr/>
+          <p:nvPr/>
+        </p:nvSpPr>
+        <p:spPr>
+          <a:xfrm>
+            <a:off x="804672" y="4828032"/>
+            <a:ext cx="457200" cy="457200"/>
+          </a:xfrm>
+          <a:prstGeom prst="ellipse">
+            <a:avLst/>
+          </a:prstGeom>
+          <a:solidFill>
+            <a:srgbClr val="2E7D6B"/>
+          </a:solidFill>
+          <a:ln>
+            <a:noFill/>
+          </a:ln>
+          <a:effectLst/>
+        </p:spPr>
+        <p:style>
+          <a:lnRef idx="1">
+            <a:schemeClr val="accent1"/>
+          </a:lnRef>
+          <a:fillRef idx="3">
+            <a:schemeClr val="accent1"/>
+          </a:fillRef>
+          <a:effectRef idx="2">
+            <a:schemeClr val="accent1"/>
+          </a:effectRef>
+          <a:fontRef idx="minor">
+            <a:schemeClr val="lt1"/>
+          </a:fontRef>
+        </p:style>
+        <p:txBody>
+          <a:bodyPr rtlCol="0" anchor="ctr"/>
+          <a:lstStyle/>
+          <a:p>
+            <a:pPr algn="ctr"/>
+          </a:p>
+        </p:txBody>
+      </p:sp>
+      <p:sp>
+        <p:nvSpPr>
+          <p:cNvPr id="23" name="TextBox 22"/>
+          <p:cNvSpPr txBox="1"/>
+          <p:nvPr/>
+        </p:nvSpPr>
+        <p:spPr>
+          <a:xfrm>
+            <a:off x="804672" y="4882896"/>
+            <a:ext cx="457200" cy="384048"/>
+          </a:xfrm>
+          <a:prstGeom prst="rect">
+            <a:avLst/>
+          </a:prstGeom>
+          <a:noFill/>
+        </p:spPr>
+        <p:txBody>
+          <a:bodyPr wrap="square" anchor="t" lIns="0" rIns="0" tIns="0" bIns="0">
+            <a:spAutoFit/>
+          </a:bodyPr>
+          <a:lstStyle/>
+          <a:p>
+            <a:pPr algn="ctr"/>
+            <a:r>
+              <a:rPr sz="1600" b="1">
+                <a:solidFill>
+                  <a:srgbClr val="FFFFFF"/>
+                </a:solidFill>
+                <a:latin typeface="微软雅黑"/>
+                <a:ea typeface="微软雅黑"/>
+                <a:cs typeface="微软雅黑"/>
+              </a:rPr>
+              <a:t>5</a:t>
+            </a:r>
+          </a:p>
+        </p:txBody>
+      </p:sp>
+      <p:sp>
+        <p:nvSpPr>
+          <p:cNvPr id="24" name="TextBox 23"/>
+          <p:cNvSpPr txBox="1"/>
+          <p:nvPr/>
+        </p:nvSpPr>
+        <p:spPr>
+          <a:xfrm>
+            <a:off x="1371600" y="4773168"/>
+            <a:ext cx="9997135" cy="484632"/>
+          </a:xfrm>
+          <a:prstGeom prst="rect">
+            <a:avLst/>
+          </a:prstGeom>
+          <a:noFill/>
+        </p:spPr>
+        <p:txBody>
+          <a:bodyPr wrap="square" anchor="t" lIns="0" rIns="0" tIns="0" bIns="0">
+            <a:spAutoFit/>
+          </a:bodyPr>
+          <a:lstStyle/>
+          <a:p>
+            <a:pPr algn="l">
+              <a:lnSpc>
+                <a:spcPct val="110000"/>
+              </a:lnSpc>
+            </a:pPr>
+            <a:r>
+              <a:rPr sz="1600" b="1">
+                <a:solidFill>
+                  <a:srgbClr val="1C2A33"/>
+                </a:solidFill>
+                <a:latin typeface="微软雅黑"/>
+                <a:ea typeface="微软雅黑"/>
+                <a:cs typeface="微软雅黑"/>
+              </a:rPr>
+              <a:t>Step 5 归纳提升</a:t>
+            </a:r>
+          </a:p>
+        </p:txBody>
+      </p:sp>
+      <p:sp>
+        <p:nvSpPr>
+          <p:cNvPr id="25" name="Rounded Rectangle 24"/>
+          <p:cNvSpPr/>
+          <p:nvPr/>
+        </p:nvSpPr>
+        <p:spPr>
+          <a:xfrm>
+            <a:off x="640080" y="5486400"/>
+            <a:ext cx="10911535" cy="685800"/>
+          </a:xfrm>
+          <a:prstGeom prst="roundRect">
+            <a:avLst/>
+          </a:prstGeom>
+          <a:solidFill>
+            <a:srgbClr val="FFFFFF"/>
+          </a:solidFill>
+          <a:ln w="22860">
+            <a:solidFill>
+              <a:srgbClr val="2E7D6B"/>
+            </a:solidFill>
+          </a:ln>
+          <a:effectLst/>
+        </p:spPr>
+        <p:style>
+          <a:lnRef idx="1">
+            <a:schemeClr val="accent1"/>
+          </a:lnRef>
+          <a:fillRef idx="3">
+            <a:schemeClr val="accent1"/>
+          </a:fillRef>
+          <a:effectRef idx="2">
+            <a:schemeClr val="accent1"/>
+          </a:effectRef>
+          <a:fontRef idx="minor">
+            <a:schemeClr val="lt1"/>
+          </a:fontRef>
+        </p:style>
+        <p:txBody>
+          <a:bodyPr rtlCol="0" anchor="ctr"/>
+          <a:lstStyle/>
+          <a:p>
+            <a:pPr algn="ctr"/>
+          </a:p>
+        </p:txBody>
+      </p:sp>
+      <p:sp>
+        <p:nvSpPr>
+          <p:cNvPr id="26" name="Oval 25"/>
+          <p:cNvSpPr/>
+          <p:nvPr/>
+        </p:nvSpPr>
+        <p:spPr>
+          <a:xfrm>
+            <a:off x="804672" y="5650992"/>
+            <a:ext cx="457200" cy="457200"/>
+          </a:xfrm>
+          <a:prstGeom prst="ellipse">
+            <a:avLst/>
+          </a:prstGeom>
+          <a:solidFill>
+            <a:srgbClr val="2E7D6B"/>
+          </a:solidFill>
+          <a:ln>
+            <a:noFill/>
+          </a:ln>
+          <a:effectLst/>
+        </p:spPr>
+        <p:style>
+          <a:lnRef idx="1">
+            <a:schemeClr val="accent1"/>
+          </a:lnRef>
+          <a:fillRef idx="3">
+            <a:schemeClr val="accent1"/>
+          </a:fillRef>
+          <a:effectRef idx="2">
+            <a:schemeClr val="accent1"/>
+          </a:effectRef>
+          <a:fontRef idx="minor">
+            <a:schemeClr val="lt1"/>
+          </a:fontRef>
+        </p:style>
+        <p:txBody>
+          <a:bodyPr rtlCol="0" anchor="ctr"/>
+          <a:lstStyle/>
+          <a:p>
+            <a:pPr algn="ctr"/>
+          </a:p>
+        </p:txBody>
+      </p:sp>
+      <p:sp>
+        <p:nvSpPr>
+          <p:cNvPr id="27" name="TextBox 26"/>
+          <p:cNvSpPr txBox="1"/>
+          <p:nvPr/>
+        </p:nvSpPr>
+        <p:spPr>
+          <a:xfrm>
+            <a:off x="804672" y="5705856"/>
+            <a:ext cx="457200" cy="384048"/>
+          </a:xfrm>
+          <a:prstGeom prst="rect">
+            <a:avLst/>
+          </a:prstGeom>
+          <a:noFill/>
+        </p:spPr>
+        <p:txBody>
+          <a:bodyPr wrap="square" anchor="t" lIns="0" rIns="0" tIns="0" bIns="0">
+            <a:spAutoFit/>
+          </a:bodyPr>
+          <a:lstStyle/>
+          <a:p>
+            <a:pPr algn="ctr"/>
+            <a:r>
+              <a:rPr sz="1600" b="1">
+                <a:solidFill>
+                  <a:srgbClr val="FFFFFF"/>
+                </a:solidFill>
+                <a:latin typeface="微软雅黑"/>
+                <a:ea typeface="微软雅黑"/>
+                <a:cs typeface="微软雅黑"/>
+              </a:rPr>
+              <a:t>6</a:t>
+            </a:r>
+          </a:p>
+        </p:txBody>
+      </p:sp>
+      <p:sp>
+        <p:nvSpPr>
+          <p:cNvPr id="28" name="TextBox 27"/>
+          <p:cNvSpPr txBox="1"/>
+          <p:nvPr/>
+        </p:nvSpPr>
+        <p:spPr>
+          <a:xfrm>
+            <a:off x="1371600" y="5596128"/>
+            <a:ext cx="9997135" cy="484632"/>
+          </a:xfrm>
+          <a:prstGeom prst="rect">
+            <a:avLst/>
+          </a:prstGeom>
+          <a:noFill/>
+        </p:spPr>
+        <p:txBody>
+          <a:bodyPr wrap="square" anchor="t" lIns="0" rIns="0" tIns="0" bIns="0">
+            <a:spAutoFit/>
+          </a:bodyPr>
+          <a:lstStyle/>
+          <a:p>
+            <a:pPr algn="l">
+              <a:lnSpc>
+                <a:spcPct val="110000"/>
+              </a:lnSpc>
+            </a:pPr>
+            <a:r>
+              <a:rPr sz="1600" b="1">
+                <a:solidFill>
+                  <a:srgbClr val="1C2A33"/>
+                </a:solidFill>
+                <a:latin typeface="微软雅黑"/>
+                <a:ea typeface="微软雅黑"/>
+                <a:cs typeface="微软雅黑"/>
+              </a:rPr>
+              <a:t>Step 6 小结+作业</a:t>
+            </a:r>
+          </a:p>
+        </p:txBody>
+      </p:sp>
+      <p:sp>
+        <p:nvSpPr>
+          <p:cNvPr id="29" name="TextBox 28"/>
           <p:cNvSpPr txBox="1"/>
           <p:nvPr/>
         </p:nvSpPr>
@@ -6659,7 +6589,7 @@
                 <a:ea typeface="微软雅黑"/>
                 <a:cs typeface="微软雅黑"/>
               </a:rPr>
-              <a:t>探究 · 从真问题出发</a:t>
+              <a:t>易混易错</a:t>
             </a:r>
           </a:p>
         </p:txBody>
@@ -6710,61 +6640,24 @@
       </p:sp>
       <p:sp>
         <p:nvSpPr>
-          <p:cNvPr id="5" name="TextBox 4"/>
-          <p:cNvSpPr txBox="1"/>
-          <p:nvPr/>
-        </p:nvSpPr>
-        <p:spPr>
-          <a:xfrm>
-            <a:off x="640080" y="1280160"/>
-            <a:ext cx="10515600" cy="640080"/>
-          </a:xfrm>
-          <a:prstGeom prst="rect">
-            <a:avLst/>
-          </a:prstGeom>
-          <a:noFill/>
-        </p:spPr>
-        <p:txBody>
-          <a:bodyPr wrap="square" anchor="t" lIns="0" rIns="0" tIns="0" bIns="0">
-            <a:spAutoFit/>
-          </a:bodyPr>
-          <a:lstStyle/>
-          <a:p>
-            <a:pPr algn="l"/>
-            <a:r>
-              <a:rPr sz="2600" b="1">
-                <a:solidFill>
-                  <a:srgbClr val="1C2A33"/>
-                </a:solidFill>
-                <a:latin typeface="楷体"/>
-                <a:ea typeface="楷体"/>
-                <a:cs typeface="楷体"/>
-              </a:rPr>
-              <a:t>同学常问的两个「为什么」</a:t>
-            </a:r>
-          </a:p>
-        </p:txBody>
-      </p:sp>
-      <p:sp>
-        <p:nvSpPr>
-          <p:cNvPr id="6" name="Rounded Rectangle 5"/>
+          <p:cNvPr id="5" name="Rounded Rectangle 4"/>
           <p:cNvSpPr/>
           <p:nvPr/>
         </p:nvSpPr>
         <p:spPr>
           <a:xfrm>
-            <a:off x="640080" y="2057400"/>
-            <a:ext cx="10911535" cy="1051560"/>
+            <a:off x="640080" y="1417320"/>
+            <a:ext cx="5349240" cy="2057400"/>
           </a:xfrm>
           <a:prstGeom prst="roundRect">
             <a:avLst/>
           </a:prstGeom>
           <a:solidFill>
-            <a:srgbClr val="E7DFD2"/>
+            <a:srgbClr val="FFFFFF"/>
           </a:solidFill>
-          <a:ln w="12700">
+          <a:ln w="22860">
             <a:solidFill>
-              <a:srgbClr val="6B6258"/>
+              <a:srgbClr val="B23A2A"/>
             </a:solidFill>
           </a:ln>
           <a:effectLst/>
@@ -6793,66 +6686,23 @@
       </p:sp>
       <p:sp>
         <p:nvSpPr>
-          <p:cNvPr id="7" name="TextBox 6"/>
-          <p:cNvSpPr txBox="1"/>
-          <p:nvPr/>
-        </p:nvSpPr>
-        <p:spPr>
-          <a:xfrm>
-            <a:off x="914400" y="2194560"/>
-            <a:ext cx="10362895" cy="822960"/>
-          </a:xfrm>
-          <a:prstGeom prst="rect">
-            <a:avLst/>
-          </a:prstGeom>
-          <a:noFill/>
-        </p:spPr>
-        <p:txBody>
-          <a:bodyPr wrap="square" anchor="t" lIns="0" rIns="0" tIns="0" bIns="0">
-            <a:spAutoFit/>
-          </a:bodyPr>
-          <a:lstStyle/>
-          <a:p>
-            <a:pPr algn="l">
-              <a:lnSpc>
-                <a:spcPct val="140000"/>
-              </a:lnSpc>
-            </a:pPr>
-            <a:r>
-              <a:rPr sz="1600" b="0">
-                <a:solidFill>
-                  <a:srgbClr val="1C2A33"/>
-                </a:solidFill>
-                <a:latin typeface="楷体"/>
-                <a:ea typeface="楷体"/>
-                <a:cs typeface="楷体"/>
-              </a:rPr>
-              <a:t>问：钟扬「胁迫」领结婚证这种生活小事，为什么也写进课文？</a:t>
-            </a:r>
-          </a:p>
-        </p:txBody>
-      </p:sp>
-      <p:sp>
-        <p:nvSpPr>
-          <p:cNvPr id="8" name="Rounded Rectangle 7"/>
+          <p:cNvPr id="6" name="Oval 5"/>
           <p:cNvSpPr/>
           <p:nvPr/>
         </p:nvSpPr>
         <p:spPr>
           <a:xfrm>
-            <a:off x="640080" y="3246120"/>
-            <a:ext cx="10911535" cy="1051560"/>
-          </a:xfrm>
-          <a:prstGeom prst="roundRect">
+            <a:off x="804672" y="1581912"/>
+            <a:ext cx="457200" cy="457200"/>
+          </a:xfrm>
+          <a:prstGeom prst="ellipse">
             <a:avLst/>
           </a:prstGeom>
           <a:solidFill>
-            <a:srgbClr val="E7DFD2"/>
+            <a:srgbClr val="B23A2A"/>
           </a:solidFill>
-          <a:ln w="12700">
-            <a:solidFill>
-              <a:srgbClr val="6B6258"/>
-            </a:solidFill>
+          <a:ln>
+            <a:noFill/>
           </a:ln>
           <a:effectLst/>
         </p:spPr>
@@ -6880,14 +6730,14 @@
       </p:sp>
       <p:sp>
         <p:nvSpPr>
-          <p:cNvPr id="9" name="TextBox 8"/>
+          <p:cNvPr id="7" name="TextBox 6"/>
           <p:cNvSpPr txBox="1"/>
           <p:nvPr/>
         </p:nvSpPr>
         <p:spPr>
           <a:xfrm>
-            <a:off x="914400" y="3383280"/>
-            <a:ext cx="10362895" cy="822960"/>
+            <a:off x="804672" y="1636776"/>
+            <a:ext cx="457200" cy="384048"/>
           </a:xfrm>
           <a:prstGeom prst="rect">
             <a:avLst/>
@@ -6900,13 +6750,91 @@
           </a:bodyPr>
           <a:lstStyle/>
           <a:p>
+            <a:pPr algn="ctr"/>
+            <a:r>
+              <a:rPr sz="1600" b="1">
+                <a:solidFill>
+                  <a:srgbClr val="FFFFFF"/>
+                </a:solidFill>
+                <a:latin typeface="微软雅黑"/>
+                <a:ea typeface="微软雅黑"/>
+                <a:cs typeface="微软雅黑"/>
+              </a:rPr>
+              <a:t>!</a:t>
+            </a:r>
+          </a:p>
+        </p:txBody>
+      </p:sp>
+      <p:sp>
+        <p:nvSpPr>
+          <p:cNvPr id="8" name="TextBox 7"/>
+          <p:cNvSpPr txBox="1"/>
+          <p:nvPr/>
+        </p:nvSpPr>
+        <p:spPr>
+          <a:xfrm>
+            <a:off x="1371600" y="1527048"/>
+            <a:ext cx="4434840" cy="457200"/>
+          </a:xfrm>
+          <a:prstGeom prst="rect">
+            <a:avLst/>
+          </a:prstGeom>
+          <a:noFill/>
+        </p:spPr>
+        <p:txBody>
+          <a:bodyPr wrap="square" anchor="t" lIns="0" rIns="0" tIns="0" bIns="0">
+            <a:spAutoFit/>
+          </a:bodyPr>
+          <a:lstStyle/>
+          <a:p>
             <a:pPr algn="l">
               <a:lnSpc>
-                <a:spcPct val="140000"/>
+                <a:spcPct val="110000"/>
               </a:lnSpc>
             </a:pPr>
             <a:r>
-              <a:rPr sz="1600" b="0">
+              <a:rPr sz="1600" b="1">
+                <a:solidFill>
+                  <a:srgbClr val="1C2A33"/>
+                </a:solidFill>
+                <a:latin typeface="微软雅黑"/>
+                <a:ea typeface="微软雅黑"/>
+                <a:cs typeface="微软雅黑"/>
+              </a:rPr>
+              <a:t/>
+            </a:r>
+          </a:p>
+        </p:txBody>
+      </p:sp>
+      <p:sp>
+        <p:nvSpPr>
+          <p:cNvPr id="9" name="TextBox 8"/>
+          <p:cNvSpPr txBox="1"/>
+          <p:nvPr/>
+        </p:nvSpPr>
+        <p:spPr>
+          <a:xfrm>
+            <a:off x="1371600" y="1965960"/>
+            <a:ext cx="4434840" cy="1417320"/>
+          </a:xfrm>
+          <a:prstGeom prst="rect">
+            <a:avLst/>
+          </a:prstGeom>
+          <a:noFill/>
+        </p:spPr>
+        <p:txBody>
+          <a:bodyPr wrap="square" anchor="t" lIns="0" rIns="0" tIns="0" bIns="0">
+            <a:spAutoFit/>
+          </a:bodyPr>
+          <a:lstStyle/>
+          <a:p>
+            <a:pPr algn="l">
+              <a:lnSpc>
+                <a:spcPct val="128000"/>
+              </a:lnSpc>
+            </a:pPr>
+            <a:r>
+              <a:rPr sz="1200" b="0">
                 <a:solidFill>
                   <a:srgbClr val="1C2A33"/>
                 </a:solidFill>
@@ -6914,7 +6842,7 @@
                 <a:ea typeface="楷体"/>
                 <a:cs typeface="楷体"/>
               </a:rPr>
-              <a:t>问：张秉贵的「接一问二联三」那么绝，课文为何一笔带过？</a:t>
+              <a:t>① 「一团火」精神的时代理解。原因：学生生活在电商时代，对柜台售货员的服务场景缺乏体验，需补充时代背景。</a:t>
             </a:r>
           </a:p>
         </p:txBody>
@@ -6927,15 +6855,20 @@
         </p:nvSpPr>
         <p:spPr>
           <a:xfrm>
-            <a:off x="640080" y="4480560"/>
-            <a:ext cx="10911535" cy="2194560"/>
+            <a:off x="6263640" y="1417320"/>
+            <a:ext cx="5349240" cy="2057400"/>
           </a:xfrm>
           <a:prstGeom prst="roundRect">
             <a:avLst/>
           </a:prstGeom>
           <a:solidFill>
-            <a:srgbClr val="1C2A33"/>
+            <a:srgbClr val="FFFFFF"/>
           </a:solidFill>
+          <a:ln w="22860">
+            <a:solidFill>
+              <a:srgbClr val="B23A2A"/>
+            </a:solidFill>
+          </a:ln>
           <a:effectLst/>
         </p:spPr>
         <p:style>
@@ -6962,14 +6895,58 @@
       </p:sp>
       <p:sp>
         <p:nvSpPr>
-          <p:cNvPr id="11" name="TextBox 10"/>
+          <p:cNvPr id="11" name="Oval 10"/>
+          <p:cNvSpPr/>
+          <p:nvPr/>
+        </p:nvSpPr>
+        <p:spPr>
+          <a:xfrm>
+            <a:off x="6428232" y="1581912"/>
+            <a:ext cx="457200" cy="457200"/>
+          </a:xfrm>
+          <a:prstGeom prst="ellipse">
+            <a:avLst/>
+          </a:prstGeom>
+          <a:solidFill>
+            <a:srgbClr val="B23A2A"/>
+          </a:solidFill>
+          <a:ln>
+            <a:noFill/>
+          </a:ln>
+          <a:effectLst/>
+        </p:spPr>
+        <p:style>
+          <a:lnRef idx="1">
+            <a:schemeClr val="accent1"/>
+          </a:lnRef>
+          <a:fillRef idx="3">
+            <a:schemeClr val="accent1"/>
+          </a:fillRef>
+          <a:effectRef idx="2">
+            <a:schemeClr val="accent1"/>
+          </a:effectRef>
+          <a:fontRef idx="minor">
+            <a:schemeClr val="lt1"/>
+          </a:fontRef>
+        </p:style>
+        <p:txBody>
+          <a:bodyPr rtlCol="0" anchor="ctr"/>
+          <a:lstStyle/>
+          <a:p>
+            <a:pPr algn="ctr"/>
+          </a:p>
+        </p:txBody>
+      </p:sp>
+      <p:sp>
+        <p:nvSpPr>
+          <p:cNvPr id="12" name="TextBox 11"/>
           <p:cNvSpPr txBox="1"/>
           <p:nvPr/>
         </p:nvSpPr>
         <p:spPr>
           <a:xfrm>
-            <a:off x="960120" y="4663440"/>
-            <a:ext cx="10271455" cy="1920240"/>
+            <a:off x="6428232" y="1636776"/>
+            <a:ext cx="457200" cy="384048"/>
           </a:xfrm>
           <a:prstGeom prst="rect">
             <a:avLst/>
@@ -6982,91 +6959,315 @@
           </a:bodyPr>
           <a:lstStyle/>
           <a:p>
+            <a:pPr algn="ctr"/>
+            <a:r>
+              <a:rPr sz="1600" b="1">
+                <a:solidFill>
+                  <a:srgbClr val="FFFFFF"/>
+                </a:solidFill>
+                <a:latin typeface="微软雅黑"/>
+                <a:ea typeface="微软雅黑"/>
+                <a:cs typeface="微软雅黑"/>
+              </a:rPr>
+              <a:t>!</a:t>
+            </a:r>
+          </a:p>
+        </p:txBody>
+      </p:sp>
+      <p:sp>
+        <p:nvSpPr>
+          <p:cNvPr id="13" name="TextBox 12"/>
+          <p:cNvSpPr txBox="1"/>
+          <p:nvPr/>
+        </p:nvSpPr>
+        <p:spPr>
+          <a:xfrm>
+            <a:off x="6995160" y="1527048"/>
+            <a:ext cx="4434840" cy="457200"/>
+          </a:xfrm>
+          <a:prstGeom prst="rect">
+            <a:avLst/>
+          </a:prstGeom>
+          <a:noFill/>
+        </p:spPr>
+        <p:txBody>
+          <a:bodyPr wrap="square" anchor="t" lIns="0" rIns="0" tIns="0" bIns="0">
+            <a:spAutoFit/>
+          </a:bodyPr>
+          <a:lstStyle/>
+          <a:p>
             <a:pPr algn="l">
               <a:lnSpc>
-                <a:spcPct val="150000"/>
+                <a:spcPct val="110000"/>
               </a:lnSpc>
-              <a:spcAft>
-                <a:spcPts val="1000"/>
-              </a:spcAft>
             </a:pPr>
             <a:r>
-              <a:rPr sz="1800" b="1">
-                <a:solidFill>
-                  <a:srgbClr val="C8A86B"/>
+              <a:rPr sz="1600" b="1">
+                <a:solidFill>
+                  <a:srgbClr val="1C2A33"/>
+                </a:solidFill>
+                <a:latin typeface="微软雅黑"/>
+                <a:ea typeface="微软雅黑"/>
+                <a:cs typeface="微软雅黑"/>
+              </a:rPr>
+              <a:t/>
+            </a:r>
+          </a:p>
+        </p:txBody>
+      </p:sp>
+      <p:sp>
+        <p:nvSpPr>
+          <p:cNvPr id="14" name="TextBox 13"/>
+          <p:cNvSpPr txBox="1"/>
+          <p:nvPr/>
+        </p:nvSpPr>
+        <p:spPr>
+          <a:xfrm>
+            <a:off x="6995160" y="1965960"/>
+            <a:ext cx="4434840" cy="1417320"/>
+          </a:xfrm>
+          <a:prstGeom prst="rect">
+            <a:avLst/>
+          </a:prstGeom>
+          <a:noFill/>
+        </p:spPr>
+        <p:txBody>
+          <a:bodyPr wrap="square" anchor="t" lIns="0" rIns="0" tIns="0" bIns="0">
+            <a:spAutoFit/>
+          </a:bodyPr>
+          <a:lstStyle/>
+          <a:p>
+            <a:pPr algn="l">
+              <a:lnSpc>
+                <a:spcPct val="128000"/>
+              </a:lnSpc>
+            </a:pPr>
+            <a:r>
+              <a:rPr sz="1100" b="0">
+                <a:solidFill>
+                  <a:srgbClr val="1C2A33"/>
                 </a:solidFill>
                 <a:latin typeface="楷体"/>
                 <a:ea typeface="楷体"/>
                 <a:cs typeface="楷体"/>
               </a:rPr>
-              <a:t>通讯选材的窍门：不贪多，只选最能凸显人物精神的典型事件。</a:t>
-            </a:r>
-          </a:p>
+              <a:t>② 钟扬「探界」的多重含义。原因：「探界」不只是地理上的跨界（平原到高原），也是学科跨界（植物学+教育学）+生命境界的超越，学生易停留字面。</a:t>
+            </a:r>
+          </a:p>
+        </p:txBody>
+      </p:sp>
+      <p:sp>
+        <p:nvSpPr>
+          <p:cNvPr id="15" name="Rounded Rectangle 14"/>
+          <p:cNvSpPr/>
+          <p:nvPr/>
+        </p:nvSpPr>
+        <p:spPr>
+          <a:xfrm>
+            <a:off x="640080" y="3703320"/>
+            <a:ext cx="5349240" cy="2057400"/>
+          </a:xfrm>
+          <a:prstGeom prst="roundRect">
+            <a:avLst/>
+          </a:prstGeom>
+          <a:solidFill>
+            <a:srgbClr val="FFFFFF"/>
+          </a:solidFill>
+          <a:ln w="22860">
+            <a:solidFill>
+              <a:srgbClr val="B23A2A"/>
+            </a:solidFill>
+          </a:ln>
+          <a:effectLst/>
+        </p:spPr>
+        <p:style>
+          <a:lnRef idx="1">
+            <a:schemeClr val="accent1"/>
+          </a:lnRef>
+          <a:fillRef idx="3">
+            <a:schemeClr val="accent1"/>
+          </a:fillRef>
+          <a:effectRef idx="2">
+            <a:schemeClr val="accent1"/>
+          </a:effectRef>
+          <a:fontRef idx="minor">
+            <a:schemeClr val="lt1"/>
+          </a:fontRef>
+        </p:style>
+        <p:txBody>
+          <a:bodyPr rtlCol="0" anchor="ctr"/>
+          <a:lstStyle/>
+          <a:p>
+            <a:pPr algn="ctr"/>
+          </a:p>
+        </p:txBody>
+      </p:sp>
+      <p:sp>
+        <p:nvSpPr>
+          <p:cNvPr id="16" name="Oval 15"/>
+          <p:cNvSpPr/>
+          <p:nvPr/>
+        </p:nvSpPr>
+        <p:spPr>
+          <a:xfrm>
+            <a:off x="804672" y="3867912"/>
+            <a:ext cx="457200" cy="457200"/>
+          </a:xfrm>
+          <a:prstGeom prst="ellipse">
+            <a:avLst/>
+          </a:prstGeom>
+          <a:solidFill>
+            <a:srgbClr val="B23A2A"/>
+          </a:solidFill>
+          <a:ln>
+            <a:noFill/>
+          </a:ln>
+          <a:effectLst/>
+        </p:spPr>
+        <p:style>
+          <a:lnRef idx="1">
+            <a:schemeClr val="accent1"/>
+          </a:lnRef>
+          <a:fillRef idx="3">
+            <a:schemeClr val="accent1"/>
+          </a:fillRef>
+          <a:effectRef idx="2">
+            <a:schemeClr val="accent1"/>
+          </a:effectRef>
+          <a:fontRef idx="minor">
+            <a:schemeClr val="lt1"/>
+          </a:fontRef>
+        </p:style>
+        <p:txBody>
+          <a:bodyPr rtlCol="0" anchor="ctr"/>
+          <a:lstStyle/>
+          <a:p>
+            <a:pPr algn="ctr"/>
+          </a:p>
+        </p:txBody>
+      </p:sp>
+      <p:sp>
+        <p:nvSpPr>
+          <p:cNvPr id="17" name="TextBox 16"/>
+          <p:cNvSpPr txBox="1"/>
+          <p:nvPr/>
+        </p:nvSpPr>
+        <p:spPr>
+          <a:xfrm>
+            <a:off x="804672" y="3922776"/>
+            <a:ext cx="457200" cy="384048"/>
+          </a:xfrm>
+          <a:prstGeom prst="rect">
+            <a:avLst/>
+          </a:prstGeom>
+          <a:noFill/>
+        </p:spPr>
+        <p:txBody>
+          <a:bodyPr wrap="square" anchor="t" lIns="0" rIns="0" tIns="0" bIns="0">
+            <a:spAutoFit/>
+          </a:bodyPr>
+          <a:lstStyle/>
+          <a:p>
+            <a:pPr algn="ctr"/>
+            <a:r>
+              <a:rPr sz="1600" b="1">
+                <a:solidFill>
+                  <a:srgbClr val="FFFFFF"/>
+                </a:solidFill>
+                <a:latin typeface="微软雅黑"/>
+                <a:ea typeface="微软雅黑"/>
+                <a:cs typeface="微软雅黑"/>
+              </a:rPr>
+              <a:t>!</a:t>
+            </a:r>
+          </a:p>
+        </p:txBody>
+      </p:sp>
+      <p:sp>
+        <p:nvSpPr>
+          <p:cNvPr id="18" name="TextBox 17"/>
+          <p:cNvSpPr txBox="1"/>
+          <p:nvPr/>
+        </p:nvSpPr>
+        <p:spPr>
+          <a:xfrm>
+            <a:off x="1371600" y="3813048"/>
+            <a:ext cx="4434840" cy="457200"/>
+          </a:xfrm>
+          <a:prstGeom prst="rect">
+            <a:avLst/>
+          </a:prstGeom>
+          <a:noFill/>
+        </p:spPr>
+        <p:txBody>
+          <a:bodyPr wrap="square" anchor="t" lIns="0" rIns="0" tIns="0" bIns="0">
+            <a:spAutoFit/>
+          </a:bodyPr>
+          <a:lstStyle/>
           <a:p>
             <a:pPr algn="l">
               <a:lnSpc>
-                <a:spcPct val="145000"/>
+                <a:spcPct val="110000"/>
               </a:lnSpc>
-              <a:spcAft>
-                <a:spcPts val="500"/>
-              </a:spcAft>
             </a:pPr>
             <a:r>
-              <a:rPr sz="1450" b="0">
-                <a:solidFill>
-                  <a:srgbClr val="FFFFFF"/>
+              <a:rPr sz="1600" b="1">
+                <a:solidFill>
+                  <a:srgbClr val="1C2A33"/>
+                </a:solidFill>
+                <a:latin typeface="微软雅黑"/>
+                <a:ea typeface="微软雅黑"/>
+                <a:cs typeface="微软雅黑"/>
+              </a:rPr>
+              <a:t/>
+            </a:r>
+          </a:p>
+        </p:txBody>
+      </p:sp>
+      <p:sp>
+        <p:nvSpPr>
+          <p:cNvPr id="19" name="TextBox 18"/>
+          <p:cNvSpPr txBox="1"/>
+          <p:nvPr/>
+        </p:nvSpPr>
+        <p:spPr>
+          <a:xfrm>
+            <a:off x="1371600" y="4251960"/>
+            <a:ext cx="4434840" cy="1417320"/>
+          </a:xfrm>
+          <a:prstGeom prst="rect">
+            <a:avLst/>
+          </a:prstGeom>
+          <a:noFill/>
+        </p:spPr>
+        <p:txBody>
+          <a:bodyPr wrap="square" anchor="t" lIns="0" rIns="0" tIns="0" bIns="0">
+            <a:spAutoFit/>
+          </a:bodyPr>
+          <a:lstStyle/>
+          <a:p>
+            <a:pPr algn="l">
+              <a:lnSpc>
+                <a:spcPct val="128000"/>
+              </a:lnSpc>
+            </a:pPr>
+            <a:r>
+              <a:rPr sz="1200" b="0">
+                <a:solidFill>
+                  <a:srgbClr val="1C2A33"/>
                 </a:solidFill>
                 <a:latin typeface="楷体"/>
                 <a:ea typeface="楷体"/>
                 <a:cs typeface="楷体"/>
               </a:rPr>
-              <a:t>· 写钟扬领结婚证——见出他「把科普当逗乐」的赤子性情；</a:t>
-            </a:r>
-          </a:p>
-          <a:p>
-            <a:pPr algn="l">
-              <a:lnSpc>
-                <a:spcPct val="145000"/>
-              </a:lnSpc>
-              <a:spcAft>
-                <a:spcPts val="500"/>
-              </a:spcAft>
-            </a:pPr>
-            <a:r>
-              <a:rPr sz="1450" b="0">
-                <a:solidFill>
-                  <a:srgbClr val="FFFFFF"/>
-                </a:solidFill>
-                <a:latin typeface="楷体"/>
-                <a:ea typeface="楷体"/>
-                <a:cs typeface="楷体"/>
-              </a:rPr>
-              <a:t>· 略写售货法——因为通讯要突出的是「一团火」的服务心，不是技术手册；</a:t>
-            </a:r>
-          </a:p>
-          <a:p>
-            <a:pPr algn="l">
-              <a:lnSpc>
-                <a:spcPct val="145000"/>
-              </a:lnSpc>
-            </a:pPr>
-            <a:r>
-              <a:rPr sz="1450" b="0">
-                <a:solidFill>
-                  <a:srgbClr val="FFFFFF"/>
-                </a:solidFill>
-                <a:latin typeface="楷体"/>
-                <a:ea typeface="楷体"/>
-                <a:cs typeface="楷体"/>
-              </a:rPr>
-              <a:t>· 课内外比对：课外写科考艰苦（吃苦耐劳），课文写高原反应仍坚持（责任与拼命）——同一人，不同侧面，皆为真。</a:t>
-            </a:r>
-          </a:p>
-        </p:txBody>
-      </p:sp>
-      <p:sp>
-        <p:nvSpPr>
-          <p:cNvPr id="12" name="TextBox 11"/>
+              <a:t>③ 群文比较的归纳提升。原因：学生习惯逐篇分析，不善于跨文本提炼共性，需提供比较框架。</a:t>
+            </a:r>
+          </a:p>
+        </p:txBody>
+      </p:sp>
+      <p:sp>
+        <p:nvSpPr>
+          <p:cNvPr id="20" name="TextBox 19"/>
           <p:cNvSpPr txBox="1"/>
           <p:nvPr/>
         </p:nvSpPr>
@@ -7193,13 +7394,13 @@
             <a:r>
               <a:rPr sz="1300" b="1">
                 <a:solidFill>
-                  <a:srgbClr val="B23A2A"/>
+                  <a:srgbClr val="C8A86B"/>
                 </a:solidFill>
                 <a:latin typeface="微软雅黑"/>
                 <a:ea typeface="微软雅黑"/>
                 <a:cs typeface="微软雅黑"/>
               </a:rPr>
-              <a:t>板书 · 群文比较表</a:t>
+              <a:t>要点板书</a:t>
             </a:r>
           </a:p>
         </p:txBody>
@@ -7219,7 +7420,7 @@
             <a:avLst/>
           </a:prstGeom>
           <a:solidFill>
-            <a:srgbClr val="B23A2A"/>
+            <a:srgbClr val="C8A86B"/>
           </a:solidFill>
           <a:ln>
             <a:noFill/>
@@ -7256,15 +7457,20 @@
         </p:nvSpPr>
         <p:spPr>
           <a:xfrm>
-            <a:off x="640080" y="1828800"/>
-            <a:ext cx="10911535" cy="566928"/>
+            <a:off x="640080" y="1417320"/>
+            <a:ext cx="10911535" cy="5394960"/>
           </a:xfrm>
           <a:prstGeom prst="roundRect">
             <a:avLst/>
           </a:prstGeom>
           <a:solidFill>
-            <a:srgbClr val="1C2A33"/>
+            <a:srgbClr val="FFFFFF"/>
           </a:solidFill>
+          <a:ln w="25400">
+            <a:solidFill>
+              <a:srgbClr val="C8A86B"/>
+            </a:solidFill>
+          </a:ln>
           <a:effectLst/>
         </p:spPr>
         <p:style>
@@ -7297,8 +7503,8 @@
         </p:nvSpPr>
         <p:spPr>
           <a:xfrm>
-            <a:off x="914400" y="1920240"/>
-            <a:ext cx="2743200" cy="411480"/>
+            <a:off x="914400" y="1554480"/>
+            <a:ext cx="10362895" cy="5120640"/>
           </a:xfrm>
           <a:prstGeom prst="rect">
             <a:avLst/>
@@ -7311,17 +7517,44 @@
           </a:bodyPr>
           <a:lstStyle/>
           <a:p>
-            <a:pPr algn="l"/>
-            <a:r>
-              <a:rPr sz="1500" b="1">
-                <a:solidFill>
-                  <a:srgbClr val="FFFFFF"/>
+            <a:pPr algn="l">
+              <a:lnSpc>
+                <a:spcPct val="110000"/>
+              </a:lnSpc>
+              <a:spcAft>
+                <a:spcPts val="100"/>
+              </a:spcAft>
+            </a:pPr>
+            <a:r>
+              <a:rPr sz="1300" b="0">
+                <a:solidFill>
+                  <a:srgbClr val="1C2A33"/>
                 </a:solidFill>
                 <a:latin typeface="微软雅黑"/>
                 <a:ea typeface="微软雅黑"/>
                 <a:cs typeface="微软雅黑"/>
               </a:rPr>
-              <a:t>比较维度</a:t>
+              <a:t>┌── 群文比较:两双劳动的手 ──┐
+│ │
+│ 左手:张秉贵 右手:钟扬 │
+│ 一抓准 16年采种 │
+│ 一口清 4000万颗 │
+│ 一团火 探界者 │
+│ →精益求精 →跨界奉献 │
+│ │
+│ 【比较表】 │
+│ 人物:售货员 | 教授 │
+│ 场景:柜台 | 高原 │
+│ 精神:坚守 | 奉献 │
+│ 手法:细节反复| 数据跨度 │
+│ │
+│ 【劳动光荣=】 │
+│ 坚守+创新+奉献 │
+│ (张秉贵)(袁隆平)(钟扬) │
+│ │
+│ 群文比较:同主题·异选材· │
+│ 比手法 │
+└────────────────────────────┘</a:t>
             </a:r>
           </a:p>
         </p:txBody>
@@ -7329,745 +7562,6 @@
       <p:sp>
         <p:nvSpPr>
           <p:cNvPr id="7" name="TextBox 6"/>
-          <p:cNvSpPr txBox="1"/>
-          <p:nvPr/>
-        </p:nvSpPr>
-        <p:spPr>
-          <a:xfrm>
-            <a:off x="3931920" y="1920240"/>
-            <a:ext cx="3840480" cy="411480"/>
-          </a:xfrm>
-          <a:prstGeom prst="rect">
-            <a:avLst/>
-          </a:prstGeom>
-          <a:noFill/>
-        </p:spPr>
-        <p:txBody>
-          <a:bodyPr wrap="square" anchor="t" lIns="0" rIns="0" tIns="0" bIns="0">
-            <a:spAutoFit/>
-          </a:bodyPr>
-          <a:lstStyle/>
-          <a:p>
-            <a:pPr algn="l"/>
-            <a:r>
-              <a:rPr sz="1500" b="1">
-                <a:solidFill>
-                  <a:srgbClr val="C8A86B"/>
-                </a:solidFill>
-                <a:latin typeface="微软雅黑"/>
-                <a:ea typeface="微软雅黑"/>
-                <a:cs typeface="微软雅黑"/>
-              </a:rPr>
-              <a:t>《心有一团火》张秉贵</a:t>
-            </a:r>
-          </a:p>
-        </p:txBody>
-      </p:sp>
-      <p:sp>
-        <p:nvSpPr>
-          <p:cNvPr id="8" name="TextBox 7"/>
-          <p:cNvSpPr txBox="1"/>
-          <p:nvPr/>
-        </p:nvSpPr>
-        <p:spPr>
-          <a:xfrm>
-            <a:off x="8138159" y="1920240"/>
-            <a:ext cx="3840480" cy="411480"/>
-          </a:xfrm>
-          <a:prstGeom prst="rect">
-            <a:avLst/>
-          </a:prstGeom>
-          <a:noFill/>
-        </p:spPr>
-        <p:txBody>
-          <a:bodyPr wrap="square" anchor="t" lIns="0" rIns="0" tIns="0" bIns="0">
-            <a:spAutoFit/>
-          </a:bodyPr>
-          <a:lstStyle/>
-          <a:p>
-            <a:pPr algn="l"/>
-            <a:r>
-              <a:rPr sz="1500" b="1">
-                <a:solidFill>
-                  <a:srgbClr val="C8A86B"/>
-                </a:solidFill>
-                <a:latin typeface="微软雅黑"/>
-                <a:ea typeface="微软雅黑"/>
-                <a:cs typeface="微软雅黑"/>
-              </a:rPr>
-              <a:t>《探界者》钟扬</a:t>
-            </a:r>
-          </a:p>
-        </p:txBody>
-      </p:sp>
-      <p:sp>
-        <p:nvSpPr>
-          <p:cNvPr id="9" name="Rounded Rectangle 8"/>
-          <p:cNvSpPr/>
-          <p:nvPr/>
-        </p:nvSpPr>
-        <p:spPr>
-          <a:xfrm>
-            <a:off x="640080" y="2514599"/>
-            <a:ext cx="10911535" cy="658368"/>
-          </a:xfrm>
-          <a:prstGeom prst="roundRect">
-            <a:avLst/>
-          </a:prstGeom>
-          <a:solidFill>
-            <a:srgbClr val="FFFFFF"/>
-          </a:solidFill>
-          <a:ln w="10160">
-            <a:solidFill>
-              <a:srgbClr val="6B6258"/>
-            </a:solidFill>
-          </a:ln>
-          <a:effectLst/>
-        </p:spPr>
-        <p:style>
-          <a:lnRef idx="1">
-            <a:schemeClr val="accent1"/>
-          </a:lnRef>
-          <a:fillRef idx="3">
-            <a:schemeClr val="accent1"/>
-          </a:fillRef>
-          <a:effectRef idx="2">
-            <a:schemeClr val="accent1"/>
-          </a:effectRef>
-          <a:fontRef idx="minor">
-            <a:schemeClr val="lt1"/>
-          </a:fontRef>
-        </p:style>
-        <p:txBody>
-          <a:bodyPr rtlCol="0" anchor="ctr"/>
-          <a:lstStyle/>
-          <a:p>
-            <a:pPr algn="ctr"/>
-          </a:p>
-        </p:txBody>
-      </p:sp>
-      <p:sp>
-        <p:nvSpPr>
-          <p:cNvPr id="10" name="TextBox 9"/>
-          <p:cNvSpPr txBox="1"/>
-          <p:nvPr/>
-        </p:nvSpPr>
-        <p:spPr>
-          <a:xfrm>
-            <a:off x="914400" y="2651759"/>
-            <a:ext cx="2743200" cy="411480"/>
-          </a:xfrm>
-          <a:prstGeom prst="rect">
-            <a:avLst/>
-          </a:prstGeom>
-          <a:noFill/>
-        </p:spPr>
-        <p:txBody>
-          <a:bodyPr wrap="square" anchor="t" lIns="0" rIns="0" tIns="0" bIns="0">
-            <a:spAutoFit/>
-          </a:bodyPr>
-          <a:lstStyle/>
-          <a:p>
-            <a:pPr algn="l"/>
-            <a:r>
-              <a:rPr sz="1500" b="1">
-                <a:solidFill>
-                  <a:srgbClr val="1C2A33"/>
-                </a:solidFill>
-                <a:latin typeface="微软雅黑"/>
-                <a:ea typeface="微软雅黑"/>
-                <a:cs typeface="微软雅黑"/>
-              </a:rPr>
-              <a:t>人物身份</a:t>
-            </a:r>
-          </a:p>
-        </p:txBody>
-      </p:sp>
-      <p:sp>
-        <p:nvSpPr>
-          <p:cNvPr id="11" name="TextBox 10"/>
-          <p:cNvSpPr txBox="1"/>
-          <p:nvPr/>
-        </p:nvSpPr>
-        <p:spPr>
-          <a:xfrm>
-            <a:off x="3931920" y="2651759"/>
-            <a:ext cx="3840480" cy="411480"/>
-          </a:xfrm>
-          <a:prstGeom prst="rect">
-            <a:avLst/>
-          </a:prstGeom>
-          <a:noFill/>
-        </p:spPr>
-        <p:txBody>
-          <a:bodyPr wrap="square" anchor="t" lIns="0" rIns="0" tIns="0" bIns="0">
-            <a:spAutoFit/>
-          </a:bodyPr>
-          <a:lstStyle/>
-          <a:p>
-            <a:pPr algn="l"/>
-            <a:r>
-              <a:rPr sz="1400" b="0">
-                <a:solidFill>
-                  <a:srgbClr val="B23A2A"/>
-                </a:solidFill>
-                <a:latin typeface="楷体"/>
-                <a:ea typeface="楷体"/>
-                <a:cs typeface="楷体"/>
-              </a:rPr>
-              <a:t>售货员</a:t>
-            </a:r>
-          </a:p>
-        </p:txBody>
-      </p:sp>
-      <p:sp>
-        <p:nvSpPr>
-          <p:cNvPr id="12" name="TextBox 11"/>
-          <p:cNvSpPr txBox="1"/>
-          <p:nvPr/>
-        </p:nvSpPr>
-        <p:spPr>
-          <a:xfrm>
-            <a:off x="8138159" y="2651759"/>
-            <a:ext cx="3840480" cy="411480"/>
-          </a:xfrm>
-          <a:prstGeom prst="rect">
-            <a:avLst/>
-          </a:prstGeom>
-          <a:noFill/>
-        </p:spPr>
-        <p:txBody>
-          <a:bodyPr wrap="square" anchor="t" lIns="0" rIns="0" tIns="0" bIns="0">
-            <a:spAutoFit/>
-          </a:bodyPr>
-          <a:lstStyle/>
-          <a:p>
-            <a:pPr algn="l"/>
-            <a:r>
-              <a:rPr sz="1400" b="0">
-                <a:solidFill>
-                  <a:srgbClr val="2E7D6B"/>
-                </a:solidFill>
-                <a:latin typeface="楷体"/>
-                <a:ea typeface="楷体"/>
-                <a:cs typeface="楷体"/>
-              </a:rPr>
-              <a:t>大学教授</a:t>
-            </a:r>
-          </a:p>
-        </p:txBody>
-      </p:sp>
-      <p:sp>
-        <p:nvSpPr>
-          <p:cNvPr id="13" name="Rounded Rectangle 12"/>
-          <p:cNvSpPr/>
-          <p:nvPr/>
-        </p:nvSpPr>
-        <p:spPr>
-          <a:xfrm>
-            <a:off x="640080" y="3246119"/>
-            <a:ext cx="10911535" cy="658368"/>
-          </a:xfrm>
-          <a:prstGeom prst="roundRect">
-            <a:avLst/>
-          </a:prstGeom>
-          <a:solidFill>
-            <a:srgbClr val="E7DFD2"/>
-          </a:solidFill>
-          <a:ln w="10160">
-            <a:solidFill>
-              <a:srgbClr val="6B6258"/>
-            </a:solidFill>
-          </a:ln>
-          <a:effectLst/>
-        </p:spPr>
-        <p:style>
-          <a:lnRef idx="1">
-            <a:schemeClr val="accent1"/>
-          </a:lnRef>
-          <a:fillRef idx="3">
-            <a:schemeClr val="accent1"/>
-          </a:fillRef>
-          <a:effectRef idx="2">
-            <a:schemeClr val="accent1"/>
-          </a:effectRef>
-          <a:fontRef idx="minor">
-            <a:schemeClr val="lt1"/>
-          </a:fontRef>
-        </p:style>
-        <p:txBody>
-          <a:bodyPr rtlCol="0" anchor="ctr"/>
-          <a:lstStyle/>
-          <a:p>
-            <a:pPr algn="ctr"/>
-          </a:p>
-        </p:txBody>
-      </p:sp>
-      <p:sp>
-        <p:nvSpPr>
-          <p:cNvPr id="14" name="TextBox 13"/>
-          <p:cNvSpPr txBox="1"/>
-          <p:nvPr/>
-        </p:nvSpPr>
-        <p:spPr>
-          <a:xfrm>
-            <a:off x="914400" y="3383279"/>
-            <a:ext cx="2743200" cy="411480"/>
-          </a:xfrm>
-          <a:prstGeom prst="rect">
-            <a:avLst/>
-          </a:prstGeom>
-          <a:noFill/>
-        </p:spPr>
-        <p:txBody>
-          <a:bodyPr wrap="square" anchor="t" lIns="0" rIns="0" tIns="0" bIns="0">
-            <a:spAutoFit/>
-          </a:bodyPr>
-          <a:lstStyle/>
-          <a:p>
-            <a:pPr algn="l"/>
-            <a:r>
-              <a:rPr sz="1500" b="1">
-                <a:solidFill>
-                  <a:srgbClr val="1C2A33"/>
-                </a:solidFill>
-                <a:latin typeface="微软雅黑"/>
-                <a:ea typeface="微软雅黑"/>
-                <a:cs typeface="微软雅黑"/>
-              </a:rPr>
-              <a:t>劳动场景</a:t>
-            </a:r>
-          </a:p>
-        </p:txBody>
-      </p:sp>
-      <p:sp>
-        <p:nvSpPr>
-          <p:cNvPr id="15" name="TextBox 14"/>
-          <p:cNvSpPr txBox="1"/>
-          <p:nvPr/>
-        </p:nvSpPr>
-        <p:spPr>
-          <a:xfrm>
-            <a:off x="3931920" y="3383279"/>
-            <a:ext cx="3840480" cy="411480"/>
-          </a:xfrm>
-          <a:prstGeom prst="rect">
-            <a:avLst/>
-          </a:prstGeom>
-          <a:noFill/>
-        </p:spPr>
-        <p:txBody>
-          <a:bodyPr wrap="square" anchor="t" lIns="0" rIns="0" tIns="0" bIns="0">
-            <a:spAutoFit/>
-          </a:bodyPr>
-          <a:lstStyle/>
-          <a:p>
-            <a:pPr algn="l"/>
-            <a:r>
-              <a:rPr sz="1400" b="0">
-                <a:solidFill>
-                  <a:srgbClr val="B23A2A"/>
-                </a:solidFill>
-                <a:latin typeface="楷体"/>
-                <a:ea typeface="楷体"/>
-                <a:cs typeface="楷体"/>
-              </a:rPr>
-              <a:t>王府井糖果柜台</a:t>
-            </a:r>
-          </a:p>
-        </p:txBody>
-      </p:sp>
-      <p:sp>
-        <p:nvSpPr>
-          <p:cNvPr id="16" name="TextBox 15"/>
-          <p:cNvSpPr txBox="1"/>
-          <p:nvPr/>
-        </p:nvSpPr>
-        <p:spPr>
-          <a:xfrm>
-            <a:off x="8138159" y="3383279"/>
-            <a:ext cx="3840480" cy="411480"/>
-          </a:xfrm>
-          <a:prstGeom prst="rect">
-            <a:avLst/>
-          </a:prstGeom>
-          <a:noFill/>
-        </p:spPr>
-        <p:txBody>
-          <a:bodyPr wrap="square" anchor="t" lIns="0" rIns="0" tIns="0" bIns="0">
-            <a:spAutoFit/>
-          </a:bodyPr>
-          <a:lstStyle/>
-          <a:p>
-            <a:pPr algn="l"/>
-            <a:r>
-              <a:rPr sz="1400" b="0">
-                <a:solidFill>
-                  <a:srgbClr val="2E7D6B"/>
-                </a:solidFill>
-                <a:latin typeface="楷体"/>
-                <a:ea typeface="楷体"/>
-                <a:cs typeface="楷体"/>
-              </a:rPr>
-              <a:t>西藏高原采种</a:t>
-            </a:r>
-          </a:p>
-        </p:txBody>
-      </p:sp>
-      <p:sp>
-        <p:nvSpPr>
-          <p:cNvPr id="17" name="Rounded Rectangle 16"/>
-          <p:cNvSpPr/>
-          <p:nvPr/>
-        </p:nvSpPr>
-        <p:spPr>
-          <a:xfrm>
-            <a:off x="640080" y="3977639"/>
-            <a:ext cx="10911535" cy="658368"/>
-          </a:xfrm>
-          <a:prstGeom prst="roundRect">
-            <a:avLst/>
-          </a:prstGeom>
-          <a:solidFill>
-            <a:srgbClr val="FFFFFF"/>
-          </a:solidFill>
-          <a:ln w="10160">
-            <a:solidFill>
-              <a:srgbClr val="6B6258"/>
-            </a:solidFill>
-          </a:ln>
-          <a:effectLst/>
-        </p:spPr>
-        <p:style>
-          <a:lnRef idx="1">
-            <a:schemeClr val="accent1"/>
-          </a:lnRef>
-          <a:fillRef idx="3">
-            <a:schemeClr val="accent1"/>
-          </a:fillRef>
-          <a:effectRef idx="2">
-            <a:schemeClr val="accent1"/>
-          </a:effectRef>
-          <a:fontRef idx="minor">
-            <a:schemeClr val="lt1"/>
-          </a:fontRef>
-        </p:style>
-        <p:txBody>
-          <a:bodyPr rtlCol="0" anchor="ctr"/>
-          <a:lstStyle/>
-          <a:p>
-            <a:pPr algn="ctr"/>
-          </a:p>
-        </p:txBody>
-      </p:sp>
-      <p:sp>
-        <p:nvSpPr>
-          <p:cNvPr id="18" name="TextBox 17"/>
-          <p:cNvSpPr txBox="1"/>
-          <p:nvPr/>
-        </p:nvSpPr>
-        <p:spPr>
-          <a:xfrm>
-            <a:off x="914400" y="4114799"/>
-            <a:ext cx="2743200" cy="411480"/>
-          </a:xfrm>
-          <a:prstGeom prst="rect">
-            <a:avLst/>
-          </a:prstGeom>
-          <a:noFill/>
-        </p:spPr>
-        <p:txBody>
-          <a:bodyPr wrap="square" anchor="t" lIns="0" rIns="0" tIns="0" bIns="0">
-            <a:spAutoFit/>
-          </a:bodyPr>
-          <a:lstStyle/>
-          <a:p>
-            <a:pPr algn="l"/>
-            <a:r>
-              <a:rPr sz="1500" b="1">
-                <a:solidFill>
-                  <a:srgbClr val="1C2A33"/>
-                </a:solidFill>
-                <a:latin typeface="微软雅黑"/>
-                <a:ea typeface="微软雅黑"/>
-                <a:cs typeface="微软雅黑"/>
-              </a:rPr>
-              <a:t>精神品质</a:t>
-            </a:r>
-          </a:p>
-        </p:txBody>
-      </p:sp>
-      <p:sp>
-        <p:nvSpPr>
-          <p:cNvPr id="19" name="TextBox 18"/>
-          <p:cNvSpPr txBox="1"/>
-          <p:nvPr/>
-        </p:nvSpPr>
-        <p:spPr>
-          <a:xfrm>
-            <a:off x="3931920" y="4114799"/>
-            <a:ext cx="3840480" cy="411480"/>
-          </a:xfrm>
-          <a:prstGeom prst="rect">
-            <a:avLst/>
-          </a:prstGeom>
-          <a:noFill/>
-        </p:spPr>
-        <p:txBody>
-          <a:bodyPr wrap="square" anchor="t" lIns="0" rIns="0" tIns="0" bIns="0">
-            <a:spAutoFit/>
-          </a:bodyPr>
-          <a:lstStyle/>
-          <a:p>
-            <a:pPr algn="l"/>
-            <a:r>
-              <a:rPr sz="1400" b="0">
-                <a:solidFill>
-                  <a:srgbClr val="B23A2A"/>
-                </a:solidFill>
-                <a:latin typeface="楷体"/>
-                <a:ea typeface="楷体"/>
-                <a:cs typeface="楷体"/>
-              </a:rPr>
-              <a:t>精益求精·坚守</a:t>
-            </a:r>
-          </a:p>
-        </p:txBody>
-      </p:sp>
-      <p:sp>
-        <p:nvSpPr>
-          <p:cNvPr id="20" name="TextBox 19"/>
-          <p:cNvSpPr txBox="1"/>
-          <p:nvPr/>
-        </p:nvSpPr>
-        <p:spPr>
-          <a:xfrm>
-            <a:off x="8138159" y="4114799"/>
-            <a:ext cx="3840480" cy="411480"/>
-          </a:xfrm>
-          <a:prstGeom prst="rect">
-            <a:avLst/>
-          </a:prstGeom>
-          <a:noFill/>
-        </p:spPr>
-        <p:txBody>
-          <a:bodyPr wrap="square" anchor="t" lIns="0" rIns="0" tIns="0" bIns="0">
-            <a:spAutoFit/>
-          </a:bodyPr>
-          <a:lstStyle/>
-          <a:p>
-            <a:pPr algn="l"/>
-            <a:r>
-              <a:rPr sz="1400" b="0">
-                <a:solidFill>
-                  <a:srgbClr val="2E7D6B"/>
-                </a:solidFill>
-                <a:latin typeface="楷体"/>
-                <a:ea typeface="楷体"/>
-                <a:cs typeface="楷体"/>
-              </a:rPr>
-              <a:t>跨界奉献</a:t>
-            </a:r>
-          </a:p>
-        </p:txBody>
-      </p:sp>
-      <p:sp>
-        <p:nvSpPr>
-          <p:cNvPr id="21" name="Rounded Rectangle 20"/>
-          <p:cNvSpPr/>
-          <p:nvPr/>
-        </p:nvSpPr>
-        <p:spPr>
-          <a:xfrm>
-            <a:off x="640080" y="4709159"/>
-            <a:ext cx="10911535" cy="658368"/>
-          </a:xfrm>
-          <a:prstGeom prst="roundRect">
-            <a:avLst/>
-          </a:prstGeom>
-          <a:solidFill>
-            <a:srgbClr val="E7DFD2"/>
-          </a:solidFill>
-          <a:ln w="10160">
-            <a:solidFill>
-              <a:srgbClr val="6B6258"/>
-            </a:solidFill>
-          </a:ln>
-          <a:effectLst/>
-        </p:spPr>
-        <p:style>
-          <a:lnRef idx="1">
-            <a:schemeClr val="accent1"/>
-          </a:lnRef>
-          <a:fillRef idx="3">
-            <a:schemeClr val="accent1"/>
-          </a:fillRef>
-          <a:effectRef idx="2">
-            <a:schemeClr val="accent1"/>
-          </a:effectRef>
-          <a:fontRef idx="minor">
-            <a:schemeClr val="lt1"/>
-          </a:fontRef>
-        </p:style>
-        <p:txBody>
-          <a:bodyPr rtlCol="0" anchor="ctr"/>
-          <a:lstStyle/>
-          <a:p>
-            <a:pPr algn="ctr"/>
-          </a:p>
-        </p:txBody>
-      </p:sp>
-      <p:sp>
-        <p:nvSpPr>
-          <p:cNvPr id="22" name="TextBox 21"/>
-          <p:cNvSpPr txBox="1"/>
-          <p:nvPr/>
-        </p:nvSpPr>
-        <p:spPr>
-          <a:xfrm>
-            <a:off x="914400" y="4846319"/>
-            <a:ext cx="2743200" cy="411480"/>
-          </a:xfrm>
-          <a:prstGeom prst="rect">
-            <a:avLst/>
-          </a:prstGeom>
-          <a:noFill/>
-        </p:spPr>
-        <p:txBody>
-          <a:bodyPr wrap="square" anchor="t" lIns="0" rIns="0" tIns="0" bIns="0">
-            <a:spAutoFit/>
-          </a:bodyPr>
-          <a:lstStyle/>
-          <a:p>
-            <a:pPr algn="l"/>
-            <a:r>
-              <a:rPr sz="1500" b="1">
-                <a:solidFill>
-                  <a:srgbClr val="1C2A33"/>
-                </a:solidFill>
-                <a:latin typeface="微软雅黑"/>
-                <a:ea typeface="微软雅黑"/>
-                <a:cs typeface="微软雅黑"/>
-              </a:rPr>
-              <a:t>选材手法</a:t>
-            </a:r>
-          </a:p>
-        </p:txBody>
-      </p:sp>
-      <p:sp>
-        <p:nvSpPr>
-          <p:cNvPr id="23" name="TextBox 22"/>
-          <p:cNvSpPr txBox="1"/>
-          <p:nvPr/>
-        </p:nvSpPr>
-        <p:spPr>
-          <a:xfrm>
-            <a:off x="3931920" y="4846319"/>
-            <a:ext cx="3840480" cy="411480"/>
-          </a:xfrm>
-          <a:prstGeom prst="rect">
-            <a:avLst/>
-          </a:prstGeom>
-          <a:noFill/>
-        </p:spPr>
-        <p:txBody>
-          <a:bodyPr wrap="square" anchor="t" lIns="0" rIns="0" tIns="0" bIns="0">
-            <a:spAutoFit/>
-          </a:bodyPr>
-          <a:lstStyle/>
-          <a:p>
-            <a:pPr algn="l"/>
-            <a:r>
-              <a:rPr sz="1400" b="0">
-                <a:solidFill>
-                  <a:srgbClr val="B23A2A"/>
-                </a:solidFill>
-                <a:latin typeface="楷体"/>
-                <a:ea typeface="楷体"/>
-                <a:cs typeface="楷体"/>
-              </a:rPr>
-              <a:t>细节反复（一抓准）</a:t>
-            </a:r>
-          </a:p>
-        </p:txBody>
-      </p:sp>
-      <p:sp>
-        <p:nvSpPr>
-          <p:cNvPr id="24" name="TextBox 23"/>
-          <p:cNvSpPr txBox="1"/>
-          <p:nvPr/>
-        </p:nvSpPr>
-        <p:spPr>
-          <a:xfrm>
-            <a:off x="8138159" y="4846319"/>
-            <a:ext cx="3840480" cy="411480"/>
-          </a:xfrm>
-          <a:prstGeom prst="rect">
-            <a:avLst/>
-          </a:prstGeom>
-          <a:noFill/>
-        </p:spPr>
-        <p:txBody>
-          <a:bodyPr wrap="square" anchor="t" lIns="0" rIns="0" tIns="0" bIns="0">
-            <a:spAutoFit/>
-          </a:bodyPr>
-          <a:lstStyle/>
-          <a:p>
-            <a:pPr algn="l"/>
-            <a:r>
-              <a:rPr sz="1400" b="0">
-                <a:solidFill>
-                  <a:srgbClr val="2E7D6B"/>
-                </a:solidFill>
-                <a:latin typeface="楷体"/>
-                <a:ea typeface="楷体"/>
-                <a:cs typeface="楷体"/>
-              </a:rPr>
-              <a:t>数据跨度（16年/4000万颗）</a:t>
-            </a:r>
-          </a:p>
-        </p:txBody>
-      </p:sp>
-      <p:sp>
-        <p:nvSpPr>
-          <p:cNvPr id="25" name="TextBox 24"/>
-          <p:cNvSpPr txBox="1"/>
-          <p:nvPr/>
-        </p:nvSpPr>
-        <p:spPr>
-          <a:xfrm>
-            <a:off x="640080" y="5577839"/>
-            <a:ext cx="10911535" cy="822960"/>
-          </a:xfrm>
-          <a:prstGeom prst="rect">
-            <a:avLst/>
-          </a:prstGeom>
-          <a:noFill/>
-        </p:spPr>
-        <p:txBody>
-          <a:bodyPr wrap="square" anchor="t" lIns="0" rIns="0" tIns="0" bIns="0">
-            <a:spAutoFit/>
-          </a:bodyPr>
-          <a:lstStyle/>
-          <a:p>
-            <a:pPr algn="ctr"/>
-            <a:r>
-              <a:rPr sz="1900" b="1">
-                <a:solidFill>
-                  <a:srgbClr val="1C2A33"/>
-                </a:solidFill>
-                <a:latin typeface="楷体"/>
-                <a:ea typeface="楷体"/>
-                <a:cs typeface="楷体"/>
-              </a:rPr>
-              <a:t>劳动光荣 ＝ 坚守（张秉贵）＋ 创新（袁隆平）＋ 奉献（钟扬）</a:t>
-            </a:r>
-          </a:p>
-        </p:txBody>
-      </p:sp>
-      <p:sp>
-        <p:nvSpPr>
-          <p:cNvPr id="26" name="TextBox 25"/>
           <p:cNvSpPr txBox="1"/>
           <p:nvPr/>
         </p:nvSpPr>
@@ -8194,13 +7688,13 @@
             <a:r>
               <a:rPr sz="1300" b="1">
                 <a:solidFill>
-                  <a:srgbClr val="B23A2A"/>
+                  <a:srgbClr val="2E7D6B"/>
                 </a:solidFill>
                 <a:latin typeface="微软雅黑"/>
                 <a:ea typeface="微软雅黑"/>
                 <a:cs typeface="微软雅黑"/>
               </a:rPr>
-              <a:t>作业 · 分层</a:t>
+              <a:t>分层作业</a:t>
             </a:r>
           </a:p>
         </p:txBody>
@@ -8215,301 +7709,6 @@
           <a:xfrm>
             <a:off x="640080" y="1097280"/>
             <a:ext cx="822960" cy="30480"/>
-          </a:xfrm>
-          <a:prstGeom prst="rect">
-            <a:avLst/>
-          </a:prstGeom>
-          <a:solidFill>
-            <a:srgbClr val="B23A2A"/>
-          </a:solidFill>
-          <a:ln>
-            <a:noFill/>
-          </a:ln>
-          <a:effectLst/>
-        </p:spPr>
-        <p:style>
-          <a:lnRef idx="1">
-            <a:schemeClr val="accent1"/>
-          </a:lnRef>
-          <a:fillRef idx="3">
-            <a:schemeClr val="accent1"/>
-          </a:fillRef>
-          <a:effectRef idx="2">
-            <a:schemeClr val="accent1"/>
-          </a:effectRef>
-          <a:fontRef idx="minor">
-            <a:schemeClr val="lt1"/>
-          </a:fontRef>
-        </p:style>
-        <p:txBody>
-          <a:bodyPr rtlCol="0" anchor="ctr"/>
-          <a:lstStyle/>
-          <a:p>
-            <a:pPr algn="ctr"/>
-          </a:p>
-        </p:txBody>
-      </p:sp>
-      <p:sp>
-        <p:nvSpPr>
-          <p:cNvPr id="5" name="TextBox 4"/>
-          <p:cNvSpPr txBox="1"/>
-          <p:nvPr/>
-        </p:nvSpPr>
-        <p:spPr>
-          <a:xfrm>
-            <a:off x="640080" y="1325880"/>
-            <a:ext cx="10058400" cy="548640"/>
-          </a:xfrm>
-          <a:prstGeom prst="rect">
-            <a:avLst/>
-          </a:prstGeom>
-          <a:noFill/>
-        </p:spPr>
-        <p:txBody>
-          <a:bodyPr wrap="square" anchor="t" lIns="0" rIns="0" tIns="0" bIns="0">
-            <a:spAutoFit/>
-          </a:bodyPr>
-          <a:lstStyle/>
-          <a:p>
-            <a:pPr algn="l"/>
-            <a:r>
-              <a:rPr sz="2600" b="1">
-                <a:solidFill>
-                  <a:srgbClr val="1C2A33"/>
-                </a:solidFill>
-                <a:latin typeface="楷体"/>
-                <a:ea typeface="楷体"/>
-                <a:cs typeface="楷体"/>
-              </a:rPr>
-              <a:t>基础 · 提升 · 拓展</a:t>
-            </a:r>
-          </a:p>
-        </p:txBody>
-      </p:sp>
-      <p:sp>
-        <p:nvSpPr>
-          <p:cNvPr id="6" name="Rounded Rectangle 5"/>
-          <p:cNvSpPr/>
-          <p:nvPr/>
-        </p:nvSpPr>
-        <p:spPr>
-          <a:xfrm>
-            <a:off x="640080" y="2194560"/>
-            <a:ext cx="3393338" cy="3840480"/>
-          </a:xfrm>
-          <a:prstGeom prst="roundRect">
-            <a:avLst/>
-          </a:prstGeom>
-          <a:solidFill>
-            <a:srgbClr val="FFFFFF"/>
-          </a:solidFill>
-          <a:ln w="20320">
-            <a:solidFill>
-              <a:srgbClr val="B23A2A"/>
-            </a:solidFill>
-          </a:ln>
-          <a:effectLst/>
-        </p:spPr>
-        <p:style>
-          <a:lnRef idx="1">
-            <a:schemeClr val="accent1"/>
-          </a:lnRef>
-          <a:fillRef idx="3">
-            <a:schemeClr val="accent1"/>
-          </a:fillRef>
-          <a:effectRef idx="2">
-            <a:schemeClr val="accent1"/>
-          </a:effectRef>
-          <a:fontRef idx="minor">
-            <a:schemeClr val="lt1"/>
-          </a:fontRef>
-        </p:style>
-        <p:txBody>
-          <a:bodyPr rtlCol="0" anchor="ctr"/>
-          <a:lstStyle/>
-          <a:p>
-            <a:pPr algn="ctr"/>
-          </a:p>
-        </p:txBody>
-      </p:sp>
-      <p:sp>
-        <p:nvSpPr>
-          <p:cNvPr id="7" name="Rectangle 6"/>
-          <p:cNvSpPr/>
-          <p:nvPr/>
-        </p:nvSpPr>
-        <p:spPr>
-          <a:xfrm>
-            <a:off x="640080" y="2194560"/>
-            <a:ext cx="3393338" cy="548640"/>
-          </a:xfrm>
-          <a:prstGeom prst="rect">
-            <a:avLst/>
-          </a:prstGeom>
-          <a:solidFill>
-            <a:srgbClr val="B23A2A"/>
-          </a:solidFill>
-          <a:ln>
-            <a:noFill/>
-          </a:ln>
-          <a:effectLst/>
-        </p:spPr>
-        <p:style>
-          <a:lnRef idx="1">
-            <a:schemeClr val="accent1"/>
-          </a:lnRef>
-          <a:fillRef idx="3">
-            <a:schemeClr val="accent1"/>
-          </a:fillRef>
-          <a:effectRef idx="2">
-            <a:schemeClr val="accent1"/>
-          </a:effectRef>
-          <a:fontRef idx="minor">
-            <a:schemeClr val="lt1"/>
-          </a:fontRef>
-        </p:style>
-        <p:txBody>
-          <a:bodyPr rtlCol="0" anchor="ctr"/>
-          <a:lstStyle/>
-          <a:p>
-            <a:pPr algn="ctr"/>
-          </a:p>
-        </p:txBody>
-      </p:sp>
-      <p:sp>
-        <p:nvSpPr>
-          <p:cNvPr id="8" name="TextBox 7"/>
-          <p:cNvSpPr txBox="1"/>
-          <p:nvPr/>
-        </p:nvSpPr>
-        <p:spPr>
-          <a:xfrm>
-            <a:off x="640080" y="2304288"/>
-            <a:ext cx="3393338" cy="365760"/>
-          </a:xfrm>
-          <a:prstGeom prst="rect">
-            <a:avLst/>
-          </a:prstGeom>
-          <a:noFill/>
-        </p:spPr>
-        <p:txBody>
-          <a:bodyPr wrap="square" anchor="t" lIns="0" rIns="0" tIns="0" bIns="0">
-            <a:spAutoFit/>
-          </a:bodyPr>
-          <a:lstStyle/>
-          <a:p>
-            <a:pPr algn="ctr"/>
-            <a:r>
-              <a:rPr sz="1600" b="1">
-                <a:solidFill>
-                  <a:srgbClr val="FFFFFF"/>
-                </a:solidFill>
-                <a:latin typeface="微软雅黑"/>
-                <a:ea typeface="微软雅黑"/>
-                <a:cs typeface="微软雅黑"/>
-              </a:rPr>
-              <a:t>基础 · 必做</a:t>
-            </a:r>
-          </a:p>
-        </p:txBody>
-      </p:sp>
-      <p:sp>
-        <p:nvSpPr>
-          <p:cNvPr id="9" name="TextBox 8"/>
-          <p:cNvSpPr txBox="1"/>
-          <p:nvPr/>
-        </p:nvSpPr>
-        <p:spPr>
-          <a:xfrm>
-            <a:off x="914400" y="2971800"/>
-            <a:ext cx="2844698" cy="2926080"/>
-          </a:xfrm>
-          <a:prstGeom prst="rect">
-            <a:avLst/>
-          </a:prstGeom>
-          <a:noFill/>
-        </p:spPr>
-        <p:txBody>
-          <a:bodyPr wrap="square" anchor="t" lIns="0" rIns="0" tIns="0" bIns="0">
-            <a:spAutoFit/>
-          </a:bodyPr>
-          <a:lstStyle/>
-          <a:p>
-            <a:pPr algn="l">
-              <a:lnSpc>
-                <a:spcPct val="160000"/>
-              </a:lnSpc>
-            </a:pPr>
-            <a:r>
-              <a:rPr sz="1500" b="0">
-                <a:solidFill>
-                  <a:srgbClr val="1C2A33"/>
-                </a:solidFill>
-                <a:latin typeface="楷体"/>
-                <a:ea typeface="楷体"/>
-                <a:cs typeface="楷体"/>
-              </a:rPr>
-              <a:t>完成两篇通讯比较表（人物｜场景｜精神｜选材手法），各维度用一句话概括；并从每篇找1个最打动你的细节写50字赏析。</a:t>
-            </a:r>
-          </a:p>
-        </p:txBody>
-      </p:sp>
-      <p:sp>
-        <p:nvSpPr>
-          <p:cNvPr id="10" name="Rounded Rectangle 9"/>
-          <p:cNvSpPr/>
-          <p:nvPr/>
-        </p:nvSpPr>
-        <p:spPr>
-          <a:xfrm>
-            <a:off x="4399178" y="2194560"/>
-            <a:ext cx="3393338" cy="3840480"/>
-          </a:xfrm>
-          <a:prstGeom prst="roundRect">
-            <a:avLst/>
-          </a:prstGeom>
-          <a:solidFill>
-            <a:srgbClr val="FFFFFF"/>
-          </a:solidFill>
-          <a:ln w="20320">
-            <a:solidFill>
-              <a:srgbClr val="2E7D6B"/>
-            </a:solidFill>
-          </a:ln>
-          <a:effectLst/>
-        </p:spPr>
-        <p:style>
-          <a:lnRef idx="1">
-            <a:schemeClr val="accent1"/>
-          </a:lnRef>
-          <a:fillRef idx="3">
-            <a:schemeClr val="accent1"/>
-          </a:fillRef>
-          <a:effectRef idx="2">
-            <a:schemeClr val="accent1"/>
-          </a:effectRef>
-          <a:fontRef idx="minor">
-            <a:schemeClr val="lt1"/>
-          </a:fontRef>
-        </p:style>
-        <p:txBody>
-          <a:bodyPr rtlCol="0" anchor="ctr"/>
-          <a:lstStyle/>
-          <a:p>
-            <a:pPr algn="ctr"/>
-          </a:p>
-        </p:txBody>
-      </p:sp>
-      <p:sp>
-        <p:nvSpPr>
-          <p:cNvPr id="11" name="Rectangle 10"/>
-          <p:cNvSpPr/>
-          <p:nvPr/>
-        </p:nvSpPr>
-        <p:spPr>
-          <a:xfrm>
-            <a:off x="4399178" y="2194560"/>
-            <a:ext cx="3393338" cy="548640"/>
           </a:xfrm>
           <a:prstGeom prst="rect">
             <a:avLst/>
@@ -8546,92 +7745,14 @@
       </p:sp>
       <p:sp>
         <p:nvSpPr>
-          <p:cNvPr id="12" name="TextBox 11"/>
-          <p:cNvSpPr txBox="1"/>
-          <p:nvPr/>
-        </p:nvSpPr>
-        <p:spPr>
-          <a:xfrm>
-            <a:off x="4399178" y="2304288"/>
-            <a:ext cx="3393338" cy="365760"/>
-          </a:xfrm>
-          <a:prstGeom prst="rect">
-            <a:avLst/>
-          </a:prstGeom>
-          <a:noFill/>
-        </p:spPr>
-        <p:txBody>
-          <a:bodyPr wrap="square" anchor="t" lIns="0" rIns="0" tIns="0" bIns="0">
-            <a:spAutoFit/>
-          </a:bodyPr>
-          <a:lstStyle/>
-          <a:p>
-            <a:pPr algn="ctr"/>
-            <a:r>
-              <a:rPr sz="1600" b="1">
-                <a:solidFill>
-                  <a:srgbClr val="FFFFFF"/>
-                </a:solidFill>
-                <a:latin typeface="微软雅黑"/>
-                <a:ea typeface="微软雅黑"/>
-                <a:cs typeface="微软雅黑"/>
-              </a:rPr>
-              <a:t>提升 · 选做</a:t>
-            </a:r>
-          </a:p>
-        </p:txBody>
-      </p:sp>
-      <p:sp>
-        <p:nvSpPr>
-          <p:cNvPr id="13" name="TextBox 12"/>
-          <p:cNvSpPr txBox="1"/>
-          <p:nvPr/>
-        </p:nvSpPr>
-        <p:spPr>
-          <a:xfrm>
-            <a:off x="4673498" y="2971800"/>
-            <a:ext cx="2844698" cy="2926080"/>
-          </a:xfrm>
-          <a:prstGeom prst="rect">
-            <a:avLst/>
-          </a:prstGeom>
-          <a:noFill/>
-        </p:spPr>
-        <p:txBody>
-          <a:bodyPr wrap="square" anchor="t" lIns="0" rIns="0" tIns="0" bIns="0">
-            <a:spAutoFit/>
-          </a:bodyPr>
-          <a:lstStyle/>
-          <a:p>
-            <a:pPr algn="l">
-              <a:lnSpc>
-                <a:spcPct val="160000"/>
-              </a:lnSpc>
-            </a:pPr>
-            <a:r>
-              <a:rPr sz="1500" b="0">
-                <a:solidFill>
-                  <a:srgbClr val="1C2A33"/>
-                </a:solidFill>
-                <a:latin typeface="楷体"/>
-                <a:ea typeface="楷体"/>
-                <a:cs typeface="楷体"/>
-              </a:rPr>
-              <a:t>写200字短评「劳动光荣不分工种——从三篇通讯看劳动精神的多元呈现」，要求引用≥2篇细节、点明共性、联系当代职业观。</a:t>
-            </a:r>
-          </a:p>
-        </p:txBody>
-      </p:sp>
-      <p:sp>
-        <p:nvSpPr>
-          <p:cNvPr id="14" name="Rounded Rectangle 13"/>
+          <p:cNvPr id="5" name="Rounded Rectangle 4"/>
           <p:cNvSpPr/>
           <p:nvPr/>
         </p:nvSpPr>
         <p:spPr>
           <a:xfrm>
-            <a:off x="8158276" y="2194560"/>
-            <a:ext cx="3393338" cy="3840480"/>
+            <a:off x="640080" y="1417320"/>
+            <a:ext cx="10911535" cy="1417320"/>
           </a:xfrm>
           <a:prstGeom prst="roundRect">
             <a:avLst/>
@@ -8639,9 +7760,9 @@
           <a:solidFill>
             <a:srgbClr val="FFFFFF"/>
           </a:solidFill>
-          <a:ln w="20320">
+          <a:ln w="22860">
             <a:solidFill>
-              <a:srgbClr val="C8A86B"/>
+              <a:srgbClr val="2E7D6B"/>
             </a:solidFill>
           </a:ln>
           <a:effectLst/>
@@ -8670,23 +7791,107 @@
       </p:sp>
       <p:sp>
         <p:nvSpPr>
-          <p:cNvPr id="15" name="Rectangle 14"/>
+          <p:cNvPr id="6" name="TextBox 5"/>
+          <p:cNvSpPr txBox="1"/>
+          <p:nvPr/>
+        </p:nvSpPr>
+        <p:spPr>
+          <a:xfrm>
+            <a:off x="1371600" y="1527048"/>
+            <a:ext cx="9997135" cy="457200"/>
+          </a:xfrm>
+          <a:prstGeom prst="rect">
+            <a:avLst/>
+          </a:prstGeom>
+          <a:noFill/>
+        </p:spPr>
+        <p:txBody>
+          <a:bodyPr wrap="square" anchor="t" lIns="0" rIns="0" tIns="0" bIns="0">
+            <a:spAutoFit/>
+          </a:bodyPr>
+          <a:lstStyle/>
+          <a:p>
+            <a:pPr algn="l">
+              <a:lnSpc>
+                <a:spcPct val="110000"/>
+              </a:lnSpc>
+            </a:pPr>
+            <a:r>
+              <a:rPr sz="1600" b="1">
+                <a:solidFill>
+                  <a:srgbClr val="1C2A33"/>
+                </a:solidFill>
+                <a:latin typeface="微软雅黑"/>
+                <a:ea typeface="微软雅黑"/>
+                <a:cs typeface="微软雅黑"/>
+              </a:rPr>
+              <a:t/>
+            </a:r>
+          </a:p>
+        </p:txBody>
+      </p:sp>
+      <p:sp>
+        <p:nvSpPr>
+          <p:cNvPr id="7" name="TextBox 6"/>
+          <p:cNvSpPr txBox="1"/>
+          <p:nvPr/>
+        </p:nvSpPr>
+        <p:spPr>
+          <a:xfrm>
+            <a:off x="1371600" y="1965960"/>
+            <a:ext cx="9997135" cy="777240"/>
+          </a:xfrm>
+          <a:prstGeom prst="rect">
+            <a:avLst/>
+          </a:prstGeom>
+          <a:noFill/>
+        </p:spPr>
+        <p:txBody>
+          <a:bodyPr wrap="square" anchor="t" lIns="0" rIns="0" tIns="0" bIns="0">
+            <a:spAutoFit/>
+          </a:bodyPr>
+          <a:lstStyle/>
+          <a:p>
+            <a:pPr algn="l">
+              <a:lnSpc>
+                <a:spcPct val="128000"/>
+              </a:lnSpc>
+            </a:pPr>
+            <a:r>
+              <a:rPr sz="1100" b="0">
+                <a:solidFill>
+                  <a:srgbClr val="1C2A33"/>
+                </a:solidFill>
+                <a:latin typeface="楷体"/>
+                <a:ea typeface="楷体"/>
+                <a:cs typeface="楷体"/>
+              </a:rPr>
+              <a:t>【基础作业】1. 完成两篇通讯的比较表（人物|场景|精神|选材手法），各维度用一句话概括。2. 从每篇通讯中找出1个最打动你的细节，各写50字赏析。</a:t>
+            </a:r>
+          </a:p>
+        </p:txBody>
+      </p:sp>
+      <p:sp>
+        <p:nvSpPr>
+          <p:cNvPr id="8" name="Rounded Rectangle 7"/>
           <p:cNvSpPr/>
           <p:nvPr/>
         </p:nvSpPr>
         <p:spPr>
           <a:xfrm>
-            <a:off x="8158276" y="2194560"/>
-            <a:ext cx="3393338" cy="548640"/>
-          </a:xfrm>
-          <a:prstGeom prst="rect">
+            <a:off x="640080" y="2971800"/>
+            <a:ext cx="10911535" cy="1417320"/>
+          </a:xfrm>
+          <a:prstGeom prst="roundRect">
             <a:avLst/>
           </a:prstGeom>
           <a:solidFill>
-            <a:srgbClr val="C8A86B"/>
+            <a:srgbClr val="FFFFFF"/>
           </a:solidFill>
-          <a:ln>
-            <a:noFill/>
+          <a:ln w="22860">
+            <a:solidFill>
+              <a:srgbClr val="2E7D6B"/>
+            </a:solidFill>
           </a:ln>
           <a:effectLst/>
         </p:spPr>
@@ -8714,14 +7919,14 @@
       </p:sp>
       <p:sp>
         <p:nvSpPr>
-          <p:cNvPr id="16" name="TextBox 15"/>
+          <p:cNvPr id="9" name="TextBox 8"/>
           <p:cNvSpPr txBox="1"/>
           <p:nvPr/>
         </p:nvSpPr>
         <p:spPr>
           <a:xfrm>
-            <a:off x="8158276" y="2304288"/>
-            <a:ext cx="3393338" cy="365760"/>
+            <a:off x="1371600" y="3081528"/>
+            <a:ext cx="9997135" cy="457200"/>
           </a:xfrm>
           <a:prstGeom prst="rect">
             <a:avLst/>
@@ -8734,31 +7939,35 @@
           </a:bodyPr>
           <a:lstStyle/>
           <a:p>
-            <a:pPr algn="ctr"/>
+            <a:pPr algn="l">
+              <a:lnSpc>
+                <a:spcPct val="110000"/>
+              </a:lnSpc>
+            </a:pPr>
             <a:r>
               <a:rPr sz="1600" b="1">
                 <a:solidFill>
-                  <a:srgbClr val="FFFFFF"/>
+                  <a:srgbClr val="1C2A33"/>
                 </a:solidFill>
                 <a:latin typeface="微软雅黑"/>
                 <a:ea typeface="微软雅黑"/>
                 <a:cs typeface="微软雅黑"/>
               </a:rPr>
-              <a:t>拓展 · 实践</a:t>
-            </a:r>
-          </a:p>
-        </p:txBody>
-      </p:sp>
-      <p:sp>
-        <p:nvSpPr>
-          <p:cNvPr id="17" name="TextBox 16"/>
+              <a:t/>
+            </a:r>
+          </a:p>
+        </p:txBody>
+      </p:sp>
+      <p:sp>
+        <p:nvSpPr>
+          <p:cNvPr id="10" name="TextBox 9"/>
           <p:cNvSpPr txBox="1"/>
           <p:nvPr/>
         </p:nvSpPr>
         <p:spPr>
           <a:xfrm>
-            <a:off x="8432596" y="2971800"/>
-            <a:ext cx="2844698" cy="2926080"/>
+            <a:off x="1371600" y="3520440"/>
+            <a:ext cx="9997135" cy="777240"/>
           </a:xfrm>
           <a:prstGeom prst="rect">
             <a:avLst/>
@@ -8773,11 +7982,11 @@
           <a:p>
             <a:pPr algn="l">
               <a:lnSpc>
-                <a:spcPct val="160000"/>
+                <a:spcPct val="128000"/>
               </a:lnSpc>
             </a:pPr>
             <a:r>
-              <a:rPr sz="1500" b="0">
+              <a:rPr sz="1100" b="0">
                 <a:solidFill>
                   <a:srgbClr val="1C2A33"/>
                 </a:solidFill>
@@ -8785,14 +7994,14 @@
                 <a:ea typeface="楷体"/>
                 <a:cs typeface="楷体"/>
               </a:rPr>
-              <a:t>用「同主题·异选材·比手法」，假设三篇通讯的选材手法互换会怎样？体会典型选材的力量。</a:t>
-            </a:r>
-          </a:p>
-        </p:txBody>
-      </p:sp>
-      <p:sp>
-        <p:nvSpPr>
-          <p:cNvPr id="18" name="TextBox 17"/>
+              <a:t>【提高作业】写一段200字短评，主题为「劳动光荣不分工种——从三篇通讯看劳动精神的多元呈现」。要求：①引用至少2篇通讯的细节；②点明共性；③联系当代社会职业观念。</a:t>
+            </a:r>
+          </a:p>
+        </p:txBody>
+      </p:sp>
+      <p:sp>
+        <p:nvSpPr>
+          <p:cNvPr id="11" name="TextBox 10"/>
           <p:cNvSpPr txBox="1"/>
           <p:nvPr/>
         </p:nvSpPr>
@@ -8919,13 +8128,13 @@
             <a:r>
               <a:rPr sz="1300" b="1">
                 <a:solidFill>
-                  <a:srgbClr val="B23A2A"/>
+                  <a:srgbClr val="C8A86B"/>
                 </a:solidFill>
                 <a:latin typeface="微软雅黑"/>
                 <a:ea typeface="微软雅黑"/>
                 <a:cs typeface="微软雅黑"/>
               </a:rPr>
-              <a:t>总结 · 劳动光荣不分工种</a:t>
+              <a:t>本课小结</a:t>
             </a:r>
           </a:p>
         </p:txBody>
@@ -8940,611 +8149,6 @@
           <a:xfrm>
             <a:off x="640080" y="1097280"/>
             <a:ext cx="822960" cy="30480"/>
-          </a:xfrm>
-          <a:prstGeom prst="rect">
-            <a:avLst/>
-          </a:prstGeom>
-          <a:solidFill>
-            <a:srgbClr val="B23A2A"/>
-          </a:solidFill>
-          <a:ln>
-            <a:noFill/>
-          </a:ln>
-          <a:effectLst/>
-        </p:spPr>
-        <p:style>
-          <a:lnRef idx="1">
-            <a:schemeClr val="accent1"/>
-          </a:lnRef>
-          <a:fillRef idx="3">
-            <a:schemeClr val="accent1"/>
-          </a:fillRef>
-          <a:effectRef idx="2">
-            <a:schemeClr val="accent1"/>
-          </a:effectRef>
-          <a:fontRef idx="minor">
-            <a:schemeClr val="lt1"/>
-          </a:fontRef>
-        </p:style>
-        <p:txBody>
-          <a:bodyPr rtlCol="0" anchor="ctr"/>
-          <a:lstStyle/>
-          <a:p>
-            <a:pPr algn="ctr"/>
-          </a:p>
-        </p:txBody>
-      </p:sp>
-      <p:sp>
-        <p:nvSpPr>
-          <p:cNvPr id="5" name="TextBox 4"/>
-          <p:cNvSpPr txBox="1"/>
-          <p:nvPr/>
-        </p:nvSpPr>
-        <p:spPr>
-          <a:xfrm>
-            <a:off x="640080" y="1325880"/>
-            <a:ext cx="10515600" cy="640080"/>
-          </a:xfrm>
-          <a:prstGeom prst="rect">
-            <a:avLst/>
-          </a:prstGeom>
-          <a:noFill/>
-        </p:spPr>
-        <p:txBody>
-          <a:bodyPr wrap="square" anchor="t" lIns="0" rIns="0" tIns="0" bIns="0">
-            <a:spAutoFit/>
-          </a:bodyPr>
-          <a:lstStyle/>
-          <a:p>
-            <a:pPr algn="l"/>
-            <a:r>
-              <a:rPr sz="3000" b="1">
-                <a:solidFill>
-                  <a:srgbClr val="1C2A33"/>
-                </a:solidFill>
-                <a:latin typeface="楷体"/>
-                <a:ea typeface="楷体"/>
-                <a:cs typeface="楷体"/>
-              </a:rPr>
-              <a:t>三双手，同一种光荣</a:t>
-            </a:r>
-          </a:p>
-        </p:txBody>
-      </p:sp>
-      <p:sp>
-        <p:nvSpPr>
-          <p:cNvPr id="6" name="Rounded Rectangle 5"/>
-          <p:cNvSpPr/>
-          <p:nvPr/>
-        </p:nvSpPr>
-        <p:spPr>
-          <a:xfrm>
-            <a:off x="640080" y="2286000"/>
-            <a:ext cx="3393338" cy="2286000"/>
-          </a:xfrm>
-          <a:prstGeom prst="roundRect">
-            <a:avLst/>
-          </a:prstGeom>
-          <a:solidFill>
-            <a:srgbClr val="FFFFFF"/>
-          </a:solidFill>
-          <a:ln w="22860">
-            <a:solidFill>
-              <a:srgbClr val="B23A2A"/>
-            </a:solidFill>
-          </a:ln>
-          <a:effectLst/>
-        </p:spPr>
-        <p:style>
-          <a:lnRef idx="1">
-            <a:schemeClr val="accent1"/>
-          </a:lnRef>
-          <a:fillRef idx="3">
-            <a:schemeClr val="accent1"/>
-          </a:fillRef>
-          <a:effectRef idx="2">
-            <a:schemeClr val="accent1"/>
-          </a:effectRef>
-          <a:fontRef idx="minor">
-            <a:schemeClr val="lt1"/>
-          </a:fontRef>
-        </p:style>
-        <p:txBody>
-          <a:bodyPr rtlCol="0" anchor="ctr"/>
-          <a:lstStyle/>
-          <a:p>
-            <a:pPr algn="ctr"/>
-          </a:p>
-        </p:txBody>
-      </p:sp>
-      <p:sp>
-        <p:nvSpPr>
-          <p:cNvPr id="7" name="TextBox 6"/>
-          <p:cNvSpPr txBox="1"/>
-          <p:nvPr/>
-        </p:nvSpPr>
-        <p:spPr>
-          <a:xfrm>
-            <a:off x="868680" y="2514600"/>
-            <a:ext cx="2936138" cy="548640"/>
-          </a:xfrm>
-          <a:prstGeom prst="rect">
-            <a:avLst/>
-          </a:prstGeom>
-          <a:noFill/>
-        </p:spPr>
-        <p:txBody>
-          <a:bodyPr wrap="square" anchor="t" lIns="0" rIns="0" tIns="0" bIns="0">
-            <a:spAutoFit/>
-          </a:bodyPr>
-          <a:lstStyle/>
-          <a:p>
-            <a:pPr algn="ctr"/>
-            <a:r>
-              <a:rPr sz="2400" b="1">
-                <a:solidFill>
-                  <a:srgbClr val="B23A2A"/>
-                </a:solidFill>
-                <a:latin typeface="楷体"/>
-                <a:ea typeface="楷体"/>
-                <a:cs typeface="楷体"/>
-              </a:rPr>
-              <a:t>坚守</a:t>
-            </a:r>
-          </a:p>
-        </p:txBody>
-      </p:sp>
-      <p:sp>
-        <p:nvSpPr>
-          <p:cNvPr id="8" name="TextBox 7"/>
-          <p:cNvSpPr txBox="1"/>
-          <p:nvPr/>
-        </p:nvSpPr>
-        <p:spPr>
-          <a:xfrm>
-            <a:off x="868680" y="3154680"/>
-            <a:ext cx="2936138" cy="457200"/>
-          </a:xfrm>
-          <a:prstGeom prst="rect">
-            <a:avLst/>
-          </a:prstGeom>
-          <a:noFill/>
-        </p:spPr>
-        <p:txBody>
-          <a:bodyPr wrap="square" anchor="t" lIns="0" rIns="0" tIns="0" bIns="0">
-            <a:spAutoFit/>
-          </a:bodyPr>
-          <a:lstStyle/>
-          <a:p>
-            <a:pPr algn="ctr"/>
-            <a:r>
-              <a:rPr sz="1600" b="1">
-                <a:solidFill>
-                  <a:srgbClr val="1C2A33"/>
-                </a:solidFill>
-                <a:latin typeface="微软雅黑"/>
-                <a:ea typeface="微软雅黑"/>
-                <a:cs typeface="微软雅黑"/>
-              </a:rPr>
-              <a:t>张秉贵</a:t>
-            </a:r>
-          </a:p>
-        </p:txBody>
-      </p:sp>
-      <p:sp>
-        <p:nvSpPr>
-          <p:cNvPr id="9" name="TextBox 8"/>
-          <p:cNvSpPr txBox="1"/>
-          <p:nvPr/>
-        </p:nvSpPr>
-        <p:spPr>
-          <a:xfrm>
-            <a:off x="914400" y="3657600"/>
-            <a:ext cx="2844698" cy="822960"/>
-          </a:xfrm>
-          <a:prstGeom prst="rect">
-            <a:avLst/>
-          </a:prstGeom>
-          <a:noFill/>
-        </p:spPr>
-        <p:txBody>
-          <a:bodyPr wrap="square" anchor="t" lIns="0" rIns="0" tIns="0" bIns="0">
-            <a:spAutoFit/>
-          </a:bodyPr>
-          <a:lstStyle/>
-          <a:p>
-            <a:pPr algn="ctr">
-              <a:lnSpc>
-                <a:spcPct val="150000"/>
-              </a:lnSpc>
-            </a:pPr>
-            <a:r>
-              <a:rPr sz="1400" b="0">
-                <a:solidFill>
-                  <a:srgbClr val="1C2A33"/>
-                </a:solidFill>
-                <a:latin typeface="楷体"/>
-                <a:ea typeface="楷体"/>
-                <a:cs typeface="楷体"/>
-              </a:rPr>
-              <a:t>柜台前的一抓准，是把平凡做到极致的执着。</a:t>
-            </a:r>
-          </a:p>
-        </p:txBody>
-      </p:sp>
-      <p:sp>
-        <p:nvSpPr>
-          <p:cNvPr id="10" name="Rounded Rectangle 9"/>
-          <p:cNvSpPr/>
-          <p:nvPr/>
-        </p:nvSpPr>
-        <p:spPr>
-          <a:xfrm>
-            <a:off x="4399178" y="2286000"/>
-            <a:ext cx="3393338" cy="2286000"/>
-          </a:xfrm>
-          <a:prstGeom prst="roundRect">
-            <a:avLst/>
-          </a:prstGeom>
-          <a:solidFill>
-            <a:srgbClr val="FFFFFF"/>
-          </a:solidFill>
-          <a:ln w="22860">
-            <a:solidFill>
-              <a:srgbClr val="2E7D6B"/>
-            </a:solidFill>
-          </a:ln>
-          <a:effectLst/>
-        </p:spPr>
-        <p:style>
-          <a:lnRef idx="1">
-            <a:schemeClr val="accent1"/>
-          </a:lnRef>
-          <a:fillRef idx="3">
-            <a:schemeClr val="accent1"/>
-          </a:fillRef>
-          <a:effectRef idx="2">
-            <a:schemeClr val="accent1"/>
-          </a:effectRef>
-          <a:fontRef idx="minor">
-            <a:schemeClr val="lt1"/>
-          </a:fontRef>
-        </p:style>
-        <p:txBody>
-          <a:bodyPr rtlCol="0" anchor="ctr"/>
-          <a:lstStyle/>
-          <a:p>
-            <a:pPr algn="ctr"/>
-          </a:p>
-        </p:txBody>
-      </p:sp>
-      <p:sp>
-        <p:nvSpPr>
-          <p:cNvPr id="11" name="TextBox 10"/>
-          <p:cNvSpPr txBox="1"/>
-          <p:nvPr/>
-        </p:nvSpPr>
-        <p:spPr>
-          <a:xfrm>
-            <a:off x="4627778" y="2514600"/>
-            <a:ext cx="2936138" cy="548640"/>
-          </a:xfrm>
-          <a:prstGeom prst="rect">
-            <a:avLst/>
-          </a:prstGeom>
-          <a:noFill/>
-        </p:spPr>
-        <p:txBody>
-          <a:bodyPr wrap="square" anchor="t" lIns="0" rIns="0" tIns="0" bIns="0">
-            <a:spAutoFit/>
-          </a:bodyPr>
-          <a:lstStyle/>
-          <a:p>
-            <a:pPr algn="ctr"/>
-            <a:r>
-              <a:rPr sz="2400" b="1">
-                <a:solidFill>
-                  <a:srgbClr val="2E7D6B"/>
-                </a:solidFill>
-                <a:latin typeface="楷体"/>
-                <a:ea typeface="楷体"/>
-                <a:cs typeface="楷体"/>
-              </a:rPr>
-              <a:t>创新</a:t>
-            </a:r>
-          </a:p>
-        </p:txBody>
-      </p:sp>
-      <p:sp>
-        <p:nvSpPr>
-          <p:cNvPr id="12" name="TextBox 11"/>
-          <p:cNvSpPr txBox="1"/>
-          <p:nvPr/>
-        </p:nvSpPr>
-        <p:spPr>
-          <a:xfrm>
-            <a:off x="4627778" y="3154680"/>
-            <a:ext cx="2936138" cy="457200"/>
-          </a:xfrm>
-          <a:prstGeom prst="rect">
-            <a:avLst/>
-          </a:prstGeom>
-          <a:noFill/>
-        </p:spPr>
-        <p:txBody>
-          <a:bodyPr wrap="square" anchor="t" lIns="0" rIns="0" tIns="0" bIns="0">
-            <a:spAutoFit/>
-          </a:bodyPr>
-          <a:lstStyle/>
-          <a:p>
-            <a:pPr algn="ctr"/>
-            <a:r>
-              <a:rPr sz="1600" b="1">
-                <a:solidFill>
-                  <a:srgbClr val="1C2A33"/>
-                </a:solidFill>
-                <a:latin typeface="微软雅黑"/>
-                <a:ea typeface="微软雅黑"/>
-                <a:cs typeface="微软雅黑"/>
-              </a:rPr>
-              <a:t>袁隆平</a:t>
-            </a:r>
-          </a:p>
-        </p:txBody>
-      </p:sp>
-      <p:sp>
-        <p:nvSpPr>
-          <p:cNvPr id="13" name="TextBox 12"/>
-          <p:cNvSpPr txBox="1"/>
-          <p:nvPr/>
-        </p:nvSpPr>
-        <p:spPr>
-          <a:xfrm>
-            <a:off x="4673498" y="3657600"/>
-            <a:ext cx="2844698" cy="822960"/>
-          </a:xfrm>
-          <a:prstGeom prst="rect">
-            <a:avLst/>
-          </a:prstGeom>
-          <a:noFill/>
-        </p:spPr>
-        <p:txBody>
-          <a:bodyPr wrap="square" anchor="t" lIns="0" rIns="0" tIns="0" bIns="0">
-            <a:spAutoFit/>
-          </a:bodyPr>
-          <a:lstStyle/>
-          <a:p>
-            <a:pPr algn="ctr">
-              <a:lnSpc>
-                <a:spcPct val="150000"/>
-              </a:lnSpc>
-            </a:pPr>
-            <a:r>
-              <a:rPr sz="1400" b="0">
-                <a:solidFill>
-                  <a:srgbClr val="1C2A33"/>
-                </a:solidFill>
-                <a:latin typeface="楷体"/>
-                <a:ea typeface="楷体"/>
-                <a:cs typeface="楷体"/>
-              </a:rPr>
-              <a:t>稻田里的14万株筛选，是用实践质疑权威的勇气。</a:t>
-            </a:r>
-          </a:p>
-        </p:txBody>
-      </p:sp>
-      <p:sp>
-        <p:nvSpPr>
-          <p:cNvPr id="14" name="Rounded Rectangle 13"/>
-          <p:cNvSpPr/>
-          <p:nvPr/>
-        </p:nvSpPr>
-        <p:spPr>
-          <a:xfrm>
-            <a:off x="8158276" y="2286000"/>
-            <a:ext cx="3393338" cy="2286000"/>
-          </a:xfrm>
-          <a:prstGeom prst="roundRect">
-            <a:avLst/>
-          </a:prstGeom>
-          <a:solidFill>
-            <a:srgbClr val="FFFFFF"/>
-          </a:solidFill>
-          <a:ln w="22860">
-            <a:solidFill>
-              <a:srgbClr val="C8A86B"/>
-            </a:solidFill>
-          </a:ln>
-          <a:effectLst/>
-        </p:spPr>
-        <p:style>
-          <a:lnRef idx="1">
-            <a:schemeClr val="accent1"/>
-          </a:lnRef>
-          <a:fillRef idx="3">
-            <a:schemeClr val="accent1"/>
-          </a:fillRef>
-          <a:effectRef idx="2">
-            <a:schemeClr val="accent1"/>
-          </a:effectRef>
-          <a:fontRef idx="minor">
-            <a:schemeClr val="lt1"/>
-          </a:fontRef>
-        </p:style>
-        <p:txBody>
-          <a:bodyPr rtlCol="0" anchor="ctr"/>
-          <a:lstStyle/>
-          <a:p>
-            <a:pPr algn="ctr"/>
-          </a:p>
-        </p:txBody>
-      </p:sp>
-      <p:sp>
-        <p:nvSpPr>
-          <p:cNvPr id="15" name="TextBox 14"/>
-          <p:cNvSpPr txBox="1"/>
-          <p:nvPr/>
-        </p:nvSpPr>
-        <p:spPr>
-          <a:xfrm>
-            <a:off x="8386876" y="2514600"/>
-            <a:ext cx="2936138" cy="548640"/>
-          </a:xfrm>
-          <a:prstGeom prst="rect">
-            <a:avLst/>
-          </a:prstGeom>
-          <a:noFill/>
-        </p:spPr>
-        <p:txBody>
-          <a:bodyPr wrap="square" anchor="t" lIns="0" rIns="0" tIns="0" bIns="0">
-            <a:spAutoFit/>
-          </a:bodyPr>
-          <a:lstStyle/>
-          <a:p>
-            <a:pPr algn="ctr"/>
-            <a:r>
-              <a:rPr sz="2400" b="1">
-                <a:solidFill>
-                  <a:srgbClr val="C8A86B"/>
-                </a:solidFill>
-                <a:latin typeface="楷体"/>
-                <a:ea typeface="楷体"/>
-                <a:cs typeface="楷体"/>
-              </a:rPr>
-              <a:t>奉献</a:t>
-            </a:r>
-          </a:p>
-        </p:txBody>
-      </p:sp>
-      <p:sp>
-        <p:nvSpPr>
-          <p:cNvPr id="16" name="TextBox 15"/>
-          <p:cNvSpPr txBox="1"/>
-          <p:nvPr/>
-        </p:nvSpPr>
-        <p:spPr>
-          <a:xfrm>
-            <a:off x="8386876" y="3154680"/>
-            <a:ext cx="2936138" cy="457200"/>
-          </a:xfrm>
-          <a:prstGeom prst="rect">
-            <a:avLst/>
-          </a:prstGeom>
-          <a:noFill/>
-        </p:spPr>
-        <p:txBody>
-          <a:bodyPr wrap="square" anchor="t" lIns="0" rIns="0" tIns="0" bIns="0">
-            <a:spAutoFit/>
-          </a:bodyPr>
-          <a:lstStyle/>
-          <a:p>
-            <a:pPr algn="ctr"/>
-            <a:r>
-              <a:rPr sz="1600" b="1">
-                <a:solidFill>
-                  <a:srgbClr val="1C2A33"/>
-                </a:solidFill>
-                <a:latin typeface="微软雅黑"/>
-                <a:ea typeface="微软雅黑"/>
-                <a:cs typeface="微软雅黑"/>
-              </a:rPr>
-              <a:t>钟扬</a:t>
-            </a:r>
-          </a:p>
-        </p:txBody>
-      </p:sp>
-      <p:sp>
-        <p:nvSpPr>
-          <p:cNvPr id="17" name="TextBox 16"/>
-          <p:cNvSpPr txBox="1"/>
-          <p:nvPr/>
-        </p:nvSpPr>
-        <p:spPr>
-          <a:xfrm>
-            <a:off x="8432596" y="3657600"/>
-            <a:ext cx="2844698" cy="822960"/>
-          </a:xfrm>
-          <a:prstGeom prst="rect">
-            <a:avLst/>
-          </a:prstGeom>
-          <a:noFill/>
-        </p:spPr>
-        <p:txBody>
-          <a:bodyPr wrap="square" anchor="t" lIns="0" rIns="0" tIns="0" bIns="0">
-            <a:spAutoFit/>
-          </a:bodyPr>
-          <a:lstStyle/>
-          <a:p>
-            <a:pPr algn="ctr">
-              <a:lnSpc>
-                <a:spcPct val="150000"/>
-              </a:lnSpc>
-            </a:pPr>
-            <a:r>
-              <a:rPr sz="1400" b="0">
-                <a:solidFill>
-                  <a:srgbClr val="1C2A33"/>
-                </a:solidFill>
-                <a:latin typeface="楷体"/>
-                <a:ea typeface="楷体"/>
-                <a:cs typeface="楷体"/>
-              </a:rPr>
-              <a:t>高原上的4000万颗种子，是把生命写进未来的胸怀。</a:t>
-            </a:r>
-          </a:p>
-        </p:txBody>
-      </p:sp>
-      <p:sp>
-        <p:nvSpPr>
-          <p:cNvPr id="18" name="Rounded Rectangle 17"/>
-          <p:cNvSpPr/>
-          <p:nvPr/>
-        </p:nvSpPr>
-        <p:spPr>
-          <a:xfrm>
-            <a:off x="640080" y="4754880"/>
-            <a:ext cx="10911535" cy="1737360"/>
-          </a:xfrm>
-          <a:prstGeom prst="roundRect">
-            <a:avLst/>
-          </a:prstGeom>
-          <a:solidFill>
-            <a:srgbClr val="1C2A33"/>
-          </a:solidFill>
-          <a:effectLst/>
-        </p:spPr>
-        <p:style>
-          <a:lnRef idx="1">
-            <a:schemeClr val="accent1"/>
-          </a:lnRef>
-          <a:fillRef idx="3">
-            <a:schemeClr val="accent1"/>
-          </a:fillRef>
-          <a:effectRef idx="2">
-            <a:schemeClr val="accent1"/>
-          </a:effectRef>
-          <a:fontRef idx="minor">
-            <a:schemeClr val="lt1"/>
-          </a:fontRef>
-        </p:style>
-        <p:txBody>
-          <a:bodyPr rtlCol="0" anchor="ctr"/>
-          <a:lstStyle/>
-          <a:p>
-            <a:pPr algn="ctr"/>
-          </a:p>
-        </p:txBody>
-      </p:sp>
-      <p:sp>
-        <p:nvSpPr>
-          <p:cNvPr id="19" name="Rectangle 18"/>
-          <p:cNvSpPr/>
-          <p:nvPr/>
-        </p:nvSpPr>
-        <p:spPr>
-          <a:xfrm>
-            <a:off x="914400" y="4983480"/>
-            <a:ext cx="54864" cy="381000"/>
           </a:xfrm>
           <a:prstGeom prst="rect">
             <a:avLst/>
@@ -9581,14 +8185,58 @@
       </p:sp>
       <p:sp>
         <p:nvSpPr>
-          <p:cNvPr id="20" name="TextBox 19"/>
+          <p:cNvPr id="5" name="Rectangle 4"/>
+          <p:cNvSpPr/>
+          <p:nvPr/>
+        </p:nvSpPr>
+        <p:spPr>
+          <a:xfrm>
+            <a:off x="640080" y="1737360"/>
+            <a:ext cx="54864" cy="431800"/>
+          </a:xfrm>
+          <a:prstGeom prst="rect">
+            <a:avLst/>
+          </a:prstGeom>
+          <a:solidFill>
+            <a:srgbClr val="C8A86B"/>
+          </a:solidFill>
+          <a:ln>
+            <a:noFill/>
+          </a:ln>
+          <a:effectLst/>
+        </p:spPr>
+        <p:style>
+          <a:lnRef idx="1">
+            <a:schemeClr val="accent1"/>
+          </a:lnRef>
+          <a:fillRef idx="3">
+            <a:schemeClr val="accent1"/>
+          </a:fillRef>
+          <a:effectRef idx="2">
+            <a:schemeClr val="accent1"/>
+          </a:effectRef>
+          <a:fontRef idx="minor">
+            <a:schemeClr val="lt1"/>
+          </a:fontRef>
+        </p:style>
+        <p:txBody>
+          <a:bodyPr rtlCol="0" anchor="ctr"/>
+          <a:lstStyle/>
+          <a:p>
+            <a:pPr algn="ctr"/>
+          </a:p>
+        </p:txBody>
+      </p:sp>
+      <p:sp>
+        <p:nvSpPr>
+          <p:cNvPr id="6" name="TextBox 5"/>
           <p:cNvSpPr txBox="1"/>
           <p:nvPr/>
         </p:nvSpPr>
         <p:spPr>
           <a:xfrm>
-            <a:off x="1143000" y="4937760"/>
-            <a:ext cx="10180015" cy="1463040"/>
+            <a:off x="868680" y="1645920"/>
+            <a:ext cx="10682935" cy="2194560"/>
           </a:xfrm>
           <a:prstGeom prst="rect">
             <a:avLst/>
@@ -9603,47 +8251,43 @@
           <a:p>
             <a:pPr algn="l">
               <a:lnSpc>
-                <a:spcPct val="140000"/>
+                <a:spcPct val="150000"/>
               </a:lnSpc>
               <a:spcAft>
-                <a:spcPts val="800"/>
+                <a:spcPts val="1000"/>
               </a:spcAft>
             </a:pPr>
             <a:r>
-              <a:rPr sz="1800" b="1">
-                <a:solidFill>
-                  <a:srgbClr val="C8A86B"/>
+              <a:rPr sz="2200" b="0">
+                <a:solidFill>
+                  <a:srgbClr val="1C2A33"/>
                 </a:solidFill>
                 <a:latin typeface="楷体"/>
                 <a:ea typeface="楷体"/>
                 <a:cs typeface="楷体"/>
               </a:rPr>
-              <a:t>群文比较口诀：同主题 · 异选材 · 比手法。</a:t>
-            </a:r>
-          </a:p>
-          <a:p>
-            <a:pPr algn="l">
-              <a:lnSpc>
-                <a:spcPct val="150000"/>
-              </a:lnSpc>
-            </a:pPr>
-            <a:r>
-              <a:rPr sz="1500" b="0">
-                <a:solidFill>
-                  <a:srgbClr val="FFFFFF"/>
-                </a:solidFill>
-                <a:latin typeface="楷体"/>
-                <a:ea typeface="楷体"/>
-                <a:cs typeface="楷体"/>
+              <a:t>本单元主题：劳动光荣。把今天学到的方法带进下一篇——自己读、自己想、自己写。</a:t>
+            </a:r>
+          </a:p>
+          <a:p>
+            <a:pPr algn="l"/>
+            <a:r>
+              <a:rPr sz="1600" b="1">
+                <a:solidFill>
+                  <a:srgbClr val="B23A2A"/>
+                </a:solidFill>
+                <a:latin typeface="微软雅黑"/>
+                <a:ea typeface="微软雅黑"/>
+                <a:cs typeface="微软雅黑"/>
               </a:rPr>
-              <a:t>下节课从「记人」（通讯）转向「说理」（评论）——《以工匠精神雕琢时代品质》。</a:t>
-            </a:r>
-          </a:p>
-        </p:txBody>
-      </p:sp>
-      <p:sp>
-        <p:nvSpPr>
-          <p:cNvPr id="21" name="TextBox 20"/>
+              <a:t>方法迁移：圈关键信息 → 理事件脉络 → 析人物精神</a:t>
+            </a:r>
+          </a:p>
+        </p:txBody>
+      </p:sp>
+      <p:sp>
+        <p:nvSpPr>
+          <p:cNvPr id="7" name="TextBox 6"/>
           <p:cNvSpPr txBox="1"/>
           <p:nvPr/>
         </p:nvSpPr>
